--- a/project/meeting/QuantImmuBench/QuantImmuBench_5工具横评_2026-06-25.pptx
+++ b/project/meeting/QuantImmuBench/QuantImmuBench_5工具横评_2026-06-25.pptx
@@ -4,6 +4,9 @@
   <p:sldMasterIdLst>
     <p:sldMasterId id="2147483648" r:id="rId1"/>
   </p:sldMasterIdLst>
+  <p:notesMasterIdLst>
+    <p:notesMasterId r:id="rId28"/>
+  </p:notesMasterIdLst>
   <p:sldIdLst>
     <p:sldId id="256" r:id="rId2"/>
     <p:sldId id="257" r:id="rId3"/>
@@ -32,9 +35,6 @@
     <p:sldId id="280" r:id="rId26"/>
     <p:sldId id="281" r:id="rId27"/>
   </p:sldIdLst>
-  <p:notesMasterIdLst>
-    <p:notesMasterId r:id="rId28"/>
-  </p:notesMasterIdLst>
   <p:sldSz cx="12192000" cy="6858000"/>
   <p:notesSz cx="6858000" cy="12192000"/>
   <p:defaultTextStyle>
@@ -129,6 +129,11 @@
       </a:defRPr>
     </a:lvl9pPr>
   </p:defaultTextStyle>
+  <p:extLst>
+    <p:ext uri="{EFAFB233-063F-42B5-8137-9DF3F51BA10A}">
+      <p15:sldGuideLst xmlns:p15="http://schemas.microsoft.com/office/powerpoint/2012/main"/>
+    </p:ext>
+  </p:extLst>
 </p:presentation>
 </file>
 
@@ -154,234 +159,10 @@
           <a:chExt cx="0" cy="0"/>
         </a:xfrm>
       </p:grpSpPr>
-      <p:sp>
-        <p:nvSpPr>
-          <p:cNvPr id="2" name="Header Placeholder 1"/>
-          <p:cNvSpPr>
-            <a:spLocks noGrp="1"/>
-          </p:cNvSpPr>
-          <p:nvPr>
-            <p:ph type="hdr" sz="quarter"/>
-          </p:nvPr>
-        </p:nvSpPr>
-        <p:spPr>
-          <a:xfrm>
-            <a:off x="0" y="0"/>
-            <a:ext cx="2971800" cy="458788"/>
-          </a:xfrm>
-          <a:prstGeom prst="rect">
-            <a:avLst/>
-          </a:prstGeom>
-        </p:spPr>
-        <p:txBody>
-          <a:bodyPr vert="horz" lIns="91440" tIns="45720" rIns="91440" bIns="45720" rtlCol="0"/>
-          <a:lstStyle>
-            <a:lvl1pPr algn="l">
-              <a:defRPr sz="1200"/>
-            </a:lvl1pPr>
-          </a:lstStyle>
-          <a:p>
-            <a:endParaRPr lang="en-US"/>
-          </a:p>
-        </p:txBody>
-      </p:sp>
-      <p:sp>
-        <p:nvSpPr>
-          <p:cNvPr id="3" name="Date Placeholder 2"/>
-          <p:cNvSpPr>
-            <a:spLocks noGrp="1"/>
-          </p:cNvSpPr>
-          <p:nvPr>
-            <p:ph type="dt" idx="1"/>
-          </p:nvPr>
-        </p:nvSpPr>
-        <p:spPr>
-          <a:xfrm>
-            <a:off x="3884613" y="0"/>
-            <a:ext cx="2971800" cy="458788"/>
-          </a:xfrm>
-          <a:prstGeom prst="rect">
-            <a:avLst/>
-          </a:prstGeom>
-        </p:spPr>
-        <p:txBody>
-          <a:bodyPr vert="horz" lIns="91440" tIns="45720" rIns="91440" bIns="45720" rtlCol="0"/>
-          <a:lstStyle>
-            <a:lvl1pPr algn="r">
-              <a:defRPr sz="1200"/>
-            </a:lvl1pPr>
-          </a:lstStyle>
-          <a:p>
-            <a:fld id="{5282F153-3F37-0F45-9E97-73ACFA13230C}" type="datetimeFigureOut">
-              <a:rPr lang="en-US"/>
-              <a:t>7/23/19</a:t>
-            </a:fld>
-            <a:endParaRPr lang="en-US"/>
-          </a:p>
-        </p:txBody>
-      </p:sp>
-      <p:sp>
-        <p:nvSpPr>
-          <p:cNvPr id="4" name="Slide Image Placeholder 3"/>
-          <p:cNvSpPr>
-            <a:spLocks noGrp="1" noRot="1" noChangeAspect="1"/>
-          </p:cNvSpPr>
-          <p:nvPr>
-            <p:ph type="sldImg" idx="2"/>
-          </p:nvPr>
-        </p:nvSpPr>
-        <p:spPr>
-          <a:xfrm>
-            <a:off x="685800" y="1143000"/>
-            <a:ext cx="5486400" cy="3086100"/>
-          </a:xfrm>
-          <a:prstGeom prst="rect">
-            <a:avLst/>
-          </a:prstGeom>
-          <a:noFill/>
-          <a:ln w="12700">
-            <a:solidFill>
-              <a:prstClr val="black"/>
-            </a:solidFill>
-          </a:ln>
-        </p:spPr>
-        <p:txBody>
-          <a:bodyPr vert="horz" lIns="91440" tIns="45720" rIns="91440" bIns="45720" rtlCol="0" anchor="ctr"/>
-          <a:lstStyle/>
-          <a:p>
-            <a:endParaRPr lang="en-US"/>
-          </a:p>
-        </p:txBody>
-      </p:sp>
-      <p:sp>
-        <p:nvSpPr>
-          <p:cNvPr id="5" name="Notes Placeholder 4"/>
-          <p:cNvSpPr>
-            <a:spLocks noGrp="1"/>
-          </p:cNvSpPr>
-          <p:nvPr>
-            <p:ph type="body" sz="quarter" idx="3"/>
-          </p:nvPr>
-        </p:nvSpPr>
-        <p:spPr>
-          <a:xfrm>
-            <a:off x="685800" y="4400550"/>
-            <a:ext cx="5486400" cy="3600450"/>
-          </a:xfrm>
-          <a:prstGeom prst="rect">
-            <a:avLst/>
-          </a:prstGeom>
-        </p:spPr>
-        <p:txBody>
-          <a:bodyPr vert="horz" lIns="91440" tIns="45720" rIns="91440" bIns="45720" rtlCol="0"/>
-          <a:lstStyle/>
-          <a:p>
-            <a:pPr lvl="0"/>
-            <a:r>
-              <a:rPr lang="en-US"/>
-              <a:t>Click to edit Master text styles</a:t>
-            </a:r>
-          </a:p>
-          <a:p>
-            <a:pPr lvl="1"/>
-            <a:r>
-              <a:rPr lang="en-US"/>
-              <a:t>Second level</a:t>
-            </a:r>
-          </a:p>
-          <a:p>
-            <a:pPr lvl="2"/>
-            <a:r>
-              <a:rPr lang="en-US"/>
-              <a:t>Third level</a:t>
-            </a:r>
-          </a:p>
-          <a:p>
-            <a:pPr lvl="3"/>
-            <a:r>
-              <a:rPr lang="en-US"/>
-              <a:t>Fourth level</a:t>
-            </a:r>
-          </a:p>
-          <a:p>
-            <a:pPr lvl="4"/>
-            <a:r>
-              <a:rPr lang="en-US"/>
-              <a:t>Fifth level</a:t>
-            </a:r>
-          </a:p>
-        </p:txBody>
-      </p:sp>
-      <p:sp>
-        <p:nvSpPr>
-          <p:cNvPr id="6" name="Footer Placeholder 5"/>
-          <p:cNvSpPr>
-            <a:spLocks noGrp="1"/>
-          </p:cNvSpPr>
-          <p:nvPr>
-            <p:ph type="ftr" sz="quarter" idx="4"/>
-          </p:nvPr>
-        </p:nvSpPr>
-        <p:spPr>
-          <a:xfrm>
-            <a:off x="0" y="8685213"/>
-            <a:ext cx="2971800" cy="458787"/>
-          </a:xfrm>
-          <a:prstGeom prst="rect">
-            <a:avLst/>
-          </a:prstGeom>
-        </p:spPr>
-        <p:txBody>
-          <a:bodyPr vert="horz" lIns="91440" tIns="45720" rIns="91440" bIns="45720" rtlCol="0" anchor="b"/>
-          <a:lstStyle>
-            <a:lvl1pPr algn="l">
-              <a:defRPr sz="1200"/>
-            </a:lvl1pPr>
-          </a:lstStyle>
-          <a:p>
-            <a:endParaRPr lang="en-US"/>
-          </a:p>
-        </p:txBody>
-      </p:sp>
-      <p:sp>
-        <p:nvSpPr>
-          <p:cNvPr id="7" name="Slide Number Placeholder 6"/>
-          <p:cNvSpPr>
-            <a:spLocks noGrp="1"/>
-          </p:cNvSpPr>
-          <p:nvPr>
-            <p:ph type="sldNum" sz="quarter" idx="5"/>
-          </p:nvPr>
-        </p:nvSpPr>
-        <p:spPr>
-          <a:xfrm>
-            <a:off x="3884613" y="8685213"/>
-            <a:ext cx="2971800" cy="458787"/>
-          </a:xfrm>
-          <a:prstGeom prst="rect">
-            <a:avLst/>
-          </a:prstGeom>
-        </p:spPr>
-        <p:txBody>
-          <a:bodyPr vert="horz" lIns="91440" tIns="45720" rIns="91440" bIns="45720" rtlCol="0" anchor="b"/>
-          <a:lstStyle>
-            <a:lvl1pPr algn="r">
-              <a:defRPr sz="1200"/>
-            </a:lvl1pPr>
-          </a:lstStyle>
-          <a:p>
-            <a:fld id="{CE5E9CC1-C706-0F49-92D6-E571CC5EEA8F}" type="slidenum">
-              <a:rPr lang="en-US"/>
-              <a:t>‹#›</a:t>
-            </a:fld>
-            <a:endParaRPr lang="en-US"/>
-          </a:p>
-        </p:txBody>
-      </p:sp>
     </p:spTree>
     <p:extLst>
       <p:ext uri="{BB962C8B-B14F-4D97-AF65-F5344CB8AC3E}">
-        <p14:creationId xmlns:p14="http://schemas.microsoft.com/office/powerpoint/2010/main" val="1024086991"/>
+        <p14:creationId xmlns:p14="http://schemas.microsoft.com/office/powerpoint/2010/main" val="2871387462"/>
       </p:ext>
     </p:extLst>
   </p:cSld>
@@ -525,10 +306,6 @@
           <a:bodyPr/>
           <a:lstStyle/>
           <a:p>
-            <a:r>
-              <a:rPr lang="en-US" dirty="0"/>
-              <a:t/>
-            </a:r>
             <a:endParaRPr lang="en-US" dirty="0"/>
           </a:p>
         </p:txBody>
@@ -613,10 +390,6 @@
           <a:bodyPr/>
           <a:lstStyle/>
           <a:p>
-            <a:r>
-              <a:rPr lang="en-US" dirty="0"/>
-              <a:t/>
-            </a:r>
             <a:endParaRPr lang="en-US" dirty="0"/>
           </a:p>
         </p:txBody>
@@ -701,10 +474,6 @@
           <a:bodyPr/>
           <a:lstStyle/>
           <a:p>
-            <a:r>
-              <a:rPr lang="en-US" dirty="0"/>
-              <a:t/>
-            </a:r>
             <a:endParaRPr lang="en-US" dirty="0"/>
           </a:p>
         </p:txBody>
@@ -789,10 +558,6 @@
           <a:bodyPr/>
           <a:lstStyle/>
           <a:p>
-            <a:r>
-              <a:rPr lang="en-US" dirty="0"/>
-              <a:t/>
-            </a:r>
             <a:endParaRPr lang="en-US" dirty="0"/>
           </a:p>
         </p:txBody>
@@ -877,10 +642,6 @@
           <a:bodyPr/>
           <a:lstStyle/>
           <a:p>
-            <a:r>
-              <a:rPr lang="en-US" dirty="0"/>
-              <a:t/>
-            </a:r>
             <a:endParaRPr lang="en-US" dirty="0"/>
           </a:p>
         </p:txBody>
@@ -965,10 +726,6 @@
           <a:bodyPr/>
           <a:lstStyle/>
           <a:p>
-            <a:r>
-              <a:rPr lang="en-US" dirty="0"/>
-              <a:t/>
-            </a:r>
             <a:endParaRPr lang="en-US" dirty="0"/>
           </a:p>
         </p:txBody>
@@ -1053,10 +810,6 @@
           <a:bodyPr/>
           <a:lstStyle/>
           <a:p>
-            <a:r>
-              <a:rPr lang="en-US" dirty="0"/>
-              <a:t/>
-            </a:r>
             <a:endParaRPr lang="en-US" dirty="0"/>
           </a:p>
         </p:txBody>
@@ -1141,10 +894,6 @@
           <a:bodyPr/>
           <a:lstStyle/>
           <a:p>
-            <a:r>
-              <a:rPr lang="en-US" dirty="0"/>
-              <a:t/>
-            </a:r>
             <a:endParaRPr lang="en-US" dirty="0"/>
           </a:p>
         </p:txBody>
@@ -1229,10 +978,6 @@
           <a:bodyPr/>
           <a:lstStyle/>
           <a:p>
-            <a:r>
-              <a:rPr lang="en-US" dirty="0"/>
-              <a:t/>
-            </a:r>
             <a:endParaRPr lang="en-US" dirty="0"/>
           </a:p>
         </p:txBody>
@@ -1317,10 +1062,6 @@
           <a:bodyPr/>
           <a:lstStyle/>
           <a:p>
-            <a:r>
-              <a:rPr lang="en-US" dirty="0"/>
-              <a:t/>
-            </a:r>
             <a:endParaRPr lang="en-US" dirty="0"/>
           </a:p>
         </p:txBody>
@@ -1405,10 +1146,6 @@
           <a:bodyPr/>
           <a:lstStyle/>
           <a:p>
-            <a:r>
-              <a:rPr lang="en-US" dirty="0"/>
-              <a:t/>
-            </a:r>
             <a:endParaRPr lang="en-US" dirty="0"/>
           </a:p>
         </p:txBody>
@@ -1493,10 +1230,6 @@
           <a:bodyPr/>
           <a:lstStyle/>
           <a:p>
-            <a:r>
-              <a:rPr lang="en-US" dirty="0"/>
-              <a:t/>
-            </a:r>
             <a:endParaRPr lang="en-US" dirty="0"/>
           </a:p>
         </p:txBody>
@@ -1581,10 +1314,6 @@
           <a:bodyPr/>
           <a:lstStyle/>
           <a:p>
-            <a:r>
-              <a:rPr lang="en-US" dirty="0"/>
-              <a:t/>
-            </a:r>
             <a:endParaRPr lang="en-US" dirty="0"/>
           </a:p>
         </p:txBody>
@@ -1669,10 +1398,6 @@
           <a:bodyPr/>
           <a:lstStyle/>
           <a:p>
-            <a:r>
-              <a:rPr lang="en-US" dirty="0"/>
-              <a:t/>
-            </a:r>
             <a:endParaRPr lang="en-US" dirty="0"/>
           </a:p>
         </p:txBody>
@@ -1757,10 +1482,6 @@
           <a:bodyPr/>
           <a:lstStyle/>
           <a:p>
-            <a:r>
-              <a:rPr lang="en-US" dirty="0"/>
-              <a:t/>
-            </a:r>
             <a:endParaRPr lang="en-US" dirty="0"/>
           </a:p>
         </p:txBody>
@@ -1845,10 +1566,6 @@
           <a:bodyPr/>
           <a:lstStyle/>
           <a:p>
-            <a:r>
-              <a:rPr lang="en-US" dirty="0"/>
-              <a:t/>
-            </a:r>
             <a:endParaRPr lang="en-US" dirty="0"/>
           </a:p>
         </p:txBody>
@@ -1933,10 +1650,6 @@
           <a:bodyPr/>
           <a:lstStyle/>
           <a:p>
-            <a:r>
-              <a:rPr lang="en-US" dirty="0"/>
-              <a:t/>
-            </a:r>
             <a:endParaRPr lang="en-US" dirty="0"/>
           </a:p>
         </p:txBody>
@@ -2021,10 +1734,6 @@
           <a:bodyPr/>
           <a:lstStyle/>
           <a:p>
-            <a:r>
-              <a:rPr lang="en-US" dirty="0"/>
-              <a:t/>
-            </a:r>
             <a:endParaRPr lang="en-US" dirty="0"/>
           </a:p>
         </p:txBody>
@@ -2109,10 +1818,6 @@
           <a:bodyPr/>
           <a:lstStyle/>
           <a:p>
-            <a:r>
-              <a:rPr lang="en-US" dirty="0"/>
-              <a:t/>
-            </a:r>
             <a:endParaRPr lang="en-US" dirty="0"/>
           </a:p>
         </p:txBody>
@@ -2197,10 +1902,6 @@
           <a:bodyPr/>
           <a:lstStyle/>
           <a:p>
-            <a:r>
-              <a:rPr lang="en-US" dirty="0"/>
-              <a:t/>
-            </a:r>
             <a:endParaRPr lang="en-US" dirty="0"/>
           </a:p>
         </p:txBody>
@@ -2285,10 +1986,6 @@
           <a:bodyPr/>
           <a:lstStyle/>
           <a:p>
-            <a:r>
-              <a:rPr lang="en-US" dirty="0"/>
-              <a:t/>
-            </a:r>
             <a:endParaRPr lang="en-US" dirty="0"/>
           </a:p>
         </p:txBody>
@@ -2373,10 +2070,6 @@
           <a:bodyPr/>
           <a:lstStyle/>
           <a:p>
-            <a:r>
-              <a:rPr lang="en-US" dirty="0"/>
-              <a:t/>
-            </a:r>
             <a:endParaRPr lang="en-US" dirty="0"/>
           </a:p>
         </p:txBody>
@@ -2461,10 +2154,6 @@
           <a:bodyPr/>
           <a:lstStyle/>
           <a:p>
-            <a:r>
-              <a:rPr lang="en-US" dirty="0"/>
-              <a:t/>
-            </a:r>
             <a:endParaRPr lang="en-US" dirty="0"/>
           </a:p>
         </p:txBody>
@@ -2549,10 +2238,6 @@
           <a:bodyPr/>
           <a:lstStyle/>
           <a:p>
-            <a:r>
-              <a:rPr lang="en-US" dirty="0"/>
-              <a:t/>
-            </a:r>
             <a:endParaRPr lang="en-US" dirty="0"/>
           </a:p>
         </p:txBody>
@@ -2637,10 +2322,6 @@
           <a:bodyPr/>
           <a:lstStyle/>
           <a:p>
-            <a:r>
-              <a:rPr lang="en-US" dirty="0"/>
-              <a:t/>
-            </a:r>
             <a:endParaRPr lang="en-US" dirty="0"/>
           </a:p>
         </p:txBody>
@@ -2725,10 +2406,6 @@
           <a:bodyPr/>
           <a:lstStyle/>
           <a:p>
-            <a:r>
-              <a:rPr lang="en-US" dirty="0"/>
-              <a:t/>
-            </a:r>
             <a:endParaRPr lang="en-US" dirty="0"/>
           </a:p>
         </p:txBody>
@@ -2802,6 +2479,11 @@
 <file path=ppt/slideMasters/slideMaster1.xml><?xml version="1.0" encoding="utf-8"?>
 <p:sldMaster xmlns:a="http://schemas.openxmlformats.org/drawingml/2006/main" xmlns:r="http://schemas.openxmlformats.org/officeDocument/2006/relationships" xmlns:p="http://schemas.openxmlformats.org/presentationml/2006/main">
   <p:cSld>
+    <p:bg>
+      <p:bgRef idx="1001">
+        <a:schemeClr val="bg1"/>
+      </p:bgRef>
+    </p:bg>
     <p:spTree>
       <p:nvGrpSpPr>
         <p:cNvPr id="1" name=""/>
@@ -3084,6 +2766,7 @@
         <a:solidFill>
           <a:srgbClr val="0B3C49"/>
         </a:solidFill>
+        <a:effectLst/>
       </p:bgPr>
     </p:bg>
     <p:spTree>
@@ -3185,11 +2868,11 @@
           <a:bodyPr wrap="square" lIns="0" tIns="0" rIns="0" bIns="0" rtlCol="0" anchor="ctr"/>
           <a:lstStyle/>
           <a:p>
-            <a:pPr indent="0" marL="0">
-              <a:buNone/>
-            </a:pPr>
-            <a:r>
-              <a:rPr lang="en-US" sz="1500" b="1" spc="200" kern="0" dirty="0">
+            <a:pPr marL="0" indent="0">
+              <a:buNone/>
+            </a:pPr>
+            <a:r>
+              <a:rPr lang="en-US" sz="1500" b="1" kern="0" spc="200" dirty="0">
                 <a:solidFill>
                   <a:srgbClr val="02C39A"/>
                 </a:solidFill>
@@ -3224,7 +2907,7 @@
           <a:bodyPr wrap="square" lIns="0" tIns="0" rIns="0" bIns="0" rtlCol="0" anchor="ctr"/>
           <a:lstStyle/>
           <a:p>
-            <a:pPr indent="0" marL="0">
+            <a:pPr marL="0" indent="0">
               <a:lnSpc>
                 <a:spcPct val="105000"/>
               </a:lnSpc>
@@ -3244,7 +2927,7 @@
             <a:endParaRPr lang="en-US" sz="4200" dirty="0"/>
           </a:p>
           <a:p>
-            <a:pPr indent="0" marL="0">
+            <a:pPr marL="0" indent="0">
               <a:lnSpc>
                 <a:spcPct val="105000"/>
               </a:lnSpc>
@@ -3286,7 +2969,7 @@
           <a:bodyPr wrap="square" lIns="0" tIns="0" rIns="0" bIns="0" rtlCol="0" anchor="ctr"/>
           <a:lstStyle/>
           <a:p>
-            <a:pPr indent="0" marL="0">
+            <a:pPr marL="0" indent="0">
               <a:buNone/>
             </a:pPr>
             <a:r>
@@ -3348,7 +3031,7 @@
           <a:bodyPr wrap="square" lIns="0" tIns="0" rIns="0" bIns="0" rtlCol="0" anchor="t"/>
           <a:lstStyle/>
           <a:p>
-            <a:pPr indent="0" marL="0">
+            <a:pPr marL="0" indent="0">
               <a:buNone/>
             </a:pPr>
             <a:r>
@@ -3362,9 +3045,6 @@
               </a:rPr>
               <a:t>内容  </a:t>
             </a:r>
-            <a:pPr indent="0" marL="0">
-              <a:buNone/>
-            </a:pPr>
             <a:r>
               <a:rPr lang="en-US" sz="1300" dirty="0">
                 <a:solidFill>
@@ -3379,7 +3059,7 @@
             <a:endParaRPr lang="en-US" sz="1300" dirty="0"/>
           </a:p>
           <a:p>
-            <a:pPr indent="0" marL="0">
+            <a:pPr marL="0" indent="0">
               <a:buNone/>
             </a:pPr>
             <a:r>
@@ -3393,9 +3073,6 @@
               </a:rPr>
               <a:t>项目  </a:t>
             </a:r>
-            <a:pPr indent="0" marL="0">
-              <a:buNone/>
-            </a:pPr>
             <a:r>
               <a:rPr lang="en-US" sz="1300" dirty="0">
                 <a:solidFill>
@@ -3432,7 +3109,7 @@
           <a:bodyPr wrap="square" lIns="0" tIns="0" rIns="0" bIns="0" rtlCol="0" anchor="ctr"/>
           <a:lstStyle/>
           <a:p>
-            <a:pPr algn="r" indent="0" marL="0">
+            <a:pPr marL="0" indent="0" algn="r">
               <a:buNone/>
             </a:pPr>
             <a:r>
@@ -3466,6 +3143,7 @@
         <a:solidFill>
           <a:srgbClr val="F2F7F7"/>
         </a:solidFill>
+        <a:effectLst/>
       </p:bgPr>
     </p:bg>
     <p:spTree>
@@ -3523,11 +3201,11 @@
           <a:bodyPr wrap="square" lIns="0" tIns="0" rIns="0" bIns="0" rtlCol="0" anchor="ctr"/>
           <a:lstStyle/>
           <a:p>
-            <a:pPr indent="0" marL="0">
-              <a:buNone/>
-            </a:pPr>
-            <a:r>
-              <a:rPr lang="en-US" sz="1200" b="1" spc="300" kern="0" dirty="0">
+            <a:pPr marL="0" indent="0">
+              <a:buNone/>
+            </a:pPr>
+            <a:r>
+              <a:rPr lang="en-US" sz="1200" b="1" kern="0" spc="300" dirty="0">
                 <a:solidFill>
                   <a:srgbClr val="028090"/>
                 </a:solidFill>
@@ -3562,7 +3240,7 @@
           <a:bodyPr wrap="square" lIns="0" tIns="0" rIns="0" bIns="0" rtlCol="0" anchor="ctr"/>
           <a:lstStyle/>
           <a:p>
-            <a:pPr indent="0" marL="0">
+            <a:pPr marL="0" indent="0">
               <a:buNone/>
             </a:pPr>
             <a:r>
@@ -3601,7 +3279,7 @@
           <a:bodyPr wrap="square" lIns="0" tIns="0" rIns="0" bIns="0" rtlCol="0" anchor="ctr"/>
           <a:lstStyle/>
           <a:p>
-            <a:pPr indent="0" marL="0">
+            <a:pPr marL="0" indent="0">
               <a:buNone/>
             </a:pPr>
             <a:r>
@@ -3662,7 +3340,7 @@
           <a:bodyPr wrap="square" lIns="0" tIns="0" rIns="0" bIns="0" rtlCol="0" anchor="ctr"/>
           <a:lstStyle/>
           <a:p>
-            <a:pPr algn="ctr" indent="0" marL="0">
+            <a:pPr marL="0" indent="0" algn="ctr">
               <a:buNone/>
             </a:pPr>
             <a:r>
@@ -3701,7 +3379,7 @@
           <a:bodyPr wrap="square" lIns="0" tIns="0" rIns="0" bIns="0" rtlCol="0" anchor="ctr"/>
           <a:lstStyle/>
           <a:p>
-            <a:pPr algn="ctr" indent="0" marL="0">
+            <a:pPr marL="0" indent="0" algn="ctr">
               <a:buNone/>
             </a:pPr>
             <a:r>
@@ -3743,7 +3421,7 @@
             <a:prstDash val="solid"/>
           </a:ln>
           <a:effectLst>
-            <a:outerShdw sx="100000" sy="100000" kx="0" ky="0" algn="bl" rotWithShape="0" blurRad="114300" dist="38100" dir="8100000">
+            <a:outerShdw blurRad="114300" dist="38100" dir="8100000" algn="bl" rotWithShape="0">
               <a:srgbClr val="0B3C49">
                 <a:alpha val="12000"/>
               </a:srgbClr>
@@ -3792,7 +3470,7 @@
           <a:bodyPr wrap="square" lIns="0" tIns="0" rIns="0" bIns="0" rtlCol="0" anchor="ctr"/>
           <a:lstStyle/>
           <a:p>
-            <a:pPr indent="0" marL="0">
+            <a:pPr marL="0" indent="0">
               <a:buNone/>
             </a:pPr>
             <a:r>
@@ -3898,7 +3576,7 @@
             <a:prstDash val="solid"/>
           </a:ln>
           <a:effectLst>
-            <a:outerShdw sx="100000" sy="100000" kx="0" ky="0" algn="bl" rotWithShape="0" blurRad="114300" dist="38100" dir="8100000">
+            <a:outerShdw blurRad="114300" dist="38100" dir="8100000" algn="bl" rotWithShape="0">
               <a:srgbClr val="0B3C49">
                 <a:alpha val="12000"/>
               </a:srgbClr>
@@ -3947,7 +3625,7 @@
           <a:bodyPr wrap="square" lIns="0" tIns="0" rIns="0" bIns="0" rtlCol="0" anchor="ctr"/>
           <a:lstStyle/>
           <a:p>
-            <a:pPr indent="0" marL="0">
+            <a:pPr marL="0" indent="0">
               <a:buNone/>
             </a:pPr>
             <a:r>
@@ -4074,7 +3752,7 @@
             <a:prstDash val="solid"/>
           </a:ln>
           <a:effectLst>
-            <a:outerShdw sx="100000" sy="100000" kx="0" ky="0" algn="bl" rotWithShape="0" blurRad="114300" dist="38100" dir="8100000">
+            <a:outerShdw blurRad="114300" dist="38100" dir="8100000" algn="bl" rotWithShape="0">
               <a:srgbClr val="0B3C49">
                 <a:alpha val="12000"/>
               </a:srgbClr>
@@ -4123,7 +3801,7 @@
           <a:bodyPr wrap="square" lIns="0" tIns="0" rIns="0" bIns="0" rtlCol="0" anchor="ctr"/>
           <a:lstStyle/>
           <a:p>
-            <a:pPr indent="0" marL="0">
+            <a:pPr marL="0" indent="0">
               <a:buNone/>
             </a:pPr>
             <a:r>
@@ -4250,7 +3928,7 @@
             <a:prstDash val="solid"/>
           </a:ln>
           <a:effectLst>
-            <a:outerShdw sx="100000" sy="100000" kx="0" ky="0" algn="bl" rotWithShape="0" blurRad="114300" dist="38100" dir="8100000">
+            <a:outerShdw blurRad="114300" dist="38100" dir="8100000" algn="bl" rotWithShape="0">
               <a:srgbClr val="0B3C49">
                 <a:alpha val="12000"/>
               </a:srgbClr>
@@ -4299,7 +3977,7 @@
           <a:bodyPr wrap="square" lIns="0" tIns="0" rIns="0" bIns="0" rtlCol="0" anchor="ctr"/>
           <a:lstStyle/>
           <a:p>
-            <a:pPr indent="0" marL="0">
+            <a:pPr marL="0" indent="0">
               <a:buNone/>
             </a:pPr>
             <a:r>
@@ -4423,7 +4101,7 @@
           <a:bodyPr wrap="square" lIns="0" tIns="0" rIns="0" bIns="0" rtlCol="0" anchor="t"/>
           <a:lstStyle/>
           <a:p>
-            <a:pPr indent="0" marL="0">
+            <a:pPr marL="0" indent="0">
               <a:buNone/>
             </a:pPr>
             <a:r>
@@ -4437,9 +4115,6 @@
               </a:rPr>
               <a:t>来源  </a:t>
             </a:r>
-            <a:pPr indent="0" marL="0">
-              <a:buNone/>
-            </a:pPr>
             <a:r>
               <a:rPr lang="en-US" sz="900" i="1" dirty="0">
                 <a:solidFill>
@@ -4451,9 +4126,6 @@
               </a:rPr>
               <a:t>pTuneos, Genome Medicine 2019</a:t>
             </a:r>
-            <a:pPr indent="0" marL="0">
-              <a:buNone/>
-            </a:pPr>
             <a:r>
               <a:rPr lang="en-US" sz="900" i="1" u="sng" dirty="0">
                 <a:solidFill>
@@ -4462,7 +4134,7 @@
                 <a:latin typeface="Microsoft YaHei" pitchFamily="34" charset="0"/>
                 <a:ea typeface="Microsoft YaHei" pitchFamily="34" charset="-122"/>
                 <a:cs typeface="Microsoft YaHei" pitchFamily="34" charset="-120"/>
-                <a:hlinkClick r:id="rId1" invalidUrl="" action="" tgtFrame="" tooltip="DOI" history="1" highlightClick="0" endSnd="0">
+                <a:hlinkClick r:id="rId3" tooltip="DOI">
                   <a:extLst>
                     <a:ext uri="{A12FA001-AC4F-418D-AE19-62706E023703}">
                       <ahyp:hlinkClr xmlns:ahyp="http://schemas.microsoft.com/office/drawing/2018/hyperlinkcolor" val="tx"/>
@@ -4472,9 +4144,6 @@
               </a:rPr>
               <a:t> · DOI 10.1186/s13073-019-0679-x</a:t>
             </a:r>
-            <a:pPr indent="0" marL="0">
-              <a:buNone/>
-            </a:pPr>
             <a:r>
               <a:rPr lang="en-US" sz="900" i="1" u="sng" dirty="0">
                 <a:solidFill>
@@ -4483,7 +4152,7 @@
                 <a:latin typeface="Microsoft YaHei" pitchFamily="34" charset="0"/>
                 <a:ea typeface="Microsoft YaHei" pitchFamily="34" charset="-122"/>
                 <a:cs typeface="Microsoft YaHei" pitchFamily="34" charset="-120"/>
-                <a:hlinkClick r:id="rId2" invalidUrl="" action="" tgtFrame="" tooltip="repo" history="1" highlightClick="0" endSnd="0">
+                <a:hlinkClick r:id="rId4" tooltip="repo">
                   <a:extLst>
                     <a:ext uri="{A12FA001-AC4F-418D-AE19-62706E023703}">
                       <ahyp:hlinkClr xmlns:ahyp="http://schemas.microsoft.com/office/drawing/2018/hyperlinkcolor" val="tx"/>
@@ -4518,7 +4187,7 @@
           <a:bodyPr wrap="square" lIns="0" tIns="0" rIns="0" bIns="0" rtlCol="0" anchor="ctr"/>
           <a:lstStyle/>
           <a:p>
-            <a:pPr algn="r" indent="0" marL="0">
+            <a:pPr marL="0" indent="0" algn="r">
               <a:buNone/>
             </a:pPr>
             <a:r>
@@ -4552,6 +4221,7 @@
         <a:solidFill>
           <a:srgbClr val="F2F7F7"/>
         </a:solidFill>
+        <a:effectLst/>
       </p:bgPr>
     </p:bg>
     <p:spTree>
@@ -4609,11 +4279,11 @@
           <a:bodyPr wrap="square" lIns="0" tIns="0" rIns="0" bIns="0" rtlCol="0" anchor="ctr"/>
           <a:lstStyle/>
           <a:p>
-            <a:pPr indent="0" marL="0">
-              <a:buNone/>
-            </a:pPr>
-            <a:r>
-              <a:rPr lang="en-US" sz="1200" b="1" spc="300" kern="0" dirty="0">
+            <a:pPr marL="0" indent="0">
+              <a:buNone/>
+            </a:pPr>
+            <a:r>
+              <a:rPr lang="en-US" sz="1200" b="1" kern="0" spc="300" dirty="0">
                 <a:solidFill>
                   <a:srgbClr val="1C7293"/>
                 </a:solidFill>
@@ -4648,7 +4318,7 @@
           <a:bodyPr wrap="square" lIns="0" tIns="0" rIns="0" bIns="0" rtlCol="0" anchor="ctr"/>
           <a:lstStyle/>
           <a:p>
-            <a:pPr indent="0" marL="0">
+            <a:pPr marL="0" indent="0">
               <a:buNone/>
             </a:pPr>
             <a:r>
@@ -4687,7 +4357,7 @@
           <a:bodyPr wrap="square" lIns="0" tIns="0" rIns="0" bIns="0" rtlCol="0" anchor="ctr"/>
           <a:lstStyle/>
           <a:p>
-            <a:pPr indent="0" marL="0">
+            <a:pPr marL="0" indent="0">
               <a:buNone/>
             </a:pPr>
             <a:r>
@@ -4729,7 +4399,7 @@
             <a:prstDash val="solid"/>
           </a:ln>
           <a:effectLst>
-            <a:outerShdw sx="100000" sy="100000" kx="0" ky="0" algn="bl" rotWithShape="0" blurRad="114300" dist="38100" dir="8100000">
+            <a:outerShdw blurRad="114300" dist="38100" dir="8100000" algn="bl" rotWithShape="0">
               <a:srgbClr val="0B3C49">
                 <a:alpha val="12000"/>
               </a:srgbClr>
@@ -4758,7 +4428,7 @@
           <a:bodyPr wrap="square" lIns="0" tIns="0" rIns="0" bIns="0" rtlCol="0" anchor="ctr"/>
           <a:lstStyle/>
           <a:p>
-            <a:pPr indent="0" marL="0">
+            <a:pPr marL="0" indent="0">
               <a:buNone/>
             </a:pPr>
             <a:r>
@@ -4797,7 +4467,7 @@
           <a:bodyPr wrap="square" lIns="0" tIns="0" rIns="0" bIns="0" rtlCol="0" anchor="t"/>
           <a:lstStyle/>
           <a:p>
-            <a:pPr indent="0" marL="0">
+            <a:pPr marL="0" indent="0">
               <a:lnSpc>
                 <a:spcPct val="115000"/>
               </a:lnSpc>
@@ -4839,7 +4509,7 @@
           <a:bodyPr wrap="square" lIns="0" tIns="0" rIns="0" bIns="0" rtlCol="0" anchor="ctr"/>
           <a:lstStyle/>
           <a:p>
-            <a:pPr indent="0" marL="0">
+            <a:pPr marL="0" indent="0">
               <a:buNone/>
             </a:pPr>
             <a:r>
@@ -4878,7 +4548,7 @@
           <a:bodyPr wrap="square" lIns="0" tIns="0" rIns="0" bIns="0" rtlCol="0" anchor="t"/>
           <a:lstStyle/>
           <a:p>
-            <a:pPr indent="0" marL="0">
+            <a:pPr marL="0" indent="0">
               <a:lnSpc>
                 <a:spcPct val="115000"/>
               </a:lnSpc>
@@ -4920,7 +4590,7 @@
           <a:bodyPr wrap="square" lIns="0" tIns="0" rIns="0" bIns="0" rtlCol="0" anchor="ctr"/>
           <a:lstStyle/>
           <a:p>
-            <a:pPr indent="0" marL="0">
+            <a:pPr marL="0" indent="0">
               <a:buNone/>
             </a:pPr>
             <a:r>
@@ -4959,7 +4629,7 @@
           <a:bodyPr wrap="square" lIns="0" tIns="0" rIns="0" bIns="0" rtlCol="0" anchor="t"/>
           <a:lstStyle/>
           <a:p>
-            <a:pPr indent="0" marL="0">
+            <a:pPr marL="0" indent="0">
               <a:lnSpc>
                 <a:spcPct val="115000"/>
               </a:lnSpc>
@@ -5001,7 +4671,7 @@
           </a:solidFill>
           <a:ln/>
           <a:effectLst>
-            <a:outerShdw sx="100000" sy="100000" kx="0" ky="0" algn="bl" rotWithShape="0" blurRad="114300" dist="38100" dir="8100000">
+            <a:outerShdw blurRad="114300" dist="38100" dir="8100000" algn="bl" rotWithShape="0">
               <a:srgbClr val="0B3C49">
                 <a:alpha val="12000"/>
               </a:srgbClr>
@@ -5030,7 +4700,7 @@
           <a:bodyPr wrap="square" lIns="0" tIns="0" rIns="0" bIns="0" rtlCol="0" anchor="ctr"/>
           <a:lstStyle/>
           <a:p>
-            <a:pPr indent="0" marL="0">
+            <a:pPr marL="0" indent="0">
               <a:buNone/>
             </a:pPr>
             <a:r>
@@ -5069,7 +4739,7 @@
           <a:bodyPr wrap="square" lIns="0" tIns="0" rIns="0" bIns="0" rtlCol="0" anchor="t"/>
           <a:lstStyle/>
           <a:p>
-            <a:pPr indent="0" marL="0">
+            <a:pPr marL="0" indent="0">
               <a:spcAft>
                 <a:spcPts val="100"/>
               </a:spcAft>
@@ -5089,7 +4759,7 @@
             <a:endParaRPr lang="en-US" sz="900" dirty="0"/>
           </a:p>
           <a:p>
-            <a:pPr indent="0" marL="0">
+            <a:pPr marL="0" indent="0">
               <a:spcAft>
                 <a:spcPts val="100"/>
               </a:spcAft>
@@ -5109,7 +4779,7 @@
             <a:endParaRPr lang="en-US" sz="900" dirty="0"/>
           </a:p>
           <a:p>
-            <a:pPr indent="0" marL="0">
+            <a:pPr marL="0" indent="0">
               <a:spcAft>
                 <a:spcPts val="100"/>
               </a:spcAft>
@@ -5129,7 +4799,7 @@
             <a:endParaRPr lang="en-US" sz="900" dirty="0"/>
           </a:p>
           <a:p>
-            <a:pPr indent="0" marL="0">
+            <a:pPr marL="0" indent="0">
               <a:spcAft>
                 <a:spcPts val="100"/>
               </a:spcAft>
@@ -5171,7 +4841,7 @@
           </a:solidFill>
           <a:ln/>
           <a:effectLst>
-            <a:outerShdw sx="100000" sy="100000" kx="0" ky="0" algn="bl" rotWithShape="0" blurRad="114300" dist="38100" dir="8100000">
+            <a:outerShdw blurRad="114300" dist="38100" dir="8100000" algn="bl" rotWithShape="0">
               <a:srgbClr val="0B3C49">
                 <a:alpha val="12000"/>
               </a:srgbClr>
@@ -5200,7 +4870,7 @@
           <a:bodyPr wrap="square" lIns="0" tIns="0" rIns="0" bIns="0" rtlCol="0" anchor="ctr"/>
           <a:lstStyle/>
           <a:p>
-            <a:pPr indent="0" marL="0">
+            <a:pPr marL="0" indent="0">
               <a:buNone/>
             </a:pPr>
             <a:r>
@@ -5239,7 +4909,7 @@
           <a:bodyPr wrap="square" lIns="0" tIns="0" rIns="0" bIns="0" rtlCol="0" anchor="t"/>
           <a:lstStyle/>
           <a:p>
-            <a:pPr indent="0" marL="0">
+            <a:pPr marL="0" indent="0">
               <a:spcAft>
                 <a:spcPts val="100"/>
               </a:spcAft>
@@ -5259,7 +4929,7 @@
             <a:endParaRPr lang="en-US" sz="900" dirty="0"/>
           </a:p>
           <a:p>
-            <a:pPr indent="0" marL="0">
+            <a:pPr marL="0" indent="0">
               <a:spcAft>
                 <a:spcPts val="100"/>
               </a:spcAft>
@@ -5279,7 +4949,7 @@
             <a:endParaRPr lang="en-US" sz="900" dirty="0"/>
           </a:p>
           <a:p>
-            <a:pPr indent="0" marL="0">
+            <a:pPr marL="0" indent="0">
               <a:spcAft>
                 <a:spcPts val="100"/>
               </a:spcAft>
@@ -5321,7 +4991,7 @@
           </a:solidFill>
           <a:ln/>
           <a:effectLst>
-            <a:outerShdw sx="100000" sy="100000" kx="0" ky="0" algn="bl" rotWithShape="0" blurRad="114300" dist="38100" dir="8100000">
+            <a:outerShdw blurRad="114300" dist="38100" dir="8100000" algn="bl" rotWithShape="0">
               <a:srgbClr val="0B3C49">
                 <a:alpha val="12000"/>
               </a:srgbClr>
@@ -5350,7 +5020,7 @@
           <a:bodyPr wrap="square" lIns="0" tIns="0" rIns="0" bIns="0" rtlCol="0" anchor="ctr"/>
           <a:lstStyle/>
           <a:p>
-            <a:pPr indent="0" marL="0">
+            <a:pPr marL="0" indent="0">
               <a:buNone/>
             </a:pPr>
             <a:r>
@@ -5389,7 +5059,7 @@
           <a:bodyPr wrap="square" lIns="0" tIns="0" rIns="0" bIns="0" rtlCol="0" anchor="t"/>
           <a:lstStyle/>
           <a:p>
-            <a:pPr indent="0" marL="0">
+            <a:pPr marL="0" indent="0">
               <a:spcAft>
                 <a:spcPts val="100"/>
               </a:spcAft>
@@ -5409,7 +5079,7 @@
             <a:endParaRPr lang="en-US" sz="900" dirty="0"/>
           </a:p>
           <a:p>
-            <a:pPr indent="0" marL="0">
+            <a:pPr marL="0" indent="0">
               <a:spcAft>
                 <a:spcPts val="100"/>
               </a:spcAft>
@@ -5429,7 +5099,7 @@
             <a:endParaRPr lang="en-US" sz="900" dirty="0"/>
           </a:p>
           <a:p>
-            <a:pPr indent="0" marL="0">
+            <a:pPr marL="0" indent="0">
               <a:spcAft>
                 <a:spcPts val="100"/>
               </a:spcAft>
@@ -5471,7 +5141,7 @@
           <a:bodyPr wrap="square" lIns="0" tIns="0" rIns="0" bIns="0" rtlCol="0" anchor="t"/>
           <a:lstStyle/>
           <a:p>
-            <a:pPr indent="0" marL="0">
+            <a:pPr marL="0" indent="0">
               <a:buNone/>
             </a:pPr>
             <a:r>
@@ -5485,9 +5155,6 @@
               </a:rPr>
               <a:t>来源  </a:t>
             </a:r>
-            <a:pPr indent="0" marL="0">
-              <a:buNone/>
-            </a:pPr>
             <a:r>
               <a:rPr lang="en-US" sz="900" i="1" dirty="0">
                 <a:solidFill>
@@ -5499,9 +5166,6 @@
               </a:rPr>
               <a:t>IMPROVE, Frontiers in Immunology 2024</a:t>
             </a:r>
-            <a:pPr indent="0" marL="0">
-              <a:buNone/>
-            </a:pPr>
             <a:r>
               <a:rPr lang="en-US" sz="900" i="1" u="sng" dirty="0">
                 <a:solidFill>
@@ -5510,7 +5174,7 @@
                 <a:latin typeface="Microsoft YaHei" pitchFamily="34" charset="0"/>
                 <a:ea typeface="Microsoft YaHei" pitchFamily="34" charset="-122"/>
                 <a:cs typeface="Microsoft YaHei" pitchFamily="34" charset="-120"/>
-                <a:hlinkClick r:id="rId1" invalidUrl="" action="" tgtFrame="" tooltip="DOI" history="1" highlightClick="0" endSnd="0">
+                <a:hlinkClick r:id="rId3" tooltip="DOI">
                   <a:extLst>
                     <a:ext uri="{A12FA001-AC4F-418D-AE19-62706E023703}">
                       <ahyp:hlinkClr xmlns:ahyp="http://schemas.microsoft.com/office/drawing/2018/hyperlinkcolor" val="tx"/>
@@ -5520,9 +5184,6 @@
               </a:rPr>
               <a:t> · DOI 10.3389/fimmu.2024.1360281</a:t>
             </a:r>
-            <a:pPr indent="0" marL="0">
-              <a:buNone/>
-            </a:pPr>
             <a:r>
               <a:rPr lang="en-US" sz="900" i="1" u="sng" dirty="0">
                 <a:solidFill>
@@ -5531,7 +5192,7 @@
                 <a:latin typeface="Microsoft YaHei" pitchFamily="34" charset="0"/>
                 <a:ea typeface="Microsoft YaHei" pitchFamily="34" charset="-122"/>
                 <a:cs typeface="Microsoft YaHei" pitchFamily="34" charset="-120"/>
-                <a:hlinkClick r:id="rId2" invalidUrl="" action="" tgtFrame="" tooltip="repo" history="1" highlightClick="0" endSnd="0">
+                <a:hlinkClick r:id="rId4" tooltip="repo">
                   <a:extLst>
                     <a:ext uri="{A12FA001-AC4F-418D-AE19-62706E023703}">
                       <ahyp:hlinkClr xmlns:ahyp="http://schemas.microsoft.com/office/drawing/2018/hyperlinkcolor" val="tx"/>
@@ -5566,7 +5227,7 @@
           <a:bodyPr wrap="square" lIns="0" tIns="0" rIns="0" bIns="0" rtlCol="0" anchor="ctr"/>
           <a:lstStyle/>
           <a:p>
-            <a:pPr algn="r" indent="0" marL="0">
+            <a:pPr marL="0" indent="0" algn="r">
               <a:buNone/>
             </a:pPr>
             <a:r>
@@ -5600,6 +5261,7 @@
         <a:solidFill>
           <a:srgbClr val="F2F7F7"/>
         </a:solidFill>
+        <a:effectLst/>
       </p:bgPr>
     </p:bg>
     <p:spTree>
@@ -5657,11 +5319,11 @@
           <a:bodyPr wrap="square" lIns="0" tIns="0" rIns="0" bIns="0" rtlCol="0" anchor="ctr"/>
           <a:lstStyle/>
           <a:p>
-            <a:pPr indent="0" marL="0">
-              <a:buNone/>
-            </a:pPr>
-            <a:r>
-              <a:rPr lang="en-US" sz="1200" b="1" spc="300" kern="0" dirty="0">
+            <a:pPr marL="0" indent="0">
+              <a:buNone/>
+            </a:pPr>
+            <a:r>
+              <a:rPr lang="en-US" sz="1200" b="1" kern="0" spc="300" dirty="0">
                 <a:solidFill>
                   <a:srgbClr val="1C7293"/>
                 </a:solidFill>
@@ -5696,7 +5358,7 @@
           <a:bodyPr wrap="square" lIns="0" tIns="0" rIns="0" bIns="0" rtlCol="0" anchor="ctr"/>
           <a:lstStyle/>
           <a:p>
-            <a:pPr indent="0" marL="0">
+            <a:pPr marL="0" indent="0">
               <a:buNone/>
             </a:pPr>
             <a:r>
@@ -5735,7 +5397,7 @@
           <a:bodyPr wrap="square" lIns="0" tIns="0" rIns="0" bIns="0" rtlCol="0" anchor="ctr"/>
           <a:lstStyle/>
           <a:p>
-            <a:pPr indent="0" marL="0">
+            <a:pPr marL="0" indent="0">
               <a:buNone/>
             </a:pPr>
             <a:r>
@@ -5796,7 +5458,7 @@
           <a:bodyPr wrap="square" lIns="0" tIns="0" rIns="0" bIns="0" rtlCol="0" anchor="ctr"/>
           <a:lstStyle/>
           <a:p>
-            <a:pPr algn="ctr" indent="0" marL="0">
+            <a:pPr marL="0" indent="0" algn="ctr">
               <a:buNone/>
             </a:pPr>
             <a:r>
@@ -5835,7 +5497,7 @@
           <a:bodyPr wrap="square" lIns="0" tIns="0" rIns="0" bIns="0" rtlCol="0" anchor="ctr"/>
           <a:lstStyle/>
           <a:p>
-            <a:pPr algn="ctr" indent="0" marL="0">
+            <a:pPr marL="0" indent="0" algn="ctr">
               <a:buNone/>
             </a:pPr>
             <a:r>
@@ -5877,7 +5539,7 @@
             <a:prstDash val="solid"/>
           </a:ln>
           <a:effectLst>
-            <a:outerShdw sx="100000" sy="100000" kx="0" ky="0" algn="bl" rotWithShape="0" blurRad="114300" dist="38100" dir="8100000">
+            <a:outerShdw blurRad="114300" dist="38100" dir="8100000" algn="bl" rotWithShape="0">
               <a:srgbClr val="0B3C49">
                 <a:alpha val="12000"/>
               </a:srgbClr>
@@ -5926,7 +5588,7 @@
           <a:bodyPr wrap="square" lIns="0" tIns="0" rIns="0" bIns="0" rtlCol="0" anchor="ctr"/>
           <a:lstStyle/>
           <a:p>
-            <a:pPr indent="0" marL="0">
+            <a:pPr marL="0" indent="0">
               <a:buNone/>
             </a:pPr>
             <a:r>
@@ -6053,7 +5715,7 @@
             <a:prstDash val="solid"/>
           </a:ln>
           <a:effectLst>
-            <a:outerShdw sx="100000" sy="100000" kx="0" ky="0" algn="bl" rotWithShape="0" blurRad="114300" dist="38100" dir="8100000">
+            <a:outerShdw blurRad="114300" dist="38100" dir="8100000" algn="bl" rotWithShape="0">
               <a:srgbClr val="0B3C49">
                 <a:alpha val="12000"/>
               </a:srgbClr>
@@ -6102,7 +5764,7 @@
           <a:bodyPr wrap="square" lIns="0" tIns="0" rIns="0" bIns="0" rtlCol="0" anchor="ctr"/>
           <a:lstStyle/>
           <a:p>
-            <a:pPr indent="0" marL="0">
+            <a:pPr marL="0" indent="0">
               <a:buNone/>
             </a:pPr>
             <a:r>
@@ -6208,7 +5870,7 @@
             <a:prstDash val="solid"/>
           </a:ln>
           <a:effectLst>
-            <a:outerShdw sx="100000" sy="100000" kx="0" ky="0" algn="bl" rotWithShape="0" blurRad="114300" dist="38100" dir="8100000">
+            <a:outerShdw blurRad="114300" dist="38100" dir="8100000" algn="bl" rotWithShape="0">
               <a:srgbClr val="0B3C49">
                 <a:alpha val="12000"/>
               </a:srgbClr>
@@ -6257,7 +5919,7 @@
           <a:bodyPr wrap="square" lIns="0" tIns="0" rIns="0" bIns="0" rtlCol="0" anchor="ctr"/>
           <a:lstStyle/>
           <a:p>
-            <a:pPr indent="0" marL="0">
+            <a:pPr marL="0" indent="0">
               <a:buNone/>
             </a:pPr>
             <a:r>
@@ -6384,7 +6046,7 @@
             <a:prstDash val="solid"/>
           </a:ln>
           <a:effectLst>
-            <a:outerShdw sx="100000" sy="100000" kx="0" ky="0" algn="bl" rotWithShape="0" blurRad="114300" dist="38100" dir="8100000">
+            <a:outerShdw blurRad="114300" dist="38100" dir="8100000" algn="bl" rotWithShape="0">
               <a:srgbClr val="0B3C49">
                 <a:alpha val="12000"/>
               </a:srgbClr>
@@ -6433,7 +6095,7 @@
           <a:bodyPr wrap="square" lIns="0" tIns="0" rIns="0" bIns="0" rtlCol="0" anchor="ctr"/>
           <a:lstStyle/>
           <a:p>
-            <a:pPr indent="0" marL="0">
+            <a:pPr marL="0" indent="0">
               <a:buNone/>
             </a:pPr>
             <a:r>
@@ -6557,7 +6219,7 @@
           <a:bodyPr wrap="square" lIns="0" tIns="0" rIns="0" bIns="0" rtlCol="0" anchor="t"/>
           <a:lstStyle/>
           <a:p>
-            <a:pPr indent="0" marL="0">
+            <a:pPr marL="0" indent="0">
               <a:buNone/>
             </a:pPr>
             <a:r>
@@ -6571,9 +6233,6 @@
               </a:rPr>
               <a:t>来源  </a:t>
             </a:r>
-            <a:pPr indent="0" marL="0">
-              <a:buNone/>
-            </a:pPr>
             <a:r>
               <a:rPr lang="en-US" sz="900" i="1" dirty="0">
                 <a:solidFill>
@@ -6585,9 +6244,6 @@
               </a:rPr>
               <a:t>IMPROVE, Frontiers in Immunology 2024</a:t>
             </a:r>
-            <a:pPr indent="0" marL="0">
-              <a:buNone/>
-            </a:pPr>
             <a:r>
               <a:rPr lang="en-US" sz="900" i="1" u="sng" dirty="0">
                 <a:solidFill>
@@ -6596,7 +6252,7 @@
                 <a:latin typeface="Microsoft YaHei" pitchFamily="34" charset="0"/>
                 <a:ea typeface="Microsoft YaHei" pitchFamily="34" charset="-122"/>
                 <a:cs typeface="Microsoft YaHei" pitchFamily="34" charset="-120"/>
-                <a:hlinkClick r:id="rId1" invalidUrl="" action="" tgtFrame="" tooltip="DOI" history="1" highlightClick="0" endSnd="0">
+                <a:hlinkClick r:id="rId3" tooltip="DOI">
                   <a:extLst>
                     <a:ext uri="{A12FA001-AC4F-418D-AE19-62706E023703}">
                       <ahyp:hlinkClr xmlns:ahyp="http://schemas.microsoft.com/office/drawing/2018/hyperlinkcolor" val="tx"/>
@@ -6606,9 +6262,6 @@
               </a:rPr>
               <a:t> · DOI 10.3389/fimmu.2024.1360281</a:t>
             </a:r>
-            <a:pPr indent="0" marL="0">
-              <a:buNone/>
-            </a:pPr>
             <a:r>
               <a:rPr lang="en-US" sz="900" i="1" u="sng" dirty="0">
                 <a:solidFill>
@@ -6617,7 +6270,7 @@
                 <a:latin typeface="Microsoft YaHei" pitchFamily="34" charset="0"/>
                 <a:ea typeface="Microsoft YaHei" pitchFamily="34" charset="-122"/>
                 <a:cs typeface="Microsoft YaHei" pitchFamily="34" charset="-120"/>
-                <a:hlinkClick r:id="rId2" invalidUrl="" action="" tgtFrame="" tooltip="repo" history="1" highlightClick="0" endSnd="0">
+                <a:hlinkClick r:id="rId4" tooltip="repo">
                   <a:extLst>
                     <a:ext uri="{A12FA001-AC4F-418D-AE19-62706E023703}">
                       <ahyp:hlinkClr xmlns:ahyp="http://schemas.microsoft.com/office/drawing/2018/hyperlinkcolor" val="tx"/>
@@ -6652,7 +6305,7 @@
           <a:bodyPr wrap="square" lIns="0" tIns="0" rIns="0" bIns="0" rtlCol="0" anchor="ctr"/>
           <a:lstStyle/>
           <a:p>
-            <a:pPr algn="r" indent="0" marL="0">
+            <a:pPr marL="0" indent="0" algn="r">
               <a:buNone/>
             </a:pPr>
             <a:r>
@@ -6686,6 +6339,7 @@
         <a:solidFill>
           <a:srgbClr val="F2F7F7"/>
         </a:solidFill>
+        <a:effectLst/>
       </p:bgPr>
     </p:bg>
     <p:spTree>
@@ -6743,11 +6397,11 @@
           <a:bodyPr wrap="square" lIns="0" tIns="0" rIns="0" bIns="0" rtlCol="0" anchor="ctr"/>
           <a:lstStyle/>
           <a:p>
-            <a:pPr indent="0" marL="0">
-              <a:buNone/>
-            </a:pPr>
-            <a:r>
-              <a:rPr lang="en-US" sz="1200" b="1" spc="300" kern="0" dirty="0">
+            <a:pPr marL="0" indent="0">
+              <a:buNone/>
+            </a:pPr>
+            <a:r>
+              <a:rPr lang="en-US" sz="1200" b="1" kern="0" spc="300" dirty="0">
                 <a:solidFill>
                   <a:srgbClr val="028090"/>
                 </a:solidFill>
@@ -6782,7 +6436,7 @@
           <a:bodyPr wrap="square" lIns="0" tIns="0" rIns="0" bIns="0" rtlCol="0" anchor="ctr"/>
           <a:lstStyle/>
           <a:p>
-            <a:pPr indent="0" marL="0">
+            <a:pPr marL="0" indent="0">
               <a:buNone/>
             </a:pPr>
             <a:r>
@@ -6821,7 +6475,7 @@
           <a:bodyPr wrap="square" lIns="0" tIns="0" rIns="0" bIns="0" rtlCol="0" anchor="ctr"/>
           <a:lstStyle/>
           <a:p>
-            <a:pPr indent="0" marL="0">
+            <a:pPr marL="0" indent="0">
               <a:buNone/>
             </a:pPr>
             <a:r>
@@ -6863,7 +6517,7 @@
             <a:prstDash val="solid"/>
           </a:ln>
           <a:effectLst>
-            <a:outerShdw sx="100000" sy="100000" kx="0" ky="0" algn="bl" rotWithShape="0" blurRad="114300" dist="38100" dir="8100000">
+            <a:outerShdw blurRad="114300" dist="38100" dir="8100000" algn="bl" rotWithShape="0">
               <a:srgbClr val="0B3C49">
                 <a:alpha val="12000"/>
               </a:srgbClr>
@@ -6892,7 +6546,7 @@
           <a:bodyPr wrap="square" lIns="0" tIns="0" rIns="0" bIns="0" rtlCol="0" anchor="ctr"/>
           <a:lstStyle/>
           <a:p>
-            <a:pPr indent="0" marL="0">
+            <a:pPr marL="0" indent="0">
               <a:buNone/>
             </a:pPr>
             <a:r>
@@ -6931,7 +6585,7 @@
           <a:bodyPr wrap="square" lIns="0" tIns="0" rIns="0" bIns="0" rtlCol="0" anchor="t"/>
           <a:lstStyle/>
           <a:p>
-            <a:pPr indent="0" marL="0">
+            <a:pPr marL="0" indent="0">
               <a:lnSpc>
                 <a:spcPct val="115000"/>
               </a:lnSpc>
@@ -6973,7 +6627,7 @@
           <a:bodyPr wrap="square" lIns="0" tIns="0" rIns="0" bIns="0" rtlCol="0" anchor="ctr"/>
           <a:lstStyle/>
           <a:p>
-            <a:pPr indent="0" marL="0">
+            <a:pPr marL="0" indent="0">
               <a:buNone/>
             </a:pPr>
             <a:r>
@@ -7012,7 +6666,7 @@
           <a:bodyPr wrap="square" lIns="0" tIns="0" rIns="0" bIns="0" rtlCol="0" anchor="t"/>
           <a:lstStyle/>
           <a:p>
-            <a:pPr indent="0" marL="0">
+            <a:pPr marL="0" indent="0">
               <a:lnSpc>
                 <a:spcPct val="115000"/>
               </a:lnSpc>
@@ -7054,7 +6708,7 @@
           <a:bodyPr wrap="square" lIns="0" tIns="0" rIns="0" bIns="0" rtlCol="0" anchor="ctr"/>
           <a:lstStyle/>
           <a:p>
-            <a:pPr indent="0" marL="0">
+            <a:pPr marL="0" indent="0">
               <a:buNone/>
             </a:pPr>
             <a:r>
@@ -7093,7 +6747,7 @@
           <a:bodyPr wrap="square" lIns="0" tIns="0" rIns="0" bIns="0" rtlCol="0" anchor="t"/>
           <a:lstStyle/>
           <a:p>
-            <a:pPr indent="0" marL="0">
+            <a:pPr marL="0" indent="0">
               <a:lnSpc>
                 <a:spcPct val="115000"/>
               </a:lnSpc>
@@ -7135,7 +6789,7 @@
           </a:solidFill>
           <a:ln/>
           <a:effectLst>
-            <a:outerShdw sx="100000" sy="100000" kx="0" ky="0" algn="bl" rotWithShape="0" blurRad="114300" dist="38100" dir="8100000">
+            <a:outerShdw blurRad="114300" dist="38100" dir="8100000" algn="bl" rotWithShape="0">
               <a:srgbClr val="0B3C49">
                 <a:alpha val="12000"/>
               </a:srgbClr>
@@ -7164,7 +6818,7 @@
           <a:bodyPr wrap="square" lIns="0" tIns="0" rIns="0" bIns="0" rtlCol="0" anchor="ctr"/>
           <a:lstStyle/>
           <a:p>
-            <a:pPr indent="0" marL="0">
+            <a:pPr marL="0" indent="0">
               <a:buNone/>
             </a:pPr>
             <a:r>
@@ -7203,7 +6857,7 @@
           <a:bodyPr wrap="square" lIns="0" tIns="0" rIns="0" bIns="0" rtlCol="0" anchor="t"/>
           <a:lstStyle/>
           <a:p>
-            <a:pPr indent="0" marL="0">
+            <a:pPr marL="0" indent="0">
               <a:spcAft>
                 <a:spcPts val="100"/>
               </a:spcAft>
@@ -7223,7 +6877,7 @@
             <a:endParaRPr lang="en-US" sz="900" dirty="0"/>
           </a:p>
           <a:p>
-            <a:pPr indent="0" marL="0">
+            <a:pPr marL="0" indent="0">
               <a:spcAft>
                 <a:spcPts val="100"/>
               </a:spcAft>
@@ -7243,7 +6897,7 @@
             <a:endParaRPr lang="en-US" sz="900" dirty="0"/>
           </a:p>
           <a:p>
-            <a:pPr indent="0" marL="0">
+            <a:pPr marL="0" indent="0">
               <a:spcAft>
                 <a:spcPts val="100"/>
               </a:spcAft>
@@ -7263,7 +6917,7 @@
             <a:endParaRPr lang="en-US" sz="900" dirty="0"/>
           </a:p>
           <a:p>
-            <a:pPr indent="0" marL="0">
+            <a:pPr marL="0" indent="0">
               <a:spcAft>
                 <a:spcPts val="100"/>
               </a:spcAft>
@@ -7305,7 +6959,7 @@
           </a:solidFill>
           <a:ln/>
           <a:effectLst>
-            <a:outerShdw sx="100000" sy="100000" kx="0" ky="0" algn="bl" rotWithShape="0" blurRad="114300" dist="38100" dir="8100000">
+            <a:outerShdw blurRad="114300" dist="38100" dir="8100000" algn="bl" rotWithShape="0">
               <a:srgbClr val="0B3C49">
                 <a:alpha val="12000"/>
               </a:srgbClr>
@@ -7334,7 +6988,7 @@
           <a:bodyPr wrap="square" lIns="0" tIns="0" rIns="0" bIns="0" rtlCol="0" anchor="ctr"/>
           <a:lstStyle/>
           <a:p>
-            <a:pPr indent="0" marL="0">
+            <a:pPr marL="0" indent="0">
               <a:buNone/>
             </a:pPr>
             <a:r>
@@ -7373,7 +7027,7 @@
           <a:bodyPr wrap="square" lIns="0" tIns="0" rIns="0" bIns="0" rtlCol="0" anchor="t"/>
           <a:lstStyle/>
           <a:p>
-            <a:pPr indent="0" marL="0">
+            <a:pPr marL="0" indent="0">
               <a:spcAft>
                 <a:spcPts val="100"/>
               </a:spcAft>
@@ -7393,7 +7047,7 @@
             <a:endParaRPr lang="en-US" sz="900" dirty="0"/>
           </a:p>
           <a:p>
-            <a:pPr indent="0" marL="0">
+            <a:pPr marL="0" indent="0">
               <a:spcAft>
                 <a:spcPts val="100"/>
               </a:spcAft>
@@ -7413,7 +7067,7 @@
             <a:endParaRPr lang="en-US" sz="900" dirty="0"/>
           </a:p>
           <a:p>
-            <a:pPr indent="0" marL="0">
+            <a:pPr marL="0" indent="0">
               <a:spcAft>
                 <a:spcPts val="100"/>
               </a:spcAft>
@@ -7455,7 +7109,7 @@
           </a:solidFill>
           <a:ln/>
           <a:effectLst>
-            <a:outerShdw sx="100000" sy="100000" kx="0" ky="0" algn="bl" rotWithShape="0" blurRad="114300" dist="38100" dir="8100000">
+            <a:outerShdw blurRad="114300" dist="38100" dir="8100000" algn="bl" rotWithShape="0">
               <a:srgbClr val="0B3C49">
                 <a:alpha val="12000"/>
               </a:srgbClr>
@@ -7484,7 +7138,7 @@
           <a:bodyPr wrap="square" lIns="0" tIns="0" rIns="0" bIns="0" rtlCol="0" anchor="ctr"/>
           <a:lstStyle/>
           <a:p>
-            <a:pPr indent="0" marL="0">
+            <a:pPr marL="0" indent="0">
               <a:buNone/>
             </a:pPr>
             <a:r>
@@ -7523,7 +7177,7 @@
           <a:bodyPr wrap="square" lIns="0" tIns="0" rIns="0" bIns="0" rtlCol="0" anchor="t"/>
           <a:lstStyle/>
           <a:p>
-            <a:pPr indent="0" marL="0">
+            <a:pPr marL="0" indent="0">
               <a:spcAft>
                 <a:spcPts val="100"/>
               </a:spcAft>
@@ -7543,7 +7197,7 @@
             <a:endParaRPr lang="en-US" sz="900" dirty="0"/>
           </a:p>
           <a:p>
-            <a:pPr indent="0" marL="0">
+            <a:pPr marL="0" indent="0">
               <a:spcAft>
                 <a:spcPts val="100"/>
               </a:spcAft>
@@ -7563,7 +7217,7 @@
             <a:endParaRPr lang="en-US" sz="900" dirty="0"/>
           </a:p>
           <a:p>
-            <a:pPr indent="0" marL="0">
+            <a:pPr marL="0" indent="0">
               <a:spcAft>
                 <a:spcPts val="100"/>
               </a:spcAft>
@@ -7605,7 +7259,7 @@
           <a:bodyPr wrap="square" lIns="0" tIns="0" rIns="0" bIns="0" rtlCol="0" anchor="t"/>
           <a:lstStyle/>
           <a:p>
-            <a:pPr indent="0" marL="0">
+            <a:pPr marL="0" indent="0">
               <a:buNone/>
             </a:pPr>
             <a:r>
@@ -7619,9 +7273,6 @@
               </a:rPr>
               <a:t>来源  </a:t>
             </a:r>
-            <a:pPr indent="0" marL="0">
-              <a:buNone/>
-            </a:pPr>
             <a:r>
               <a:rPr lang="en-US" sz="900" i="1" dirty="0">
                 <a:solidFill>
@@ -7633,9 +7284,6 @@
               </a:rPr>
               <a:t>NeoTImmuML, Frontiers in Immunology 2025</a:t>
             </a:r>
-            <a:pPr indent="0" marL="0">
-              <a:buNone/>
-            </a:pPr>
             <a:r>
               <a:rPr lang="en-US" sz="900" i="1" u="sng" dirty="0">
                 <a:solidFill>
@@ -7644,7 +7292,7 @@
                 <a:latin typeface="Microsoft YaHei" pitchFamily="34" charset="0"/>
                 <a:ea typeface="Microsoft YaHei" pitchFamily="34" charset="-122"/>
                 <a:cs typeface="Microsoft YaHei" pitchFamily="34" charset="-120"/>
-                <a:hlinkClick r:id="rId1" invalidUrl="" action="" tgtFrame="" tooltip="DOI" history="1" highlightClick="0" endSnd="0">
+                <a:hlinkClick r:id="rId3" tooltip="DOI">
                   <a:extLst>
                     <a:ext uri="{A12FA001-AC4F-418D-AE19-62706E023703}">
                       <ahyp:hlinkClr xmlns:ahyp="http://schemas.microsoft.com/office/drawing/2018/hyperlinkcolor" val="tx"/>
@@ -7654,9 +7302,6 @@
               </a:rPr>
               <a:t> · DOI 10.3389/fimmu.2025.1681396</a:t>
             </a:r>
-            <a:pPr indent="0" marL="0">
-              <a:buNone/>
-            </a:pPr>
             <a:r>
               <a:rPr lang="en-US" sz="900" i="1" u="sng" dirty="0">
                 <a:solidFill>
@@ -7665,7 +7310,7 @@
                 <a:latin typeface="Microsoft YaHei" pitchFamily="34" charset="0"/>
                 <a:ea typeface="Microsoft YaHei" pitchFamily="34" charset="-122"/>
                 <a:cs typeface="Microsoft YaHei" pitchFamily="34" charset="-120"/>
-                <a:hlinkClick r:id="rId2" invalidUrl="" action="" tgtFrame="" tooltip="repo" history="1" highlightClick="0" endSnd="0">
+                <a:hlinkClick r:id="rId4" tooltip="repo">
                   <a:extLst>
                     <a:ext uri="{A12FA001-AC4F-418D-AE19-62706E023703}">
                       <ahyp:hlinkClr xmlns:ahyp="http://schemas.microsoft.com/office/drawing/2018/hyperlinkcolor" val="tx"/>
@@ -7700,7 +7345,7 @@
           <a:bodyPr wrap="square" lIns="0" tIns="0" rIns="0" bIns="0" rtlCol="0" anchor="ctr"/>
           <a:lstStyle/>
           <a:p>
-            <a:pPr algn="r" indent="0" marL="0">
+            <a:pPr marL="0" indent="0" algn="r">
               <a:buNone/>
             </a:pPr>
             <a:r>
@@ -7734,6 +7379,7 @@
         <a:solidFill>
           <a:srgbClr val="F2F7F7"/>
         </a:solidFill>
+        <a:effectLst/>
       </p:bgPr>
     </p:bg>
     <p:spTree>
@@ -7791,11 +7437,11 @@
           <a:bodyPr wrap="square" lIns="0" tIns="0" rIns="0" bIns="0" rtlCol="0" anchor="ctr"/>
           <a:lstStyle/>
           <a:p>
-            <a:pPr indent="0" marL="0">
-              <a:buNone/>
-            </a:pPr>
-            <a:r>
-              <a:rPr lang="en-US" sz="1200" b="1" spc="300" kern="0" dirty="0">
+            <a:pPr marL="0" indent="0">
+              <a:buNone/>
+            </a:pPr>
+            <a:r>
+              <a:rPr lang="en-US" sz="1200" b="1" kern="0" spc="300" dirty="0">
                 <a:solidFill>
                   <a:srgbClr val="028090"/>
                 </a:solidFill>
@@ -7830,7 +7476,7 @@
           <a:bodyPr wrap="square" lIns="0" tIns="0" rIns="0" bIns="0" rtlCol="0" anchor="ctr"/>
           <a:lstStyle/>
           <a:p>
-            <a:pPr indent="0" marL="0">
+            <a:pPr marL="0" indent="0">
               <a:buNone/>
             </a:pPr>
             <a:r>
@@ -7869,7 +7515,7 @@
           <a:bodyPr wrap="square" lIns="0" tIns="0" rIns="0" bIns="0" rtlCol="0" anchor="ctr"/>
           <a:lstStyle/>
           <a:p>
-            <a:pPr indent="0" marL="0">
+            <a:pPr marL="0" indent="0">
               <a:buNone/>
             </a:pPr>
             <a:r>
@@ -7930,7 +7576,7 @@
           <a:bodyPr wrap="square" lIns="0" tIns="0" rIns="0" bIns="0" rtlCol="0" anchor="ctr"/>
           <a:lstStyle/>
           <a:p>
-            <a:pPr algn="ctr" indent="0" marL="0">
+            <a:pPr marL="0" indent="0" algn="ctr">
               <a:buNone/>
             </a:pPr>
             <a:r>
@@ -7969,7 +7615,7 @@
           <a:bodyPr wrap="square" lIns="0" tIns="0" rIns="0" bIns="0" rtlCol="0" anchor="ctr"/>
           <a:lstStyle/>
           <a:p>
-            <a:pPr algn="ctr" indent="0" marL="0">
+            <a:pPr marL="0" indent="0" algn="ctr">
               <a:buNone/>
             </a:pPr>
             <a:r>
@@ -8011,7 +7657,7 @@
             <a:prstDash val="solid"/>
           </a:ln>
           <a:effectLst>
-            <a:outerShdw sx="100000" sy="100000" kx="0" ky="0" algn="bl" rotWithShape="0" blurRad="114300" dist="38100" dir="8100000">
+            <a:outerShdw blurRad="114300" dist="38100" dir="8100000" algn="bl" rotWithShape="0">
               <a:srgbClr val="0B3C49">
                 <a:alpha val="12000"/>
               </a:srgbClr>
@@ -8060,7 +7706,7 @@
           <a:bodyPr wrap="square" lIns="0" tIns="0" rIns="0" bIns="0" rtlCol="0" anchor="ctr"/>
           <a:lstStyle/>
           <a:p>
-            <a:pPr indent="0" marL="0">
+            <a:pPr marL="0" indent="0">
               <a:buNone/>
             </a:pPr>
             <a:r>
@@ -8187,7 +7833,7 @@
             <a:prstDash val="solid"/>
           </a:ln>
           <a:effectLst>
-            <a:outerShdw sx="100000" sy="100000" kx="0" ky="0" algn="bl" rotWithShape="0" blurRad="114300" dist="38100" dir="8100000">
+            <a:outerShdw blurRad="114300" dist="38100" dir="8100000" algn="bl" rotWithShape="0">
               <a:srgbClr val="0B3C49">
                 <a:alpha val="12000"/>
               </a:srgbClr>
@@ -8236,7 +7882,7 @@
           <a:bodyPr wrap="square" lIns="0" tIns="0" rIns="0" bIns="0" rtlCol="0" anchor="ctr"/>
           <a:lstStyle/>
           <a:p>
-            <a:pPr indent="0" marL="0">
+            <a:pPr marL="0" indent="0">
               <a:buNone/>
             </a:pPr>
             <a:r>
@@ -8342,7 +7988,7 @@
             <a:prstDash val="solid"/>
           </a:ln>
           <a:effectLst>
-            <a:outerShdw sx="100000" sy="100000" kx="0" ky="0" algn="bl" rotWithShape="0" blurRad="114300" dist="38100" dir="8100000">
+            <a:outerShdw blurRad="114300" dist="38100" dir="8100000" algn="bl" rotWithShape="0">
               <a:srgbClr val="0B3C49">
                 <a:alpha val="12000"/>
               </a:srgbClr>
@@ -8391,7 +8037,7 @@
           <a:bodyPr wrap="square" lIns="0" tIns="0" rIns="0" bIns="0" rtlCol="0" anchor="ctr"/>
           <a:lstStyle/>
           <a:p>
-            <a:pPr indent="0" marL="0">
+            <a:pPr marL="0" indent="0">
               <a:buNone/>
             </a:pPr>
             <a:r>
@@ -8518,7 +8164,7 @@
             <a:prstDash val="solid"/>
           </a:ln>
           <a:effectLst>
-            <a:outerShdw sx="100000" sy="100000" kx="0" ky="0" algn="bl" rotWithShape="0" blurRad="114300" dist="38100" dir="8100000">
+            <a:outerShdw blurRad="114300" dist="38100" dir="8100000" algn="bl" rotWithShape="0">
               <a:srgbClr val="0B3C49">
                 <a:alpha val="12000"/>
               </a:srgbClr>
@@ -8567,7 +8213,7 @@
           <a:bodyPr wrap="square" lIns="0" tIns="0" rIns="0" bIns="0" rtlCol="0" anchor="ctr"/>
           <a:lstStyle/>
           <a:p>
-            <a:pPr indent="0" marL="0">
+            <a:pPr marL="0" indent="0">
               <a:buNone/>
             </a:pPr>
             <a:r>
@@ -8691,7 +8337,7 @@
           <a:bodyPr wrap="square" lIns="0" tIns="0" rIns="0" bIns="0" rtlCol="0" anchor="t"/>
           <a:lstStyle/>
           <a:p>
-            <a:pPr indent="0" marL="0">
+            <a:pPr marL="0" indent="0">
               <a:buNone/>
             </a:pPr>
             <a:r>
@@ -8705,9 +8351,6 @@
               </a:rPr>
               <a:t>来源  </a:t>
             </a:r>
-            <a:pPr indent="0" marL="0">
-              <a:buNone/>
-            </a:pPr>
             <a:r>
               <a:rPr lang="en-US" sz="900" i="1" dirty="0">
                 <a:solidFill>
@@ -8719,9 +8362,6 @@
               </a:rPr>
               <a:t>NeoTImmuML, Frontiers in Immunology 2025</a:t>
             </a:r>
-            <a:pPr indent="0" marL="0">
-              <a:buNone/>
-            </a:pPr>
             <a:r>
               <a:rPr lang="en-US" sz="900" i="1" u="sng" dirty="0">
                 <a:solidFill>
@@ -8730,7 +8370,7 @@
                 <a:latin typeface="Microsoft YaHei" pitchFamily="34" charset="0"/>
                 <a:ea typeface="Microsoft YaHei" pitchFamily="34" charset="-122"/>
                 <a:cs typeface="Microsoft YaHei" pitchFamily="34" charset="-120"/>
-                <a:hlinkClick r:id="rId1" invalidUrl="" action="" tgtFrame="" tooltip="DOI" history="1" highlightClick="0" endSnd="0">
+                <a:hlinkClick r:id="rId3" tooltip="DOI">
                   <a:extLst>
                     <a:ext uri="{A12FA001-AC4F-418D-AE19-62706E023703}">
                       <ahyp:hlinkClr xmlns:ahyp="http://schemas.microsoft.com/office/drawing/2018/hyperlinkcolor" val="tx"/>
@@ -8740,9 +8380,6 @@
               </a:rPr>
               <a:t> · DOI 10.3389/fimmu.2025.1681396</a:t>
             </a:r>
-            <a:pPr indent="0" marL="0">
-              <a:buNone/>
-            </a:pPr>
             <a:r>
               <a:rPr lang="en-US" sz="900" i="1" u="sng" dirty="0">
                 <a:solidFill>
@@ -8751,7 +8388,7 @@
                 <a:latin typeface="Microsoft YaHei" pitchFamily="34" charset="0"/>
                 <a:ea typeface="Microsoft YaHei" pitchFamily="34" charset="-122"/>
                 <a:cs typeface="Microsoft YaHei" pitchFamily="34" charset="-120"/>
-                <a:hlinkClick r:id="rId2" invalidUrl="" action="" tgtFrame="" tooltip="repo" history="1" highlightClick="0" endSnd="0">
+                <a:hlinkClick r:id="rId4" tooltip="repo">
                   <a:extLst>
                     <a:ext uri="{A12FA001-AC4F-418D-AE19-62706E023703}">
                       <ahyp:hlinkClr xmlns:ahyp="http://schemas.microsoft.com/office/drawing/2018/hyperlinkcolor" val="tx"/>
@@ -8786,7 +8423,7 @@
           <a:bodyPr wrap="square" lIns="0" tIns="0" rIns="0" bIns="0" rtlCol="0" anchor="ctr"/>
           <a:lstStyle/>
           <a:p>
-            <a:pPr algn="r" indent="0" marL="0">
+            <a:pPr marL="0" indent="0" algn="r">
               <a:buNone/>
             </a:pPr>
             <a:r>
@@ -8820,6 +8457,7 @@
         <a:solidFill>
           <a:srgbClr val="F2F7F7"/>
         </a:solidFill>
+        <a:effectLst/>
       </p:bgPr>
     </p:bg>
     <p:spTree>
@@ -8877,11 +8515,11 @@
           <a:bodyPr wrap="square" lIns="0" tIns="0" rIns="0" bIns="0" rtlCol="0" anchor="ctr"/>
           <a:lstStyle/>
           <a:p>
-            <a:pPr indent="0" marL="0">
-              <a:buNone/>
-            </a:pPr>
-            <a:r>
-              <a:rPr lang="en-US" sz="1200" b="1" spc="300" kern="0" dirty="0">
+            <a:pPr marL="0" indent="0">
+              <a:buNone/>
+            </a:pPr>
+            <a:r>
+              <a:rPr lang="en-US" sz="1200" b="1" kern="0" spc="300" dirty="0">
                 <a:solidFill>
                   <a:srgbClr val="028090"/>
                 </a:solidFill>
@@ -8916,7 +8554,7 @@
           <a:bodyPr wrap="square" lIns="0" tIns="0" rIns="0" bIns="0" rtlCol="0" anchor="ctr"/>
           <a:lstStyle/>
           <a:p>
-            <a:pPr indent="0" marL="0">
+            <a:pPr marL="0" indent="0">
               <a:buNone/>
             </a:pPr>
             <a:r>
@@ -8953,7 +8591,7 @@
           </a:solidFill>
           <a:ln/>
           <a:effectLst>
-            <a:outerShdw sx="100000" sy="100000" kx="0" ky="0" algn="bl" rotWithShape="0" blurRad="114300" dist="38100" dir="8100000">
+            <a:outerShdw blurRad="114300" dist="38100" dir="8100000" algn="bl" rotWithShape="0">
               <a:srgbClr val="0B3C49">
                 <a:alpha val="12000"/>
               </a:srgbClr>
@@ -8982,7 +8620,7 @@
           <a:bodyPr wrap="square" lIns="0" tIns="0" rIns="0" bIns="0" rtlCol="0" anchor="ctr"/>
           <a:lstStyle/>
           <a:p>
-            <a:pPr indent="0" marL="0">
+            <a:pPr marL="0" indent="0">
               <a:buNone/>
             </a:pPr>
             <a:r>
@@ -9021,7 +8659,7 @@
           <a:bodyPr wrap="square" lIns="0" tIns="0" rIns="0" bIns="0" rtlCol="0" anchor="t"/>
           <a:lstStyle/>
           <a:p>
-            <a:pPr indent="0" marL="0">
+            <a:pPr marL="0" indent="0">
               <a:buNone/>
             </a:pPr>
             <a:r>
@@ -9038,7 +8676,7 @@
             <a:endParaRPr lang="en-US" sz="1350" dirty="0"/>
           </a:p>
           <a:p>
-            <a:pPr indent="0" marL="0">
+            <a:pPr marL="0" indent="0">
               <a:spcAft>
                 <a:spcPts val="1000"/>
               </a:spcAft>
@@ -9058,7 +8696,7 @@
             <a:endParaRPr lang="en-US" sz="1350" dirty="0"/>
           </a:p>
           <a:p>
-            <a:pPr indent="0" marL="0">
+            <a:pPr marL="0" indent="0">
               <a:buNone/>
             </a:pPr>
             <a:r>
@@ -9075,7 +8713,7 @@
             <a:endParaRPr lang="en-US" sz="1350" dirty="0"/>
           </a:p>
           <a:p>
-            <a:pPr indent="0" marL="0">
+            <a:pPr marL="0" indent="0">
               <a:spcAft>
                 <a:spcPts val="1000"/>
               </a:spcAft>
@@ -9095,7 +8733,7 @@
             <a:endParaRPr lang="en-US" sz="1350" dirty="0"/>
           </a:p>
           <a:p>
-            <a:pPr indent="0" marL="0">
+            <a:pPr marL="0" indent="0">
               <a:buNone/>
             </a:pPr>
             <a:r>
@@ -9112,7 +8750,7 @@
             <a:endParaRPr lang="en-US" sz="1350" dirty="0"/>
           </a:p>
           <a:p>
-            <a:pPr indent="0" marL="0">
+            <a:pPr marL="0" indent="0">
               <a:buNone/>
             </a:pPr>
             <a:r>
@@ -9151,7 +8789,7 @@
           <a:bodyPr wrap="square" lIns="0" tIns="0" rIns="0" bIns="0" rtlCol="0" anchor="ctr"/>
           <a:lstStyle/>
           <a:p>
-            <a:pPr indent="0" marL="0">
+            <a:pPr marL="0" indent="0">
               <a:buNone/>
             </a:pPr>
             <a:r>
@@ -9193,7 +8831,7 @@
             <a:prstDash val="solid"/>
           </a:ln>
           <a:effectLst>
-            <a:outerShdw sx="100000" sy="100000" kx="0" ky="0" algn="bl" rotWithShape="0" blurRad="114300" dist="38100" dir="8100000">
+            <a:outerShdw blurRad="114300" dist="38100" dir="8100000" algn="bl" rotWithShape="0">
               <a:srgbClr val="0B3C49">
                 <a:alpha val="12000"/>
               </a:srgbClr>
@@ -9242,7 +8880,7 @@
           <a:bodyPr wrap="square" lIns="0" tIns="0" rIns="0" bIns="0" rtlCol="0" anchor="ctr"/>
           <a:lstStyle/>
           <a:p>
-            <a:pPr indent="0" marL="0">
+            <a:pPr marL="0" indent="0">
               <a:buNone/>
             </a:pPr>
             <a:r>
@@ -9281,7 +8919,7 @@
           <a:bodyPr wrap="square" lIns="0" tIns="0" rIns="0" bIns="0" rtlCol="0" anchor="t"/>
           <a:lstStyle/>
           <a:p>
-            <a:pPr indent="0" marL="0">
+            <a:pPr marL="0" indent="0">
               <a:lnSpc>
                 <a:spcPct val="104000"/>
               </a:lnSpc>
@@ -9326,7 +8964,7 @@
             <a:prstDash val="solid"/>
           </a:ln>
           <a:effectLst>
-            <a:outerShdw sx="100000" sy="100000" kx="0" ky="0" algn="bl" rotWithShape="0" blurRad="114300" dist="38100" dir="8100000">
+            <a:outerShdw blurRad="114300" dist="38100" dir="8100000" algn="bl" rotWithShape="0">
               <a:srgbClr val="0B3C49">
                 <a:alpha val="12000"/>
               </a:srgbClr>
@@ -9375,7 +9013,7 @@
           <a:bodyPr wrap="square" lIns="0" tIns="0" rIns="0" bIns="0" rtlCol="0" anchor="ctr"/>
           <a:lstStyle/>
           <a:p>
-            <a:pPr indent="0" marL="0">
+            <a:pPr marL="0" indent="0">
               <a:buNone/>
             </a:pPr>
             <a:r>
@@ -9414,7 +9052,7 @@
           <a:bodyPr wrap="square" lIns="0" tIns="0" rIns="0" bIns="0" rtlCol="0" anchor="t"/>
           <a:lstStyle/>
           <a:p>
-            <a:pPr indent="0" marL="0">
+            <a:pPr marL="0" indent="0">
               <a:lnSpc>
                 <a:spcPct val="104000"/>
               </a:lnSpc>
@@ -9459,7 +9097,7 @@
             <a:prstDash val="solid"/>
           </a:ln>
           <a:effectLst>
-            <a:outerShdw sx="100000" sy="100000" kx="0" ky="0" algn="bl" rotWithShape="0" blurRad="114300" dist="38100" dir="8100000">
+            <a:outerShdw blurRad="114300" dist="38100" dir="8100000" algn="bl" rotWithShape="0">
               <a:srgbClr val="0B3C49">
                 <a:alpha val="12000"/>
               </a:srgbClr>
@@ -9508,7 +9146,7 @@
           <a:bodyPr wrap="square" lIns="0" tIns="0" rIns="0" bIns="0" rtlCol="0" anchor="ctr"/>
           <a:lstStyle/>
           <a:p>
-            <a:pPr indent="0" marL="0">
+            <a:pPr marL="0" indent="0">
               <a:buNone/>
             </a:pPr>
             <a:r>
@@ -9547,7 +9185,7 @@
           <a:bodyPr wrap="square" lIns="0" tIns="0" rIns="0" bIns="0" rtlCol="0" anchor="t"/>
           <a:lstStyle/>
           <a:p>
-            <a:pPr indent="0" marL="0">
+            <a:pPr marL="0" indent="0">
               <a:lnSpc>
                 <a:spcPct val="104000"/>
               </a:lnSpc>
@@ -9592,7 +9230,7 @@
             <a:prstDash val="solid"/>
           </a:ln>
           <a:effectLst>
-            <a:outerShdw sx="100000" sy="100000" kx="0" ky="0" algn="bl" rotWithShape="0" blurRad="114300" dist="38100" dir="8100000">
+            <a:outerShdw blurRad="114300" dist="38100" dir="8100000" algn="bl" rotWithShape="0">
               <a:srgbClr val="0B3C49">
                 <a:alpha val="12000"/>
               </a:srgbClr>
@@ -9641,7 +9279,7 @@
           <a:bodyPr wrap="square" lIns="0" tIns="0" rIns="0" bIns="0" rtlCol="0" anchor="ctr"/>
           <a:lstStyle/>
           <a:p>
-            <a:pPr indent="0" marL="0">
+            <a:pPr marL="0" indent="0">
               <a:buNone/>
             </a:pPr>
             <a:r>
@@ -9680,7 +9318,7 @@
           <a:bodyPr wrap="square" lIns="0" tIns="0" rIns="0" bIns="0" rtlCol="0" anchor="t"/>
           <a:lstStyle/>
           <a:p>
-            <a:pPr indent="0" marL="0">
+            <a:pPr marL="0" indent="0">
               <a:lnSpc>
                 <a:spcPct val="104000"/>
               </a:lnSpc>
@@ -9725,7 +9363,7 @@
             <a:prstDash val="solid"/>
           </a:ln>
           <a:effectLst>
-            <a:outerShdw sx="100000" sy="100000" kx="0" ky="0" algn="bl" rotWithShape="0" blurRad="114300" dist="38100" dir="8100000">
+            <a:outerShdw blurRad="114300" dist="38100" dir="8100000" algn="bl" rotWithShape="0">
               <a:srgbClr val="0B3C49">
                 <a:alpha val="12000"/>
               </a:srgbClr>
@@ -9774,7 +9412,7 @@
           <a:bodyPr wrap="square" lIns="0" tIns="0" rIns="0" bIns="0" rtlCol="0" anchor="ctr"/>
           <a:lstStyle/>
           <a:p>
-            <a:pPr indent="0" marL="0">
+            <a:pPr marL="0" indent="0">
               <a:buNone/>
             </a:pPr>
             <a:r>
@@ -9813,7 +9451,7 @@
           <a:bodyPr wrap="square" lIns="0" tIns="0" rIns="0" bIns="0" rtlCol="0" anchor="t"/>
           <a:lstStyle/>
           <a:p>
-            <a:pPr indent="0" marL="0">
+            <a:pPr marL="0" indent="0">
               <a:lnSpc>
                 <a:spcPct val="104000"/>
               </a:lnSpc>
@@ -9858,7 +9496,7 @@
             <a:prstDash val="solid"/>
           </a:ln>
           <a:effectLst>
-            <a:outerShdw sx="100000" sy="100000" kx="0" ky="0" algn="bl" rotWithShape="0" blurRad="114300" dist="38100" dir="8100000">
+            <a:outerShdw blurRad="114300" dist="38100" dir="8100000" algn="bl" rotWithShape="0">
               <a:srgbClr val="0B3C49">
                 <a:alpha val="12000"/>
               </a:srgbClr>
@@ -9907,7 +9545,7 @@
           <a:bodyPr wrap="square" lIns="0" tIns="0" rIns="0" bIns="0" rtlCol="0" anchor="ctr"/>
           <a:lstStyle/>
           <a:p>
-            <a:pPr indent="0" marL="0">
+            <a:pPr marL="0" indent="0">
               <a:buNone/>
             </a:pPr>
             <a:r>
@@ -9946,7 +9584,7 @@
           <a:bodyPr wrap="square" lIns="0" tIns="0" rIns="0" bIns="0" rtlCol="0" anchor="t"/>
           <a:lstStyle/>
           <a:p>
-            <a:pPr indent="0" marL="0">
+            <a:pPr marL="0" indent="0">
               <a:lnSpc>
                 <a:spcPct val="104000"/>
               </a:lnSpc>
@@ -9988,7 +9626,7 @@
           <a:bodyPr wrap="square" lIns="0" tIns="0" rIns="0" bIns="0" rtlCol="0" anchor="ctr"/>
           <a:lstStyle/>
           <a:p>
-            <a:pPr algn="r" indent="0" marL="0">
+            <a:pPr marL="0" indent="0" algn="r">
               <a:buNone/>
             </a:pPr>
             <a:r>
@@ -10022,6 +9660,7 @@
         <a:solidFill>
           <a:srgbClr val="F2F7F7"/>
         </a:solidFill>
+        <a:effectLst/>
       </p:bgPr>
     </p:bg>
     <p:spTree>
@@ -10079,11 +9718,11 @@
           <a:bodyPr wrap="square" lIns="0" tIns="0" rIns="0" bIns="0" rtlCol="0" anchor="ctr"/>
           <a:lstStyle/>
           <a:p>
-            <a:pPr indent="0" marL="0">
-              <a:buNone/>
-            </a:pPr>
-            <a:r>
-              <a:rPr lang="en-US" sz="1200" b="1" spc="300" kern="0" dirty="0">
+            <a:pPr marL="0" indent="0">
+              <a:buNone/>
+            </a:pPr>
+            <a:r>
+              <a:rPr lang="en-US" sz="1200" b="1" kern="0" spc="300" dirty="0">
                 <a:solidFill>
                   <a:srgbClr val="028090"/>
                 </a:solidFill>
@@ -10118,7 +9757,7 @@
           <a:bodyPr wrap="square" lIns="0" tIns="0" rIns="0" bIns="0" rtlCol="0" anchor="ctr"/>
           <a:lstStyle/>
           <a:p>
-            <a:pPr indent="0" marL="0">
+            <a:pPr marL="0" indent="0">
               <a:buNone/>
             </a:pPr>
             <a:r>
@@ -10160,7 +9799,7 @@
             <a:prstDash val="solid"/>
           </a:ln>
           <a:effectLst>
-            <a:outerShdw sx="100000" sy="100000" kx="0" ky="0" algn="bl" rotWithShape="0" blurRad="114300" dist="38100" dir="8100000">
+            <a:outerShdw blurRad="114300" dist="38100" dir="8100000" algn="bl" rotWithShape="0">
               <a:srgbClr val="0B3C49">
                 <a:alpha val="12000"/>
               </a:srgbClr>
@@ -10209,7 +9848,7 @@
           <a:bodyPr wrap="square" lIns="0" tIns="0" rIns="0" bIns="0" rtlCol="0" anchor="ctr"/>
           <a:lstStyle/>
           <a:p>
-            <a:pPr indent="0" marL="0">
+            <a:pPr marL="0" indent="0">
               <a:buNone/>
             </a:pPr>
             <a:r>
@@ -10336,7 +9975,7 @@
             <a:prstDash val="solid"/>
           </a:ln>
           <a:effectLst>
-            <a:outerShdw sx="100000" sy="100000" kx="0" ky="0" algn="bl" rotWithShape="0" blurRad="114300" dist="38100" dir="8100000">
+            <a:outerShdw blurRad="114300" dist="38100" dir="8100000" algn="bl" rotWithShape="0">
               <a:srgbClr val="0B3C49">
                 <a:alpha val="12000"/>
               </a:srgbClr>
@@ -10385,7 +10024,7 @@
           <a:bodyPr wrap="square" lIns="0" tIns="0" rIns="0" bIns="0" rtlCol="0" anchor="ctr"/>
           <a:lstStyle/>
           <a:p>
-            <a:pPr indent="0" marL="0">
+            <a:pPr marL="0" indent="0">
               <a:buNone/>
             </a:pPr>
             <a:r>
@@ -10507,7 +10146,7 @@
           </a:solidFill>
           <a:ln/>
           <a:effectLst>
-            <a:outerShdw sx="100000" sy="100000" kx="0" ky="0" algn="bl" rotWithShape="0" blurRad="114300" dist="38100" dir="8100000">
+            <a:outerShdw blurRad="114300" dist="38100" dir="8100000" algn="bl" rotWithShape="0">
               <a:srgbClr val="0B3C49">
                 <a:alpha val="12000"/>
               </a:srgbClr>
@@ -10536,7 +10175,7 @@
           <a:bodyPr wrap="square" lIns="0" tIns="0" rIns="0" bIns="0" rtlCol="0" anchor="ctr"/>
           <a:lstStyle/>
           <a:p>
-            <a:pPr indent="0" marL="0">
+            <a:pPr marL="0" indent="0">
               <a:buNone/>
             </a:pPr>
             <a:r>
@@ -10575,7 +10214,7 @@
           <a:bodyPr wrap="square" lIns="0" tIns="0" rIns="0" bIns="0" rtlCol="0" anchor="t"/>
           <a:lstStyle/>
           <a:p>
-            <a:pPr indent="0" marL="0">
+            <a:pPr marL="0" indent="0">
               <a:lnSpc>
                 <a:spcPct val="105000"/>
               </a:lnSpc>
@@ -10595,7 +10234,7 @@
             <a:endParaRPr lang="en-US" sz="1200" dirty="0"/>
           </a:p>
           <a:p>
-            <a:pPr indent="0" marL="0">
+            <a:pPr marL="0" indent="0">
               <a:lnSpc>
                 <a:spcPct val="105000"/>
               </a:lnSpc>
@@ -10618,7 +10257,7 @@
             <a:endParaRPr lang="en-US" sz="1200" dirty="0"/>
           </a:p>
           <a:p>
-            <a:pPr indent="0" marL="0">
+            <a:pPr marL="0" indent="0">
               <a:lnSpc>
                 <a:spcPct val="105000"/>
               </a:lnSpc>
@@ -10638,7 +10277,7 @@
             <a:endParaRPr lang="en-US" sz="1200" dirty="0"/>
           </a:p>
           <a:p>
-            <a:pPr indent="0" marL="0">
+            <a:pPr marL="0" indent="0">
               <a:lnSpc>
                 <a:spcPct val="105000"/>
               </a:lnSpc>
@@ -10661,7 +10300,7 @@
             <a:endParaRPr lang="en-US" sz="1200" dirty="0"/>
           </a:p>
           <a:p>
-            <a:pPr indent="0" marL="0">
+            <a:pPr marL="0" indent="0">
               <a:lnSpc>
                 <a:spcPct val="105000"/>
               </a:lnSpc>
@@ -10681,7 +10320,7 @@
             <a:endParaRPr lang="en-US" sz="1200" dirty="0"/>
           </a:p>
           <a:p>
-            <a:pPr indent="0" marL="0">
+            <a:pPr marL="0" indent="0">
               <a:lnSpc>
                 <a:spcPct val="105000"/>
               </a:lnSpc>
@@ -10723,7 +10362,7 @@
           <a:bodyPr wrap="square" lIns="0" tIns="0" rIns="0" bIns="0" rtlCol="0" anchor="t"/>
           <a:lstStyle/>
           <a:p>
-            <a:pPr indent="0" marL="0">
+            <a:pPr marL="0" indent="0">
               <a:buNone/>
             </a:pPr>
             <a:r>
@@ -10762,7 +10401,7 @@
           <a:bodyPr wrap="square" lIns="0" tIns="0" rIns="0" bIns="0" rtlCol="0" anchor="ctr"/>
           <a:lstStyle/>
           <a:p>
-            <a:pPr algn="r" indent="0" marL="0">
+            <a:pPr marL="0" indent="0" algn="r">
               <a:buNone/>
             </a:pPr>
             <a:r>
@@ -10796,6 +10435,7 @@
         <a:solidFill>
           <a:srgbClr val="F2F7F7"/>
         </a:solidFill>
+        <a:effectLst/>
       </p:bgPr>
     </p:bg>
     <p:spTree>
@@ -10853,11 +10493,11 @@
           <a:bodyPr wrap="square" lIns="0" tIns="0" rIns="0" bIns="0" rtlCol="0" anchor="ctr"/>
           <a:lstStyle/>
           <a:p>
-            <a:pPr indent="0" marL="0">
-              <a:buNone/>
-            </a:pPr>
-            <a:r>
-              <a:rPr lang="en-US" sz="1200" b="1" spc="300" kern="0" dirty="0">
+            <a:pPr marL="0" indent="0">
+              <a:buNone/>
+            </a:pPr>
+            <a:r>
+              <a:rPr lang="en-US" sz="1200" b="1" kern="0" spc="300" dirty="0">
                 <a:solidFill>
                   <a:srgbClr val="028090"/>
                 </a:solidFill>
@@ -10892,7 +10532,7 @@
           <a:bodyPr wrap="square" lIns="0" tIns="0" rIns="0" bIns="0" rtlCol="0" anchor="ctr"/>
           <a:lstStyle/>
           <a:p>
-            <a:pPr indent="0" marL="0">
+            <a:pPr marL="0" indent="0">
               <a:buNone/>
             </a:pPr>
             <a:r>
@@ -10936,7 +10576,7 @@
             <a:prstDash val="solid"/>
           </a:ln>
           <a:effectLst>
-            <a:outerShdw sx="100000" sy="100000" kx="0" ky="0" algn="bl" rotWithShape="0" blurRad="114300" dist="38100" dir="8100000">
+            <a:outerShdw blurRad="114300" dist="38100" dir="8100000" algn="bl" rotWithShape="0">
               <a:srgbClr val="0B3C49">
                 <a:alpha val="12000"/>
               </a:srgbClr>
@@ -10965,7 +10605,7 @@
           <a:bodyPr wrap="square" lIns="0" tIns="0" rIns="0" bIns="0" rtlCol="0" anchor="ctr"/>
           <a:lstStyle/>
           <a:p>
-            <a:pPr algn="ctr" indent="0" marL="0">
+            <a:pPr marL="0" indent="0" algn="ctr">
               <a:buNone/>
             </a:pPr>
             <a:r>
@@ -11004,7 +10644,7 @@
           <a:bodyPr wrap="square" lIns="0" tIns="0" rIns="0" bIns="0" rtlCol="0" anchor="t"/>
           <a:lstStyle/>
           <a:p>
-            <a:pPr algn="ctr" indent="0" marL="0">
+            <a:pPr marL="0" indent="0" algn="ctr">
               <a:lnSpc>
                 <a:spcPct val="100000"/>
               </a:lnSpc>
@@ -11024,7 +10664,7 @@
             <a:endParaRPr lang="en-US" sz="1000" dirty="0"/>
           </a:p>
           <a:p>
-            <a:pPr algn="ctr" indent="0" marL="0">
+            <a:pPr marL="0" indent="0" algn="ctr">
               <a:lnSpc>
                 <a:spcPct val="100000"/>
               </a:lnSpc>
@@ -11066,7 +10706,7 @@
           <a:bodyPr wrap="square" lIns="0" tIns="0" rIns="0" bIns="0" rtlCol="0" anchor="ctr"/>
           <a:lstStyle/>
           <a:p>
-            <a:pPr algn="ctr" indent="0" marL="0">
+            <a:pPr marL="0" indent="0" algn="ctr">
               <a:buNone/>
             </a:pPr>
             <a:r>
@@ -11110,7 +10750,7 @@
             <a:prstDash val="solid"/>
           </a:ln>
           <a:effectLst>
-            <a:outerShdw sx="100000" sy="100000" kx="0" ky="0" algn="bl" rotWithShape="0" blurRad="114300" dist="38100" dir="8100000">
+            <a:outerShdw blurRad="114300" dist="38100" dir="8100000" algn="bl" rotWithShape="0">
               <a:srgbClr val="0B3C49">
                 <a:alpha val="12000"/>
               </a:srgbClr>
@@ -11139,7 +10779,7 @@
           <a:bodyPr wrap="square" lIns="0" tIns="0" rIns="0" bIns="0" rtlCol="0" anchor="ctr"/>
           <a:lstStyle/>
           <a:p>
-            <a:pPr algn="ctr" indent="0" marL="0">
+            <a:pPr marL="0" indent="0" algn="ctr">
               <a:buNone/>
             </a:pPr>
             <a:r>
@@ -11178,7 +10818,7 @@
           <a:bodyPr wrap="square" lIns="0" tIns="0" rIns="0" bIns="0" rtlCol="0" anchor="t"/>
           <a:lstStyle/>
           <a:p>
-            <a:pPr algn="ctr" indent="0" marL="0">
+            <a:pPr marL="0" indent="0" algn="ctr">
               <a:lnSpc>
                 <a:spcPct val="100000"/>
               </a:lnSpc>
@@ -11198,7 +10838,7 @@
             <a:endParaRPr lang="en-US" sz="1000" dirty="0"/>
           </a:p>
           <a:p>
-            <a:pPr algn="ctr" indent="0" marL="0">
+            <a:pPr marL="0" indent="0" algn="ctr">
               <a:lnSpc>
                 <a:spcPct val="100000"/>
               </a:lnSpc>
@@ -11240,7 +10880,7 @@
           <a:bodyPr wrap="square" lIns="0" tIns="0" rIns="0" bIns="0" rtlCol="0" anchor="ctr"/>
           <a:lstStyle/>
           <a:p>
-            <a:pPr algn="ctr" indent="0" marL="0">
+            <a:pPr marL="0" indent="0" algn="ctr">
               <a:buNone/>
             </a:pPr>
             <a:r>
@@ -11284,7 +10924,7 @@
             <a:prstDash val="solid"/>
           </a:ln>
           <a:effectLst>
-            <a:outerShdw sx="100000" sy="100000" kx="0" ky="0" algn="bl" rotWithShape="0" blurRad="114300" dist="38100" dir="8100000">
+            <a:outerShdw blurRad="114300" dist="38100" dir="8100000" algn="bl" rotWithShape="0">
               <a:srgbClr val="0B3C49">
                 <a:alpha val="12000"/>
               </a:srgbClr>
@@ -11313,7 +10953,7 @@
           <a:bodyPr wrap="square" lIns="0" tIns="0" rIns="0" bIns="0" rtlCol="0" anchor="ctr"/>
           <a:lstStyle/>
           <a:p>
-            <a:pPr algn="ctr" indent="0" marL="0">
+            <a:pPr marL="0" indent="0" algn="ctr">
               <a:buNone/>
             </a:pPr>
             <a:r>
@@ -11352,7 +10992,7 @@
           <a:bodyPr wrap="square" lIns="0" tIns="0" rIns="0" bIns="0" rtlCol="0" anchor="t"/>
           <a:lstStyle/>
           <a:p>
-            <a:pPr algn="ctr" indent="0" marL="0">
+            <a:pPr marL="0" indent="0" algn="ctr">
               <a:lnSpc>
                 <a:spcPct val="100000"/>
               </a:lnSpc>
@@ -11372,7 +11012,7 @@
             <a:endParaRPr lang="en-US" sz="1000" dirty="0"/>
           </a:p>
           <a:p>
-            <a:pPr algn="ctr" indent="0" marL="0">
+            <a:pPr marL="0" indent="0" algn="ctr">
               <a:lnSpc>
                 <a:spcPct val="100000"/>
               </a:lnSpc>
@@ -11414,7 +11054,7 @@
           <a:bodyPr wrap="square" lIns="0" tIns="0" rIns="0" bIns="0" rtlCol="0" anchor="ctr"/>
           <a:lstStyle/>
           <a:p>
-            <a:pPr algn="ctr" indent="0" marL="0">
+            <a:pPr marL="0" indent="0" algn="ctr">
               <a:buNone/>
             </a:pPr>
             <a:r>
@@ -11458,7 +11098,7 @@
             <a:prstDash val="solid"/>
           </a:ln>
           <a:effectLst>
-            <a:outerShdw sx="100000" sy="100000" kx="0" ky="0" algn="bl" rotWithShape="0" blurRad="114300" dist="38100" dir="8100000">
+            <a:outerShdw blurRad="114300" dist="38100" dir="8100000" algn="bl" rotWithShape="0">
               <a:srgbClr val="0B3C49">
                 <a:alpha val="12000"/>
               </a:srgbClr>
@@ -11487,7 +11127,7 @@
           <a:bodyPr wrap="square" lIns="0" tIns="0" rIns="0" bIns="0" rtlCol="0" anchor="ctr"/>
           <a:lstStyle/>
           <a:p>
-            <a:pPr algn="ctr" indent="0" marL="0">
+            <a:pPr marL="0" indent="0" algn="ctr">
               <a:buNone/>
             </a:pPr>
             <a:r>
@@ -11526,7 +11166,7 @@
           <a:bodyPr wrap="square" lIns="0" tIns="0" rIns="0" bIns="0" rtlCol="0" anchor="t"/>
           <a:lstStyle/>
           <a:p>
-            <a:pPr algn="ctr" indent="0" marL="0">
+            <a:pPr marL="0" indent="0" algn="ctr">
               <a:lnSpc>
                 <a:spcPct val="100000"/>
               </a:lnSpc>
@@ -11546,7 +11186,7 @@
             <a:endParaRPr lang="en-US" sz="1000" dirty="0"/>
           </a:p>
           <a:p>
-            <a:pPr algn="ctr" indent="0" marL="0">
+            <a:pPr marL="0" indent="0" algn="ctr">
               <a:lnSpc>
                 <a:spcPct val="100000"/>
               </a:lnSpc>
@@ -11588,7 +11228,7 @@
           <a:bodyPr wrap="square" lIns="0" tIns="0" rIns="0" bIns="0" rtlCol="0" anchor="ctr"/>
           <a:lstStyle/>
           <a:p>
-            <a:pPr algn="ctr" indent="0" marL="0">
+            <a:pPr marL="0" indent="0" algn="ctr">
               <a:buNone/>
             </a:pPr>
             <a:r>
@@ -11632,7 +11272,7 @@
             <a:prstDash val="solid"/>
           </a:ln>
           <a:effectLst>
-            <a:outerShdw sx="100000" sy="100000" kx="0" ky="0" algn="bl" rotWithShape="0" blurRad="114300" dist="38100" dir="8100000">
+            <a:outerShdw blurRad="114300" dist="38100" dir="8100000" algn="bl" rotWithShape="0">
               <a:srgbClr val="0B3C49">
                 <a:alpha val="12000"/>
               </a:srgbClr>
@@ -11661,7 +11301,7 @@
           <a:bodyPr wrap="square" lIns="0" tIns="0" rIns="0" bIns="0" rtlCol="0" anchor="ctr"/>
           <a:lstStyle/>
           <a:p>
-            <a:pPr algn="ctr" indent="0" marL="0">
+            <a:pPr marL="0" indent="0" algn="ctr">
               <a:buNone/>
             </a:pPr>
             <a:r>
@@ -11700,7 +11340,7 @@
           <a:bodyPr wrap="square" lIns="0" tIns="0" rIns="0" bIns="0" rtlCol="0" anchor="t"/>
           <a:lstStyle/>
           <a:p>
-            <a:pPr algn="ctr" indent="0" marL="0">
+            <a:pPr marL="0" indent="0" algn="ctr">
               <a:lnSpc>
                 <a:spcPct val="100000"/>
               </a:lnSpc>
@@ -11720,7 +11360,7 @@
             <a:endParaRPr lang="en-US" sz="1000" dirty="0"/>
           </a:p>
           <a:p>
-            <a:pPr algn="ctr" indent="0" marL="0">
+            <a:pPr marL="0" indent="0" algn="ctr">
               <a:lnSpc>
                 <a:spcPct val="100000"/>
               </a:lnSpc>
@@ -11762,7 +11402,7 @@
           <a:bodyPr wrap="square" lIns="0" tIns="0" rIns="0" bIns="0" rtlCol="0" anchor="ctr"/>
           <a:lstStyle/>
           <a:p>
-            <a:pPr algn="ctr" indent="0" marL="0">
+            <a:pPr marL="0" indent="0" algn="ctr">
               <a:buNone/>
             </a:pPr>
             <a:r>
@@ -11806,7 +11446,7 @@
             <a:prstDash val="solid"/>
           </a:ln>
           <a:effectLst>
-            <a:outerShdw sx="100000" sy="100000" kx="0" ky="0" algn="bl" rotWithShape="0" blurRad="114300" dist="38100" dir="8100000">
+            <a:outerShdw blurRad="114300" dist="38100" dir="8100000" algn="bl" rotWithShape="0">
               <a:srgbClr val="0B3C49">
                 <a:alpha val="12000"/>
               </a:srgbClr>
@@ -11835,7 +11475,7 @@
           <a:bodyPr wrap="square" lIns="0" tIns="0" rIns="0" bIns="0" rtlCol="0" anchor="ctr"/>
           <a:lstStyle/>
           <a:p>
-            <a:pPr algn="ctr" indent="0" marL="0">
+            <a:pPr marL="0" indent="0" algn="ctr">
               <a:buNone/>
             </a:pPr>
             <a:r>
@@ -11874,7 +11514,7 @@
           <a:bodyPr wrap="square" lIns="0" tIns="0" rIns="0" bIns="0" rtlCol="0" anchor="t"/>
           <a:lstStyle/>
           <a:p>
-            <a:pPr algn="ctr" indent="0" marL="0">
+            <a:pPr marL="0" indent="0" algn="ctr">
               <a:lnSpc>
                 <a:spcPct val="100000"/>
               </a:lnSpc>
@@ -11894,7 +11534,7 @@
             <a:endParaRPr lang="en-US" sz="1000" dirty="0"/>
           </a:p>
           <a:p>
-            <a:pPr algn="ctr" indent="0" marL="0">
+            <a:pPr marL="0" indent="0" algn="ctr">
               <a:lnSpc>
                 <a:spcPct val="100000"/>
               </a:lnSpc>
@@ -11961,7 +11601,7 @@
           <a:bodyPr wrap="square" lIns="0" tIns="0" rIns="0" bIns="0" rtlCol="0" anchor="ctr"/>
           <a:lstStyle/>
           <a:p>
-            <a:pPr indent="0" marL="0">
+            <a:pPr marL="0" indent="0">
               <a:buNone/>
             </a:pPr>
             <a:r>
@@ -12000,7 +11640,7 @@
           <a:bodyPr wrap="square" lIns="0" tIns="0" rIns="0" bIns="0" rtlCol="0" anchor="t"/>
           <a:lstStyle/>
           <a:p>
-            <a:pPr indent="0" marL="0">
+            <a:pPr marL="0" indent="0">
               <a:lnSpc>
                 <a:spcPct val="108000"/>
               </a:lnSpc>
@@ -12023,7 +11663,7 @@
             <a:endParaRPr lang="en-US" sz="1150" dirty="0"/>
           </a:p>
           <a:p>
-            <a:pPr indent="0" marL="0">
+            <a:pPr marL="0" indent="0">
               <a:lnSpc>
                 <a:spcPct val="108000"/>
               </a:lnSpc>
@@ -12065,7 +11705,7 @@
           <a:bodyPr wrap="square" lIns="0" tIns="0" rIns="0" bIns="0" rtlCol="0" anchor="ctr"/>
           <a:lstStyle/>
           <a:p>
-            <a:pPr algn="r" indent="0" marL="0">
+            <a:pPr marL="0" indent="0" algn="r">
               <a:buNone/>
             </a:pPr>
             <a:r>
@@ -12099,6 +11739,7 @@
         <a:solidFill>
           <a:srgbClr val="F2F7F7"/>
         </a:solidFill>
+        <a:effectLst/>
       </p:bgPr>
     </p:bg>
     <p:spTree>
@@ -12156,11 +11797,11 @@
           <a:bodyPr wrap="square" lIns="0" tIns="0" rIns="0" bIns="0" rtlCol="0" anchor="ctr"/>
           <a:lstStyle/>
           <a:p>
-            <a:pPr indent="0" marL="0">
-              <a:buNone/>
-            </a:pPr>
-            <a:r>
-              <a:rPr lang="en-US" sz="1200" b="1" spc="300" kern="0" dirty="0">
+            <a:pPr marL="0" indent="0">
+              <a:buNone/>
+            </a:pPr>
+            <a:r>
+              <a:rPr lang="en-US" sz="1200" b="1" kern="0" spc="300" dirty="0">
                 <a:solidFill>
                   <a:srgbClr val="028090"/>
                 </a:solidFill>
@@ -12195,7 +11836,7 @@
           <a:bodyPr wrap="square" lIns="0" tIns="0" rIns="0" bIns="0" rtlCol="0" anchor="ctr"/>
           <a:lstStyle/>
           <a:p>
-            <a:pPr indent="0" marL="0">
+            <a:pPr marL="0" indent="0">
               <a:buNone/>
             </a:pPr>
             <a:r>
@@ -12237,7 +11878,7 @@
             <a:prstDash val="solid"/>
           </a:ln>
           <a:effectLst>
-            <a:outerShdw sx="100000" sy="100000" kx="0" ky="0" algn="bl" rotWithShape="0" blurRad="114300" dist="38100" dir="8100000">
+            <a:outerShdw blurRad="114300" dist="38100" dir="8100000" algn="bl" rotWithShape="0">
               <a:srgbClr val="0B3C49">
                 <a:alpha val="12000"/>
               </a:srgbClr>
@@ -12286,7 +11927,7 @@
           <a:bodyPr wrap="square" lIns="0" tIns="0" rIns="0" bIns="0" rtlCol="0" anchor="t"/>
           <a:lstStyle/>
           <a:p>
-            <a:pPr indent="0" marL="0">
+            <a:pPr marL="0" indent="0">
               <a:buNone/>
             </a:pPr>
             <a:r>
@@ -12325,7 +11966,7 @@
           <a:bodyPr wrap="square" lIns="0" tIns="0" rIns="0" bIns="0" rtlCol="0" anchor="ctr"/>
           <a:lstStyle/>
           <a:p>
-            <a:pPr indent="0" marL="0">
+            <a:pPr marL="0" indent="0">
               <a:lnSpc>
                 <a:spcPct val="105000"/>
               </a:lnSpc>
@@ -12370,7 +12011,7 @@
             <a:prstDash val="solid"/>
           </a:ln>
           <a:effectLst>
-            <a:outerShdw sx="100000" sy="100000" kx="0" ky="0" algn="bl" rotWithShape="0" blurRad="114300" dist="38100" dir="8100000">
+            <a:outerShdw blurRad="114300" dist="38100" dir="8100000" algn="bl" rotWithShape="0">
               <a:srgbClr val="0B3C49">
                 <a:alpha val="12000"/>
               </a:srgbClr>
@@ -12419,7 +12060,7 @@
           <a:bodyPr wrap="square" lIns="0" tIns="0" rIns="0" bIns="0" rtlCol="0" anchor="t"/>
           <a:lstStyle/>
           <a:p>
-            <a:pPr indent="0" marL="0">
+            <a:pPr marL="0" indent="0">
               <a:buNone/>
             </a:pPr>
             <a:r>
@@ -12458,7 +12099,7 @@
           <a:bodyPr wrap="square" lIns="0" tIns="0" rIns="0" bIns="0" rtlCol="0" anchor="ctr"/>
           <a:lstStyle/>
           <a:p>
-            <a:pPr indent="0" marL="0">
+            <a:pPr marL="0" indent="0">
               <a:lnSpc>
                 <a:spcPct val="105000"/>
               </a:lnSpc>
@@ -12503,7 +12144,7 @@
             <a:prstDash val="solid"/>
           </a:ln>
           <a:effectLst>
-            <a:outerShdw sx="100000" sy="100000" kx="0" ky="0" algn="bl" rotWithShape="0" blurRad="114300" dist="38100" dir="8100000">
+            <a:outerShdw blurRad="114300" dist="38100" dir="8100000" algn="bl" rotWithShape="0">
               <a:srgbClr val="0B3C49">
                 <a:alpha val="12000"/>
               </a:srgbClr>
@@ -12552,7 +12193,7 @@
           <a:bodyPr wrap="square" lIns="0" tIns="0" rIns="0" bIns="0" rtlCol="0" anchor="t"/>
           <a:lstStyle/>
           <a:p>
-            <a:pPr indent="0" marL="0">
+            <a:pPr marL="0" indent="0">
               <a:buNone/>
             </a:pPr>
             <a:r>
@@ -12591,7 +12232,7 @@
           <a:bodyPr wrap="square" lIns="0" tIns="0" rIns="0" bIns="0" rtlCol="0" anchor="ctr"/>
           <a:lstStyle/>
           <a:p>
-            <a:pPr indent="0" marL="0">
+            <a:pPr marL="0" indent="0">
               <a:lnSpc>
                 <a:spcPct val="105000"/>
               </a:lnSpc>
@@ -12636,7 +12277,7 @@
             <a:prstDash val="solid"/>
           </a:ln>
           <a:effectLst>
-            <a:outerShdw sx="100000" sy="100000" kx="0" ky="0" algn="bl" rotWithShape="0" blurRad="114300" dist="38100" dir="8100000">
+            <a:outerShdw blurRad="114300" dist="38100" dir="8100000" algn="bl" rotWithShape="0">
               <a:srgbClr val="0B3C49">
                 <a:alpha val="12000"/>
               </a:srgbClr>
@@ -12685,7 +12326,7 @@
           <a:bodyPr wrap="square" lIns="0" tIns="0" rIns="0" bIns="0" rtlCol="0" anchor="t"/>
           <a:lstStyle/>
           <a:p>
-            <a:pPr indent="0" marL="0">
+            <a:pPr marL="0" indent="0">
               <a:buNone/>
             </a:pPr>
             <a:r>
@@ -12724,7 +12365,7 @@
           <a:bodyPr wrap="square" lIns="0" tIns="0" rIns="0" bIns="0" rtlCol="0" anchor="ctr"/>
           <a:lstStyle/>
           <a:p>
-            <a:pPr indent="0" marL="0">
+            <a:pPr marL="0" indent="0">
               <a:lnSpc>
                 <a:spcPct val="105000"/>
               </a:lnSpc>
@@ -12766,7 +12407,7 @@
           <a:bodyPr wrap="square" lIns="0" tIns="0" rIns="0" bIns="0" rtlCol="0" anchor="ctr"/>
           <a:lstStyle/>
           <a:p>
-            <a:pPr indent="0" marL="0">
+            <a:pPr marL="0" indent="0">
               <a:buNone/>
             </a:pPr>
             <a:r>
@@ -12805,7 +12446,7 @@
           <a:bodyPr wrap="square" lIns="0" tIns="0" rIns="0" bIns="0" rtlCol="0" anchor="ctr"/>
           <a:lstStyle/>
           <a:p>
-            <a:pPr algn="r" indent="0" marL="0">
+            <a:pPr marL="0" indent="0" algn="r">
               <a:buNone/>
             </a:pPr>
             <a:r>
@@ -12839,6 +12480,7 @@
         <a:solidFill>
           <a:srgbClr val="F2F7F7"/>
         </a:solidFill>
+        <a:effectLst/>
       </p:bgPr>
     </p:bg>
     <p:spTree>
@@ -12896,11 +12538,11 @@
           <a:bodyPr wrap="square" lIns="0" tIns="0" rIns="0" bIns="0" rtlCol="0" anchor="ctr"/>
           <a:lstStyle/>
           <a:p>
-            <a:pPr indent="0" marL="0">
-              <a:buNone/>
-            </a:pPr>
-            <a:r>
-              <a:rPr lang="en-US" sz="1200" b="1" spc="300" kern="0" dirty="0">
+            <a:pPr marL="0" indent="0">
+              <a:buNone/>
+            </a:pPr>
+            <a:r>
+              <a:rPr lang="en-US" sz="1200" b="1" kern="0" spc="300" dirty="0">
                 <a:solidFill>
                   <a:srgbClr val="028090"/>
                 </a:solidFill>
@@ -12935,7 +12577,7 @@
           <a:bodyPr wrap="square" lIns="0" tIns="0" rIns="0" bIns="0" rtlCol="0" anchor="ctr"/>
           <a:lstStyle/>
           <a:p>
-            <a:pPr indent="0" marL="0">
+            <a:pPr marL="0" indent="0">
               <a:buNone/>
             </a:pPr>
             <a:r>
@@ -12977,7 +12619,7 @@
             <a:prstDash val="solid"/>
           </a:ln>
           <a:effectLst>
-            <a:outerShdw sx="100000" sy="100000" kx="0" ky="0" algn="bl" rotWithShape="0" blurRad="114300" dist="38100" dir="8100000">
+            <a:outerShdw blurRad="114300" dist="38100" dir="8100000" algn="bl" rotWithShape="0">
               <a:srgbClr val="0B3C49">
                 <a:alpha val="12000"/>
               </a:srgbClr>
@@ -13026,7 +12668,7 @@
           <a:bodyPr wrap="square" lIns="0" tIns="0" rIns="0" bIns="0" rtlCol="0" anchor="ctr"/>
           <a:lstStyle/>
           <a:p>
-            <a:pPr indent="0" marL="0">
+            <a:pPr marL="0" indent="0">
               <a:buNone/>
             </a:pPr>
             <a:r>
@@ -13087,7 +12729,7 @@
           <a:bodyPr wrap="square" lIns="0" tIns="0" rIns="0" bIns="0" rtlCol="0" anchor="ctr"/>
           <a:lstStyle/>
           <a:p>
-            <a:pPr algn="ctr" indent="0" marL="0">
+            <a:pPr marL="0" indent="0" algn="ctr">
               <a:buNone/>
             </a:pPr>
             <a:r>
@@ -13126,7 +12768,7 @@
           <a:bodyPr wrap="square" lIns="0" tIns="0" rIns="0" bIns="0" rtlCol="0" anchor="t"/>
           <a:lstStyle/>
           <a:p>
-            <a:pPr indent="0" marL="0">
+            <a:pPr marL="0" indent="0">
               <a:lnSpc>
                 <a:spcPct val="106000"/>
               </a:lnSpc>
@@ -13149,7 +12791,7 @@
             <a:endParaRPr lang="en-US" sz="1150" dirty="0"/>
           </a:p>
           <a:p>
-            <a:pPr indent="0" marL="0">
+            <a:pPr marL="0" indent="0">
               <a:lnSpc>
                 <a:spcPct val="106000"/>
               </a:lnSpc>
@@ -13164,7 +12806,29 @@
                 <a:ea typeface="Microsoft YaHei" pitchFamily="34" charset="-122"/>
                 <a:cs typeface="Microsoft YaHei" pitchFamily="34" charset="-120"/>
               </a:rPr>
-              <a:t>1=完美，0.5=和瞎猜一样，&lt;0.5=反着的。本报告最主要看它。</a:t>
+              <a:t>1=完美，0.5=</a:t>
+            </a:r>
+            <a:r>
+              <a:rPr lang="zh-CN" altLang="en-US" sz="1100" dirty="0">
+                <a:solidFill>
+                  <a:srgbClr val="5E7B83"/>
+                </a:solidFill>
+                <a:latin typeface="Microsoft YaHei" pitchFamily="34" charset="0"/>
+                <a:ea typeface="Microsoft YaHei" pitchFamily="34" charset="-122"/>
+                <a:cs typeface="Microsoft YaHei" pitchFamily="34" charset="-120"/>
+              </a:rPr>
+              <a:t>随机</a:t>
+            </a:r>
+            <a:r>
+              <a:rPr lang="en-US" sz="1100" dirty="0">
+                <a:solidFill>
+                  <a:srgbClr val="5E7B83"/>
+                </a:solidFill>
+                <a:latin typeface="Microsoft YaHei" pitchFamily="34" charset="0"/>
+                <a:ea typeface="Microsoft YaHei" pitchFamily="34" charset="-122"/>
+                <a:cs typeface="Microsoft YaHei" pitchFamily="34" charset="-120"/>
+              </a:rPr>
+              <a:t>，&lt;0.5=反着的。本报告最主要看它。</a:t>
             </a:r>
             <a:endParaRPr lang="en-US" sz="1150" dirty="0"/>
           </a:p>
@@ -13194,7 +12858,7 @@
             <a:prstDash val="solid"/>
           </a:ln>
           <a:effectLst>
-            <a:outerShdw sx="100000" sy="100000" kx="0" ky="0" algn="bl" rotWithShape="0" blurRad="114300" dist="38100" dir="8100000">
+            <a:outerShdw blurRad="114300" dist="38100" dir="8100000" algn="bl" rotWithShape="0">
               <a:srgbClr val="0B3C49">
                 <a:alpha val="12000"/>
               </a:srgbClr>
@@ -13243,7 +12907,7 @@
           <a:bodyPr wrap="square" lIns="0" tIns="0" rIns="0" bIns="0" rtlCol="0" anchor="ctr"/>
           <a:lstStyle/>
           <a:p>
-            <a:pPr indent="0" marL="0">
+            <a:pPr marL="0" indent="0">
               <a:buNone/>
             </a:pPr>
             <a:r>
@@ -13304,7 +12968,7 @@
           <a:bodyPr wrap="square" lIns="0" tIns="0" rIns="0" bIns="0" rtlCol="0" anchor="ctr"/>
           <a:lstStyle/>
           <a:p>
-            <a:pPr algn="ctr" indent="0" marL="0">
+            <a:pPr marL="0" indent="0" algn="ctr">
               <a:buNone/>
             </a:pPr>
             <a:r>
@@ -13343,7 +13007,7 @@
           <a:bodyPr wrap="square" lIns="0" tIns="0" rIns="0" bIns="0" rtlCol="0" anchor="t"/>
           <a:lstStyle/>
           <a:p>
-            <a:pPr indent="0" marL="0">
+            <a:pPr marL="0" indent="0">
               <a:lnSpc>
                 <a:spcPct val="106000"/>
               </a:lnSpc>
@@ -13366,7 +13030,7 @@
             <a:endParaRPr lang="en-US" sz="1150" dirty="0"/>
           </a:p>
           <a:p>
-            <a:pPr indent="0" marL="0">
+            <a:pPr marL="0" indent="0">
               <a:lnSpc>
                 <a:spcPct val="106000"/>
               </a:lnSpc>
@@ -13411,7 +13075,7 @@
             <a:prstDash val="solid"/>
           </a:ln>
           <a:effectLst>
-            <a:outerShdw sx="100000" sy="100000" kx="0" ky="0" algn="bl" rotWithShape="0" blurRad="114300" dist="38100" dir="8100000">
+            <a:outerShdw blurRad="114300" dist="38100" dir="8100000" algn="bl" rotWithShape="0">
               <a:srgbClr val="0B3C49">
                 <a:alpha val="12000"/>
               </a:srgbClr>
@@ -13460,7 +13124,7 @@
           <a:bodyPr wrap="square" lIns="0" tIns="0" rIns="0" bIns="0" rtlCol="0" anchor="ctr"/>
           <a:lstStyle/>
           <a:p>
-            <a:pPr indent="0" marL="0">
+            <a:pPr marL="0" indent="0">
               <a:buNone/>
             </a:pPr>
             <a:r>
@@ -13521,7 +13185,7 @@
           <a:bodyPr wrap="square" lIns="0" tIns="0" rIns="0" bIns="0" rtlCol="0" anchor="ctr"/>
           <a:lstStyle/>
           <a:p>
-            <a:pPr algn="ctr" indent="0" marL="0">
+            <a:pPr marL="0" indent="0" algn="ctr">
               <a:buNone/>
             </a:pPr>
             <a:r>
@@ -13560,7 +13224,7 @@
           <a:bodyPr wrap="square" lIns="0" tIns="0" rIns="0" bIns="0" rtlCol="0" anchor="t"/>
           <a:lstStyle/>
           <a:p>
-            <a:pPr indent="0" marL="0">
+            <a:pPr marL="0" indent="0">
               <a:lnSpc>
                 <a:spcPct val="106000"/>
               </a:lnSpc>
@@ -13583,7 +13247,7 @@
             <a:endParaRPr lang="en-US" sz="1150" dirty="0"/>
           </a:p>
           <a:p>
-            <a:pPr indent="0" marL="0">
+            <a:pPr marL="0" indent="0">
               <a:lnSpc>
                 <a:spcPct val="106000"/>
               </a:lnSpc>
@@ -13628,7 +13292,7 @@
             <a:prstDash val="solid"/>
           </a:ln>
           <a:effectLst>
-            <a:outerShdw sx="100000" sy="100000" kx="0" ky="0" algn="bl" rotWithShape="0" blurRad="114300" dist="38100" dir="8100000">
+            <a:outerShdw blurRad="114300" dist="38100" dir="8100000" algn="bl" rotWithShape="0">
               <a:srgbClr val="0B3C49">
                 <a:alpha val="12000"/>
               </a:srgbClr>
@@ -13677,7 +13341,7 @@
           <a:bodyPr wrap="square" lIns="0" tIns="0" rIns="0" bIns="0" rtlCol="0" anchor="ctr"/>
           <a:lstStyle/>
           <a:p>
-            <a:pPr indent="0" marL="0">
+            <a:pPr marL="0" indent="0">
               <a:buNone/>
             </a:pPr>
             <a:r>
@@ -13738,7 +13402,7 @@
           <a:bodyPr wrap="square" lIns="0" tIns="0" rIns="0" bIns="0" rtlCol="0" anchor="ctr"/>
           <a:lstStyle/>
           <a:p>
-            <a:pPr algn="ctr" indent="0" marL="0">
+            <a:pPr marL="0" indent="0" algn="ctr">
               <a:buNone/>
             </a:pPr>
             <a:r>
@@ -13777,7 +13441,7 @@
           <a:bodyPr wrap="square" lIns="0" tIns="0" rIns="0" bIns="0" rtlCol="0" anchor="t"/>
           <a:lstStyle/>
           <a:p>
-            <a:pPr indent="0" marL="0">
+            <a:pPr marL="0" indent="0">
               <a:lnSpc>
                 <a:spcPct val="106000"/>
               </a:lnSpc>
@@ -13800,7 +13464,7 @@
             <a:endParaRPr lang="en-US" sz="1150" dirty="0"/>
           </a:p>
           <a:p>
-            <a:pPr indent="0" marL="0">
+            <a:pPr marL="0" indent="0">
               <a:lnSpc>
                 <a:spcPct val="106000"/>
               </a:lnSpc>
@@ -13867,7 +13531,7 @@
           <a:bodyPr wrap="square" lIns="0" tIns="0" rIns="0" bIns="0" rtlCol="0" anchor="ctr"/>
           <a:lstStyle/>
           <a:p>
-            <a:pPr indent="0" marL="0">
+            <a:pPr marL="0" indent="0">
               <a:lnSpc>
                 <a:spcPct val="104000"/>
               </a:lnSpc>
@@ -13884,12 +13548,6 @@
               </a:rPr>
               <a:t>一句话：</a:t>
             </a:r>
-            <a:pPr indent="0" marL="0">
-              <a:lnSpc>
-                <a:spcPct val="104000"/>
-              </a:lnSpc>
-              <a:buNone/>
-            </a:pPr>
             <a:r>
               <a:rPr lang="en-US" sz="1100" dirty="0">
                 <a:solidFill>
@@ -13926,7 +13584,7 @@
           <a:bodyPr wrap="square" lIns="0" tIns="0" rIns="0" bIns="0" rtlCol="0" anchor="ctr"/>
           <a:lstStyle/>
           <a:p>
-            <a:pPr algn="r" indent="0" marL="0">
+            <a:pPr marL="0" indent="0" algn="r">
               <a:buNone/>
             </a:pPr>
             <a:r>
@@ -13960,6 +13618,7 @@
         <a:solidFill>
           <a:srgbClr val="F2F7F7"/>
         </a:solidFill>
+        <a:effectLst/>
       </p:bgPr>
     </p:bg>
     <p:spTree>
@@ -14017,11 +13676,11 @@
           <a:bodyPr wrap="square" lIns="0" tIns="0" rIns="0" bIns="0" rtlCol="0" anchor="ctr"/>
           <a:lstStyle/>
           <a:p>
-            <a:pPr indent="0" marL="0">
-              <a:buNone/>
-            </a:pPr>
-            <a:r>
-              <a:rPr lang="en-US" sz="1200" b="1" spc="300" kern="0" dirty="0">
+            <a:pPr marL="0" indent="0">
+              <a:buNone/>
+            </a:pPr>
+            <a:r>
+              <a:rPr lang="en-US" sz="1200" b="1" kern="0" spc="300" dirty="0">
                 <a:solidFill>
                   <a:srgbClr val="028090"/>
                 </a:solidFill>
@@ -14056,7 +13715,7 @@
           <a:bodyPr wrap="square" lIns="0" tIns="0" rIns="0" bIns="0" rtlCol="0" anchor="ctr"/>
           <a:lstStyle/>
           <a:p>
-            <a:pPr indent="0" marL="0">
+            <a:pPr marL="0" indent="0">
               <a:buNone/>
             </a:pPr>
             <a:r>
@@ -14098,7 +13757,7 @@
             <a:prstDash val="solid"/>
           </a:ln>
           <a:effectLst>
-            <a:outerShdw sx="100000" sy="100000" kx="0" ky="0" algn="bl" rotWithShape="0" blurRad="114300" dist="38100" dir="8100000">
+            <a:outerShdw blurRad="114300" dist="38100" dir="8100000" algn="bl" rotWithShape="0">
               <a:srgbClr val="0B3C49">
                 <a:alpha val="12000"/>
               </a:srgbClr>
@@ -14147,7 +13806,7 @@
           <a:bodyPr wrap="square" lIns="0" tIns="0" rIns="0" bIns="0" rtlCol="0" anchor="ctr"/>
           <a:lstStyle/>
           <a:p>
-            <a:pPr indent="0" marL="0">
+            <a:pPr marL="0" indent="0">
               <a:buNone/>
             </a:pPr>
             <a:r>
@@ -14186,7 +13845,7 @@
           <a:bodyPr wrap="square" lIns="0" tIns="0" rIns="0" bIns="0" rtlCol="0" anchor="ctr"/>
           <a:lstStyle/>
           <a:p>
-            <a:pPr indent="0" marL="0">
+            <a:pPr marL="0" indent="0">
               <a:buNone/>
             </a:pPr>
             <a:r>
@@ -14225,7 +13884,7 @@
           <a:bodyPr wrap="square" lIns="0" tIns="0" rIns="0" bIns="0" rtlCol="0" anchor="ctr"/>
           <a:lstStyle/>
           <a:p>
-            <a:pPr indent="0" marL="0">
+            <a:pPr marL="0" indent="0">
               <a:buNone/>
             </a:pPr>
             <a:r>
@@ -14267,7 +13926,7 @@
             <a:prstDash val="solid"/>
           </a:ln>
           <a:effectLst>
-            <a:outerShdw sx="100000" sy="100000" kx="0" ky="0" algn="bl" rotWithShape="0" blurRad="114300" dist="38100" dir="8100000">
+            <a:outerShdw blurRad="114300" dist="38100" dir="8100000" algn="bl" rotWithShape="0">
               <a:srgbClr val="0B3C49">
                 <a:alpha val="12000"/>
               </a:srgbClr>
@@ -14316,7 +13975,7 @@
           <a:bodyPr wrap="square" lIns="0" tIns="0" rIns="0" bIns="0" rtlCol="0" anchor="ctr"/>
           <a:lstStyle/>
           <a:p>
-            <a:pPr indent="0" marL="0">
+            <a:pPr marL="0" indent="0">
               <a:buNone/>
             </a:pPr>
             <a:r>
@@ -14355,7 +14014,7 @@
           <a:bodyPr wrap="square" lIns="0" tIns="0" rIns="0" bIns="0" rtlCol="0" anchor="ctr"/>
           <a:lstStyle/>
           <a:p>
-            <a:pPr indent="0" marL="0">
+            <a:pPr marL="0" indent="0">
               <a:buNone/>
             </a:pPr>
             <a:r>
@@ -14394,7 +14053,7 @@
           <a:bodyPr wrap="square" lIns="0" tIns="0" rIns="0" bIns="0" rtlCol="0" anchor="ctr"/>
           <a:lstStyle/>
           <a:p>
-            <a:pPr indent="0" marL="0">
+            <a:pPr marL="0" indent="0">
               <a:buNone/>
             </a:pPr>
             <a:r>
@@ -14436,7 +14095,7 @@
             <a:prstDash val="solid"/>
           </a:ln>
           <a:effectLst>
-            <a:outerShdw sx="100000" sy="100000" kx="0" ky="0" algn="bl" rotWithShape="0" blurRad="114300" dist="38100" dir="8100000">
+            <a:outerShdw blurRad="114300" dist="38100" dir="8100000" algn="bl" rotWithShape="0">
               <a:srgbClr val="0B3C49">
                 <a:alpha val="12000"/>
               </a:srgbClr>
@@ -14485,7 +14144,7 @@
           <a:bodyPr wrap="square" lIns="0" tIns="0" rIns="0" bIns="0" rtlCol="0" anchor="ctr"/>
           <a:lstStyle/>
           <a:p>
-            <a:pPr indent="0" marL="0">
+            <a:pPr marL="0" indent="0">
               <a:buNone/>
             </a:pPr>
             <a:r>
@@ -14524,7 +14183,7 @@
           <a:bodyPr wrap="square" lIns="0" tIns="0" rIns="0" bIns="0" rtlCol="0" anchor="ctr"/>
           <a:lstStyle/>
           <a:p>
-            <a:pPr indent="0" marL="0">
+            <a:pPr marL="0" indent="0">
               <a:buNone/>
             </a:pPr>
             <a:r>
@@ -14563,7 +14222,7 @@
           <a:bodyPr wrap="square" lIns="0" tIns="0" rIns="0" bIns="0" rtlCol="0" anchor="ctr"/>
           <a:lstStyle/>
           <a:p>
-            <a:pPr indent="0" marL="0">
+            <a:pPr marL="0" indent="0">
               <a:buNone/>
             </a:pPr>
             <a:r>
@@ -14605,7 +14264,7 @@
             <a:prstDash val="solid"/>
           </a:ln>
           <a:effectLst>
-            <a:outerShdw sx="100000" sy="100000" kx="0" ky="0" algn="bl" rotWithShape="0" blurRad="114300" dist="38100" dir="8100000">
+            <a:outerShdw blurRad="114300" dist="38100" dir="8100000" algn="bl" rotWithShape="0">
               <a:srgbClr val="0B3C49">
                 <a:alpha val="12000"/>
               </a:srgbClr>
@@ -14654,7 +14313,7 @@
           <a:bodyPr wrap="square" lIns="0" tIns="0" rIns="0" bIns="0" rtlCol="0" anchor="ctr"/>
           <a:lstStyle/>
           <a:p>
-            <a:pPr indent="0" marL="0">
+            <a:pPr marL="0" indent="0">
               <a:buNone/>
             </a:pPr>
             <a:r>
@@ -14693,7 +14352,7 @@
           <a:bodyPr wrap="square" lIns="0" tIns="0" rIns="0" bIns="0" rtlCol="0" anchor="ctr"/>
           <a:lstStyle/>
           <a:p>
-            <a:pPr indent="0" marL="0">
+            <a:pPr marL="0" indent="0">
               <a:buNone/>
             </a:pPr>
             <a:r>
@@ -14732,7 +14391,7 @@
           <a:bodyPr wrap="square" lIns="0" tIns="0" rIns="0" bIns="0" rtlCol="0" anchor="ctr"/>
           <a:lstStyle/>
           <a:p>
-            <a:pPr indent="0" marL="0">
+            <a:pPr marL="0" indent="0">
               <a:buNone/>
             </a:pPr>
             <a:r>
@@ -14774,7 +14433,7 @@
             <a:prstDash val="solid"/>
           </a:ln>
           <a:effectLst>
-            <a:outerShdw sx="100000" sy="100000" kx="0" ky="0" algn="bl" rotWithShape="0" blurRad="114300" dist="38100" dir="8100000">
+            <a:outerShdw blurRad="114300" dist="38100" dir="8100000" algn="bl" rotWithShape="0">
               <a:srgbClr val="0B3C49">
                 <a:alpha val="12000"/>
               </a:srgbClr>
@@ -14823,7 +14482,7 @@
           <a:bodyPr wrap="square" lIns="0" tIns="0" rIns="0" bIns="0" rtlCol="0" anchor="ctr"/>
           <a:lstStyle/>
           <a:p>
-            <a:pPr indent="0" marL="0">
+            <a:pPr marL="0" indent="0">
               <a:buNone/>
             </a:pPr>
             <a:r>
@@ -14862,7 +14521,7 @@
           <a:bodyPr wrap="square" lIns="0" tIns="0" rIns="0" bIns="0" rtlCol="0" anchor="ctr"/>
           <a:lstStyle/>
           <a:p>
-            <a:pPr indent="0" marL="0">
+            <a:pPr marL="0" indent="0">
               <a:buNone/>
             </a:pPr>
             <a:r>
@@ -14901,7 +14560,7 @@
           <a:bodyPr wrap="square" lIns="0" tIns="0" rIns="0" bIns="0" rtlCol="0" anchor="ctr"/>
           <a:lstStyle/>
           <a:p>
-            <a:pPr indent="0" marL="0">
+            <a:pPr marL="0" indent="0">
               <a:buNone/>
             </a:pPr>
             <a:r>
@@ -14943,7 +14602,7 @@
             <a:prstDash val="solid"/>
           </a:ln>
           <a:effectLst>
-            <a:outerShdw sx="100000" sy="100000" kx="0" ky="0" algn="bl" rotWithShape="0" blurRad="114300" dist="38100" dir="8100000">
+            <a:outerShdw blurRad="114300" dist="38100" dir="8100000" algn="bl" rotWithShape="0">
               <a:srgbClr val="0B3C49">
                 <a:alpha val="12000"/>
               </a:srgbClr>
@@ -14992,7 +14651,7 @@
           <a:bodyPr wrap="square" lIns="0" tIns="0" rIns="0" bIns="0" rtlCol="0" anchor="ctr"/>
           <a:lstStyle/>
           <a:p>
-            <a:pPr indent="0" marL="0">
+            <a:pPr marL="0" indent="0">
               <a:buNone/>
             </a:pPr>
             <a:r>
@@ -15031,7 +14690,7 @@
           <a:bodyPr wrap="square" lIns="0" tIns="0" rIns="0" bIns="0" rtlCol="0" anchor="ctr"/>
           <a:lstStyle/>
           <a:p>
-            <a:pPr indent="0" marL="0">
+            <a:pPr marL="0" indent="0">
               <a:buNone/>
             </a:pPr>
             <a:r>
@@ -15070,7 +14729,7 @@
           <a:bodyPr wrap="square" lIns="0" tIns="0" rIns="0" bIns="0" rtlCol="0" anchor="ctr"/>
           <a:lstStyle/>
           <a:p>
-            <a:pPr indent="0" marL="0">
+            <a:pPr marL="0" indent="0">
               <a:buNone/>
             </a:pPr>
             <a:r>
@@ -15112,7 +14771,7 @@
             <a:prstDash val="solid"/>
           </a:ln>
           <a:effectLst>
-            <a:outerShdw sx="100000" sy="100000" kx="0" ky="0" algn="bl" rotWithShape="0" blurRad="114300" dist="38100" dir="8100000">
+            <a:outerShdw blurRad="114300" dist="38100" dir="8100000" algn="bl" rotWithShape="0">
               <a:srgbClr val="0B3C49">
                 <a:alpha val="12000"/>
               </a:srgbClr>
@@ -15161,7 +14820,7 @@
           <a:bodyPr wrap="square" lIns="0" tIns="0" rIns="0" bIns="0" rtlCol="0" anchor="ctr"/>
           <a:lstStyle/>
           <a:p>
-            <a:pPr indent="0" marL="0">
+            <a:pPr marL="0" indent="0">
               <a:buNone/>
             </a:pPr>
             <a:r>
@@ -15200,7 +14859,7 @@
           <a:bodyPr wrap="square" lIns="0" tIns="0" rIns="0" bIns="0" rtlCol="0" anchor="ctr"/>
           <a:lstStyle/>
           <a:p>
-            <a:pPr indent="0" marL="0">
+            <a:pPr marL="0" indent="0">
               <a:buNone/>
             </a:pPr>
             <a:r>
@@ -15239,7 +14898,7 @@
           <a:bodyPr wrap="square" lIns="0" tIns="0" rIns="0" bIns="0" rtlCol="0" anchor="ctr"/>
           <a:lstStyle/>
           <a:p>
-            <a:pPr indent="0" marL="0">
+            <a:pPr marL="0" indent="0">
               <a:buNone/>
             </a:pPr>
             <a:r>
@@ -15278,7 +14937,7 @@
           <a:bodyPr wrap="square" lIns="0" tIns="0" rIns="0" bIns="0" rtlCol="0" anchor="ctr"/>
           <a:lstStyle/>
           <a:p>
-            <a:pPr algn="r" indent="0" marL="0">
+            <a:pPr marL="0" indent="0" algn="r">
               <a:buNone/>
             </a:pPr>
             <a:r>
@@ -15312,6 +14971,7 @@
         <a:solidFill>
           <a:srgbClr val="F2F7F7"/>
         </a:solidFill>
+        <a:effectLst/>
       </p:bgPr>
     </p:bg>
     <p:spTree>
@@ -15369,11 +15029,11 @@
           <a:bodyPr wrap="square" lIns="0" tIns="0" rIns="0" bIns="0" rtlCol="0" anchor="ctr"/>
           <a:lstStyle/>
           <a:p>
-            <a:pPr indent="0" marL="0">
-              <a:buNone/>
-            </a:pPr>
-            <a:r>
-              <a:rPr lang="en-US" sz="1200" b="1" spc="300" kern="0" dirty="0">
+            <a:pPr marL="0" indent="0">
+              <a:buNone/>
+            </a:pPr>
+            <a:r>
+              <a:rPr lang="en-US" sz="1200" b="1" kern="0" spc="300" dirty="0">
                 <a:solidFill>
                   <a:srgbClr val="C9743D"/>
                 </a:solidFill>
@@ -15408,7 +15068,7 @@
           <a:bodyPr wrap="square" lIns="0" tIns="0" rIns="0" bIns="0" rtlCol="0" anchor="ctr"/>
           <a:lstStyle/>
           <a:p>
-            <a:pPr indent="0" marL="0">
+            <a:pPr marL="0" indent="0">
               <a:buNone/>
             </a:pPr>
             <a:r>
@@ -15450,7 +15110,7 @@
             <a:prstDash val="solid"/>
           </a:ln>
           <a:effectLst>
-            <a:outerShdw sx="100000" sy="100000" kx="0" ky="0" algn="bl" rotWithShape="0" blurRad="114300" dist="38100" dir="8100000">
+            <a:outerShdw blurRad="114300" dist="38100" dir="8100000" algn="bl" rotWithShape="0">
               <a:srgbClr val="0B3C49">
                 <a:alpha val="12000"/>
               </a:srgbClr>
@@ -15460,15 +15120,15 @@
       </p:sp>
       <p:pic>
         <p:nvPicPr>
-          <p:cNvPr id="6" name="Image 0" descr="D:/YJ-Agent/project/meeting/QuantImmuBench/analysis/figures/fig6_5tools_auc.png">    </p:cNvPr>
+          <p:cNvPr id="6" name="Image 0" descr="D:/YJ-Agent/project/meeting/QuantImmuBench/analysis/figures/fig6_5tools_auc.png"/>
           <p:cNvPicPr>
             <a:picLocks noChangeAspect="1"/>
           </p:cNvPicPr>
           <p:nvPr/>
         </p:nvPicPr>
         <p:blipFill>
-          <a:blip r:embed="rId1"/>
-          <a:srcRect l="0" r="0" t="0" b="0"/>
+          <a:blip r:embed="rId3"/>
+          <a:srcRect/>
           <a:stretch/>
         </p:blipFill>
         <p:spPr>
@@ -15489,8 +15149,8 @@
         </p:nvSpPr>
         <p:spPr>
           <a:xfrm>
-            <a:off x="566928" y="6035040"/>
-            <a:ext cx="6858000" cy="365760"/>
+            <a:off x="566928" y="6291072"/>
+            <a:ext cx="8150904" cy="365760"/>
           </a:xfrm>
           <a:prstGeom prst="rect">
             <a:avLst/>
@@ -15502,7 +15162,7 @@
           <a:bodyPr wrap="square" lIns="0" tIns="0" rIns="0" bIns="0" rtlCol="0" anchor="t"/>
           <a:lstStyle/>
           <a:p>
-            <a:pPr indent="0" marL="0">
+            <a:pPr marL="0" indent="0">
               <a:buNone/>
             </a:pPr>
             <a:r>
@@ -15544,7 +15204,7 @@
             <a:prstDash val="solid"/>
           </a:ln>
           <a:effectLst>
-            <a:outerShdw sx="100000" sy="100000" kx="0" ky="0" algn="bl" rotWithShape="0" blurRad="114300" dist="38100" dir="8100000">
+            <a:outerShdw blurRad="114300" dist="38100" dir="8100000" algn="bl" rotWithShape="0">
               <a:srgbClr val="0B3C49">
                 <a:alpha val="12000"/>
               </a:srgbClr>
@@ -15593,7 +15253,7 @@
           <a:bodyPr wrap="square" lIns="0" tIns="0" rIns="0" bIns="0" rtlCol="0" anchor="ctr"/>
           <a:lstStyle/>
           <a:p>
-            <a:pPr indent="0" marL="0">
+            <a:pPr marL="0" indent="0">
               <a:buNone/>
             </a:pPr>
             <a:r>
@@ -15632,7 +15292,7 @@
           <a:bodyPr wrap="square" lIns="0" tIns="0" rIns="0" bIns="0" rtlCol="0" anchor="t"/>
           <a:lstStyle/>
           <a:p>
-            <a:pPr indent="0" marL="0">
+            <a:pPr marL="0" indent="0">
               <a:lnSpc>
                 <a:spcPct val="104000"/>
               </a:lnSpc>
@@ -15677,7 +15337,7 @@
             <a:prstDash val="solid"/>
           </a:ln>
           <a:effectLst>
-            <a:outerShdw sx="100000" sy="100000" kx="0" ky="0" algn="bl" rotWithShape="0" blurRad="114300" dist="38100" dir="8100000">
+            <a:outerShdw blurRad="114300" dist="38100" dir="8100000" algn="bl" rotWithShape="0">
               <a:srgbClr val="0B3C49">
                 <a:alpha val="12000"/>
               </a:srgbClr>
@@ -15726,7 +15386,7 @@
           <a:bodyPr wrap="square" lIns="0" tIns="0" rIns="0" bIns="0" rtlCol="0" anchor="ctr"/>
           <a:lstStyle/>
           <a:p>
-            <a:pPr indent="0" marL="0">
+            <a:pPr marL="0" indent="0">
               <a:buNone/>
             </a:pPr>
             <a:r>
@@ -15765,7 +15425,7 @@
           <a:bodyPr wrap="square" lIns="0" tIns="0" rIns="0" bIns="0" rtlCol="0" anchor="t"/>
           <a:lstStyle/>
           <a:p>
-            <a:pPr indent="0" marL="0">
+            <a:pPr marL="0" indent="0">
               <a:lnSpc>
                 <a:spcPct val="104000"/>
               </a:lnSpc>
@@ -15810,7 +15470,7 @@
             <a:prstDash val="solid"/>
           </a:ln>
           <a:effectLst>
-            <a:outerShdw sx="100000" sy="100000" kx="0" ky="0" algn="bl" rotWithShape="0" blurRad="114300" dist="38100" dir="8100000">
+            <a:outerShdw blurRad="114300" dist="38100" dir="8100000" algn="bl" rotWithShape="0">
               <a:srgbClr val="0B3C49">
                 <a:alpha val="12000"/>
               </a:srgbClr>
@@ -15859,7 +15519,7 @@
           <a:bodyPr wrap="square" lIns="0" tIns="0" rIns="0" bIns="0" rtlCol="0" anchor="ctr"/>
           <a:lstStyle/>
           <a:p>
-            <a:pPr indent="0" marL="0">
+            <a:pPr marL="0" indent="0">
               <a:buNone/>
             </a:pPr>
             <a:r>
@@ -15898,7 +15558,7 @@
           <a:bodyPr wrap="square" lIns="0" tIns="0" rIns="0" bIns="0" rtlCol="0" anchor="t"/>
           <a:lstStyle/>
           <a:p>
-            <a:pPr indent="0" marL="0">
+            <a:pPr marL="0" indent="0">
               <a:lnSpc>
                 <a:spcPct val="104000"/>
               </a:lnSpc>
@@ -15940,7 +15600,7 @@
           <a:bodyPr wrap="square" lIns="0" tIns="0" rIns="0" bIns="0" rtlCol="0" anchor="ctr"/>
           <a:lstStyle/>
           <a:p>
-            <a:pPr algn="r" indent="0" marL="0">
+            <a:pPr marL="0" indent="0" algn="r">
               <a:buNone/>
             </a:pPr>
             <a:r>
@@ -15974,6 +15634,7 @@
         <a:solidFill>
           <a:srgbClr val="F2F7F7"/>
         </a:solidFill>
+        <a:effectLst/>
       </p:bgPr>
     </p:bg>
     <p:spTree>
@@ -16031,11 +15692,11 @@
           <a:bodyPr wrap="square" lIns="0" tIns="0" rIns="0" bIns="0" rtlCol="0" anchor="ctr"/>
           <a:lstStyle/>
           <a:p>
-            <a:pPr indent="0" marL="0">
-              <a:buNone/>
-            </a:pPr>
-            <a:r>
-              <a:rPr lang="en-US" sz="1200" b="1" spc="300" kern="0" dirty="0">
+            <a:pPr marL="0" indent="0">
+              <a:buNone/>
+            </a:pPr>
+            <a:r>
+              <a:rPr lang="en-US" sz="1200" b="1" kern="0" spc="300" dirty="0">
                 <a:solidFill>
                   <a:srgbClr val="028090"/>
                 </a:solidFill>
@@ -16070,7 +15731,7 @@
           <a:bodyPr wrap="square" lIns="0" tIns="0" rIns="0" bIns="0" rtlCol="0" anchor="ctr"/>
           <a:lstStyle/>
           <a:p>
-            <a:pPr indent="0" marL="0">
+            <a:pPr marL="0" indent="0">
               <a:buNone/>
             </a:pPr>
             <a:r>
@@ -16112,7 +15773,7 @@
             <a:prstDash val="solid"/>
           </a:ln>
           <a:effectLst>
-            <a:outerShdw sx="100000" sy="100000" kx="0" ky="0" algn="bl" rotWithShape="0" blurRad="114300" dist="38100" dir="8100000">
+            <a:outerShdw blurRad="114300" dist="38100" dir="8100000" algn="bl" rotWithShape="0">
               <a:srgbClr val="0B3C49">
                 <a:alpha val="12000"/>
               </a:srgbClr>
@@ -16122,15 +15783,15 @@
       </p:sp>
       <p:pic>
         <p:nvPicPr>
-          <p:cNvPr id="6" name="Image 0" descr="D:/YJ-Agent/project/meeting/QuantImmuBench/analysis/figures/fig8_5tools_roc.png">    </p:cNvPr>
+          <p:cNvPr id="6" name="Image 0" descr="D:/YJ-Agent/project/meeting/QuantImmuBench/analysis/figures/fig8_5tools_roc.png"/>
           <p:cNvPicPr>
             <a:picLocks noChangeAspect="1"/>
           </p:cNvPicPr>
           <p:nvPr/>
         </p:nvPicPr>
         <p:blipFill>
-          <a:blip r:embed="rId1"/>
-          <a:srcRect l="0" r="0" t="0" b="0"/>
+          <a:blip r:embed="rId3"/>
+          <a:srcRect/>
           <a:stretch/>
         </p:blipFill>
         <p:spPr>
@@ -16151,7 +15812,7 @@
         </p:nvSpPr>
         <p:spPr>
           <a:xfrm>
-            <a:off x="566928" y="6053328"/>
+            <a:off x="566928" y="6355080"/>
             <a:ext cx="6858000" cy="365760"/>
           </a:xfrm>
           <a:prstGeom prst="rect">
@@ -16164,7 +15825,7 @@
           <a:bodyPr wrap="square" lIns="0" tIns="0" rIns="0" bIns="0" rtlCol="0" anchor="t"/>
           <a:lstStyle/>
           <a:p>
-            <a:pPr indent="0" marL="0">
+            <a:pPr marL="0" indent="0">
               <a:buNone/>
             </a:pPr>
             <a:r>
@@ -16206,7 +15867,7 @@
             <a:prstDash val="solid"/>
           </a:ln>
           <a:effectLst>
-            <a:outerShdw sx="100000" sy="100000" kx="0" ky="0" algn="bl" rotWithShape="0" blurRad="114300" dist="38100" dir="8100000">
+            <a:outerShdw blurRad="114300" dist="38100" dir="8100000" algn="bl" rotWithShape="0">
               <a:srgbClr val="0B3C49">
                 <a:alpha val="12000"/>
               </a:srgbClr>
@@ -16255,7 +15916,7 @@
           <a:bodyPr wrap="square" lIns="0" tIns="0" rIns="0" bIns="0" rtlCol="0" anchor="ctr"/>
           <a:lstStyle/>
           <a:p>
-            <a:pPr indent="0" marL="0">
+            <a:pPr marL="0" indent="0">
               <a:buNone/>
             </a:pPr>
             <a:r>
@@ -16294,7 +15955,7 @@
           <a:bodyPr wrap="square" lIns="0" tIns="0" rIns="0" bIns="0" rtlCol="0" anchor="t"/>
           <a:lstStyle/>
           <a:p>
-            <a:pPr indent="0" marL="0">
+            <a:pPr marL="0" indent="0">
               <a:lnSpc>
                 <a:spcPct val="105000"/>
               </a:lnSpc>
@@ -16339,7 +16000,7 @@
             <a:prstDash val="solid"/>
           </a:ln>
           <a:effectLst>
-            <a:outerShdw sx="100000" sy="100000" kx="0" ky="0" algn="bl" rotWithShape="0" blurRad="114300" dist="38100" dir="8100000">
+            <a:outerShdw blurRad="114300" dist="38100" dir="8100000" algn="bl" rotWithShape="0">
               <a:srgbClr val="0B3C49">
                 <a:alpha val="12000"/>
               </a:srgbClr>
@@ -16388,7 +16049,7 @@
           <a:bodyPr wrap="square" lIns="0" tIns="0" rIns="0" bIns="0" rtlCol="0" anchor="ctr"/>
           <a:lstStyle/>
           <a:p>
-            <a:pPr indent="0" marL="0">
+            <a:pPr marL="0" indent="0">
               <a:buNone/>
             </a:pPr>
             <a:r>
@@ -16427,7 +16088,7 @@
           <a:bodyPr wrap="square" lIns="0" tIns="0" rIns="0" bIns="0" rtlCol="0" anchor="t"/>
           <a:lstStyle/>
           <a:p>
-            <a:pPr indent="0" marL="0">
+            <a:pPr marL="0" indent="0">
               <a:lnSpc>
                 <a:spcPct val="105000"/>
               </a:lnSpc>
@@ -16472,7 +16133,7 @@
             <a:prstDash val="solid"/>
           </a:ln>
           <a:effectLst>
-            <a:outerShdw sx="100000" sy="100000" kx="0" ky="0" algn="bl" rotWithShape="0" blurRad="114300" dist="38100" dir="8100000">
+            <a:outerShdw blurRad="114300" dist="38100" dir="8100000" algn="bl" rotWithShape="0">
               <a:srgbClr val="0B3C49">
                 <a:alpha val="12000"/>
               </a:srgbClr>
@@ -16521,7 +16182,7 @@
           <a:bodyPr wrap="square" lIns="0" tIns="0" rIns="0" bIns="0" rtlCol="0" anchor="ctr"/>
           <a:lstStyle/>
           <a:p>
-            <a:pPr indent="0" marL="0">
+            <a:pPr marL="0" indent="0">
               <a:buNone/>
             </a:pPr>
             <a:r>
@@ -16560,7 +16221,7 @@
           <a:bodyPr wrap="square" lIns="0" tIns="0" rIns="0" bIns="0" rtlCol="0" anchor="t"/>
           <a:lstStyle/>
           <a:p>
-            <a:pPr indent="0" marL="0">
+            <a:pPr marL="0" indent="0">
               <a:lnSpc>
                 <a:spcPct val="105000"/>
               </a:lnSpc>
@@ -16602,7 +16263,7 @@
           <a:bodyPr wrap="square" lIns="0" tIns="0" rIns="0" bIns="0" rtlCol="0" anchor="ctr"/>
           <a:lstStyle/>
           <a:p>
-            <a:pPr algn="r" indent="0" marL="0">
+            <a:pPr marL="0" indent="0" algn="r">
               <a:buNone/>
             </a:pPr>
             <a:r>
@@ -16636,6 +16297,7 @@
         <a:solidFill>
           <a:srgbClr val="F2F7F7"/>
         </a:solidFill>
+        <a:effectLst/>
       </p:bgPr>
     </p:bg>
     <p:spTree>
@@ -16693,11 +16355,11 @@
           <a:bodyPr wrap="square" lIns="0" tIns="0" rIns="0" bIns="0" rtlCol="0" anchor="ctr"/>
           <a:lstStyle/>
           <a:p>
-            <a:pPr indent="0" marL="0">
-              <a:buNone/>
-            </a:pPr>
-            <a:r>
-              <a:rPr lang="en-US" sz="1200" b="1" spc="300" kern="0" dirty="0">
+            <a:pPr marL="0" indent="0">
+              <a:buNone/>
+            </a:pPr>
+            <a:r>
+              <a:rPr lang="en-US" sz="1200" b="1" kern="0" spc="300" dirty="0">
                 <a:solidFill>
                   <a:srgbClr val="028090"/>
                 </a:solidFill>
@@ -16732,7 +16394,7 @@
           <a:bodyPr wrap="square" lIns="0" tIns="0" rIns="0" bIns="0" rtlCol="0" anchor="ctr"/>
           <a:lstStyle/>
           <a:p>
-            <a:pPr indent="0" marL="0">
+            <a:pPr marL="0" indent="0">
               <a:buNone/>
             </a:pPr>
             <a:r>
@@ -16774,7 +16436,7 @@
             <a:prstDash val="solid"/>
           </a:ln>
           <a:effectLst>
-            <a:outerShdw sx="100000" sy="100000" kx="0" ky="0" algn="bl" rotWithShape="0" blurRad="114300" dist="38100" dir="8100000">
+            <a:outerShdw blurRad="114300" dist="38100" dir="8100000" algn="bl" rotWithShape="0">
               <a:srgbClr val="0B3C49">
                 <a:alpha val="12000"/>
               </a:srgbClr>
@@ -16784,15 +16446,15 @@
       </p:sp>
       <p:pic>
         <p:nvPicPr>
-          <p:cNvPr id="6" name="Image 0" descr="D:/YJ-Agent/project/meeting/QuantImmuBench/analysis/figures/fig7_5tools_spearman.png">    </p:cNvPr>
+          <p:cNvPr id="6" name="Image 0" descr="D:/YJ-Agent/project/meeting/QuantImmuBench/analysis/figures/fig7_5tools_spearman.png"/>
           <p:cNvPicPr>
             <a:picLocks noChangeAspect="1"/>
           </p:cNvPicPr>
           <p:nvPr/>
         </p:nvPicPr>
         <p:blipFill>
-          <a:blip r:embed="rId1"/>
-          <a:srcRect l="0" r="0" t="0" b="0"/>
+          <a:blip r:embed="rId3"/>
+          <a:srcRect/>
           <a:stretch/>
         </p:blipFill>
         <p:spPr>
@@ -16813,7 +16475,7 @@
         </p:nvSpPr>
         <p:spPr>
           <a:xfrm>
-            <a:off x="566928" y="6053328"/>
+            <a:off x="566928" y="6355080"/>
             <a:ext cx="6400800" cy="365760"/>
           </a:xfrm>
           <a:prstGeom prst="rect">
@@ -16826,7 +16488,7 @@
           <a:bodyPr wrap="square" lIns="0" tIns="0" rIns="0" bIns="0" rtlCol="0" anchor="t"/>
           <a:lstStyle/>
           <a:p>
-            <a:pPr indent="0" marL="0">
+            <a:pPr marL="0" indent="0">
               <a:buNone/>
             </a:pPr>
             <a:r>
@@ -16863,7 +16525,7 @@
           </a:solidFill>
           <a:ln/>
           <a:effectLst>
-            <a:outerShdw sx="100000" sy="100000" kx="0" ky="0" algn="bl" rotWithShape="0" blurRad="114300" dist="38100" dir="8100000">
+            <a:outerShdw blurRad="114300" dist="38100" dir="8100000" algn="bl" rotWithShape="0">
               <a:srgbClr val="0B3C49">
                 <a:alpha val="12000"/>
               </a:srgbClr>
@@ -16892,7 +16554,7 @@
           <a:bodyPr wrap="square" lIns="0" tIns="0" rIns="0" bIns="0" rtlCol="0" anchor="ctr"/>
           <a:lstStyle/>
           <a:p>
-            <a:pPr indent="0" marL="0">
+            <a:pPr marL="0" indent="0">
               <a:buNone/>
             </a:pPr>
             <a:r>
@@ -16931,7 +16593,7 @@
           <a:bodyPr wrap="square" lIns="0" tIns="0" rIns="0" bIns="0" rtlCol="0" anchor="t"/>
           <a:lstStyle/>
           <a:p>
-            <a:pPr indent="0" marL="0">
+            <a:pPr marL="0" indent="0">
               <a:lnSpc>
                 <a:spcPct val="108000"/>
               </a:lnSpc>
@@ -16954,7 +16616,7 @@
             <a:endParaRPr lang="en-US" sz="1100" dirty="0"/>
           </a:p>
           <a:p>
-            <a:pPr indent="0" marL="0">
+            <a:pPr marL="0" indent="0">
               <a:lnSpc>
                 <a:spcPct val="108000"/>
               </a:lnSpc>
@@ -16977,7 +16639,7 @@
             <a:endParaRPr lang="en-US" sz="1100" dirty="0"/>
           </a:p>
           <a:p>
-            <a:pPr indent="0" marL="0">
+            <a:pPr marL="0" indent="0">
               <a:lnSpc>
                 <a:spcPct val="108000"/>
               </a:lnSpc>
@@ -17044,7 +16706,7 @@
           <a:bodyPr wrap="square" lIns="0" tIns="0" rIns="0" bIns="0" rtlCol="0" anchor="ctr"/>
           <a:lstStyle/>
           <a:p>
-            <a:pPr indent="0" marL="0">
+            <a:pPr marL="0" indent="0">
               <a:buNone/>
             </a:pPr>
             <a:r>
@@ -17083,7 +16745,7 @@
           <a:bodyPr wrap="square" lIns="0" tIns="0" rIns="0" bIns="0" rtlCol="0" anchor="t"/>
           <a:lstStyle/>
           <a:p>
-            <a:pPr indent="0" marL="0">
+            <a:pPr marL="0" indent="0">
               <a:lnSpc>
                 <a:spcPct val="105000"/>
               </a:lnSpc>
@@ -17106,7 +16768,7 @@
             <a:endParaRPr lang="en-US" sz="1050" dirty="0"/>
           </a:p>
           <a:p>
-            <a:pPr indent="0" marL="0">
+            <a:pPr marL="0" indent="0">
               <a:lnSpc>
                 <a:spcPct val="105000"/>
               </a:lnSpc>
@@ -17148,7 +16810,7 @@
           <a:bodyPr wrap="square" lIns="0" tIns="0" rIns="0" bIns="0" rtlCol="0" anchor="ctr"/>
           <a:lstStyle/>
           <a:p>
-            <a:pPr algn="r" indent="0" marL="0">
+            <a:pPr marL="0" indent="0" algn="r">
               <a:buNone/>
             </a:pPr>
             <a:r>
@@ -17182,6 +16844,7 @@
         <a:solidFill>
           <a:srgbClr val="F2F7F7"/>
         </a:solidFill>
+        <a:effectLst/>
       </p:bgPr>
     </p:bg>
     <p:spTree>
@@ -17239,11 +16902,11 @@
           <a:bodyPr wrap="square" lIns="0" tIns="0" rIns="0" bIns="0" rtlCol="0" anchor="ctr"/>
           <a:lstStyle/>
           <a:p>
-            <a:pPr indent="0" marL="0">
-              <a:buNone/>
-            </a:pPr>
-            <a:r>
-              <a:rPr lang="en-US" sz="1200" b="1" spc="300" kern="0" dirty="0">
+            <a:pPr marL="0" indent="0">
+              <a:buNone/>
+            </a:pPr>
+            <a:r>
+              <a:rPr lang="en-US" sz="1200" b="1" kern="0" spc="300" dirty="0">
                 <a:solidFill>
                   <a:srgbClr val="028090"/>
                 </a:solidFill>
@@ -17278,7 +16941,7 @@
           <a:bodyPr wrap="square" lIns="0" tIns="0" rIns="0" bIns="0" rtlCol="0" anchor="ctr"/>
           <a:lstStyle/>
           <a:p>
-            <a:pPr indent="0" marL="0">
+            <a:pPr marL="0" indent="0">
               <a:buNone/>
             </a:pPr>
             <a:r>
@@ -17320,7 +16983,7 @@
             <a:prstDash val="solid"/>
           </a:ln>
           <a:effectLst>
-            <a:outerShdw sx="100000" sy="100000" kx="0" ky="0" algn="bl" rotWithShape="0" blurRad="114300" dist="38100" dir="8100000">
+            <a:outerShdw blurRad="114300" dist="38100" dir="8100000" algn="bl" rotWithShape="0">
               <a:srgbClr val="0B3C49">
                 <a:alpha val="12000"/>
               </a:srgbClr>
@@ -17330,15 +16993,15 @@
       </p:sp>
       <p:pic>
         <p:nvPicPr>
-          <p:cNvPr id="6" name="Image 0" descr="D:/YJ-Agent/project/meeting/QuantImmuBench/analysis/figures/fig_corr_heatmap_5tools.png">    </p:cNvPr>
+          <p:cNvPr id="6" name="Image 0" descr="D:/YJ-Agent/project/meeting/QuantImmuBench/analysis/figures/fig_corr_heatmap_5tools.png"/>
           <p:cNvPicPr>
             <a:picLocks noChangeAspect="1"/>
           </p:cNvPicPr>
           <p:nvPr/>
         </p:nvPicPr>
         <p:blipFill>
-          <a:blip r:embed="rId1"/>
-          <a:srcRect l="0" r="0" t="0" b="0"/>
+          <a:blip r:embed="rId3"/>
+          <a:srcRect/>
           <a:stretch/>
         </p:blipFill>
         <p:spPr>
@@ -17359,8 +17022,8 @@
         </p:nvSpPr>
         <p:spPr>
           <a:xfrm>
-            <a:off x="566928" y="6053328"/>
-            <a:ext cx="6400800" cy="365760"/>
+            <a:off x="548640" y="6350942"/>
+            <a:ext cx="6748272" cy="365760"/>
           </a:xfrm>
           <a:prstGeom prst="rect">
             <a:avLst/>
@@ -17372,7 +17035,7 @@
           <a:bodyPr wrap="square" lIns="0" tIns="0" rIns="0" bIns="0" rtlCol="0" anchor="t"/>
           <a:lstStyle/>
           <a:p>
-            <a:pPr indent="0" marL="0">
+            <a:pPr marL="0" indent="0">
               <a:buNone/>
             </a:pPr>
             <a:r>
@@ -17414,7 +17077,7 @@
             <a:prstDash val="solid"/>
           </a:ln>
           <a:effectLst>
-            <a:outerShdw sx="100000" sy="100000" kx="0" ky="0" algn="bl" rotWithShape="0" blurRad="114300" dist="38100" dir="8100000">
+            <a:outerShdw blurRad="114300" dist="38100" dir="8100000" algn="bl" rotWithShape="0">
               <a:srgbClr val="0B3C49">
                 <a:alpha val="12000"/>
               </a:srgbClr>
@@ -17463,7 +17126,7 @@
           <a:bodyPr wrap="square" lIns="0" tIns="0" rIns="0" bIns="0" rtlCol="0" anchor="ctr"/>
           <a:lstStyle/>
           <a:p>
-            <a:pPr indent="0" marL="0">
+            <a:pPr marL="0" indent="0">
               <a:buNone/>
             </a:pPr>
             <a:r>
@@ -17502,7 +17165,7 @@
           <a:bodyPr wrap="square" lIns="0" tIns="0" rIns="0" bIns="0" rtlCol="0" anchor="t"/>
           <a:lstStyle/>
           <a:p>
-            <a:pPr indent="0" marL="0">
+            <a:pPr marL="0" indent="0">
               <a:lnSpc>
                 <a:spcPct val="105000"/>
               </a:lnSpc>
@@ -17547,7 +17210,7 @@
             <a:prstDash val="solid"/>
           </a:ln>
           <a:effectLst>
-            <a:outerShdw sx="100000" sy="100000" kx="0" ky="0" algn="bl" rotWithShape="0" blurRad="114300" dist="38100" dir="8100000">
+            <a:outerShdw blurRad="114300" dist="38100" dir="8100000" algn="bl" rotWithShape="0">
               <a:srgbClr val="0B3C49">
                 <a:alpha val="12000"/>
               </a:srgbClr>
@@ -17596,7 +17259,7 @@
           <a:bodyPr wrap="square" lIns="0" tIns="0" rIns="0" bIns="0" rtlCol="0" anchor="ctr"/>
           <a:lstStyle/>
           <a:p>
-            <a:pPr indent="0" marL="0">
+            <a:pPr marL="0" indent="0">
               <a:buNone/>
             </a:pPr>
             <a:r>
@@ -17635,7 +17298,7 @@
           <a:bodyPr wrap="square" lIns="0" tIns="0" rIns="0" bIns="0" rtlCol="0" anchor="t"/>
           <a:lstStyle/>
           <a:p>
-            <a:pPr indent="0" marL="0">
+            <a:pPr marL="0" indent="0">
               <a:lnSpc>
                 <a:spcPct val="105000"/>
               </a:lnSpc>
@@ -17680,7 +17343,7 @@
             <a:prstDash val="solid"/>
           </a:ln>
           <a:effectLst>
-            <a:outerShdw sx="100000" sy="100000" kx="0" ky="0" algn="bl" rotWithShape="0" blurRad="114300" dist="38100" dir="8100000">
+            <a:outerShdw blurRad="114300" dist="38100" dir="8100000" algn="bl" rotWithShape="0">
               <a:srgbClr val="0B3C49">
                 <a:alpha val="12000"/>
               </a:srgbClr>
@@ -17729,7 +17392,7 @@
           <a:bodyPr wrap="square" lIns="0" tIns="0" rIns="0" bIns="0" rtlCol="0" anchor="ctr"/>
           <a:lstStyle/>
           <a:p>
-            <a:pPr indent="0" marL="0">
+            <a:pPr marL="0" indent="0">
               <a:buNone/>
             </a:pPr>
             <a:r>
@@ -17768,7 +17431,7 @@
           <a:bodyPr wrap="square" lIns="0" tIns="0" rIns="0" bIns="0" rtlCol="0" anchor="t"/>
           <a:lstStyle/>
           <a:p>
-            <a:pPr indent="0" marL="0">
+            <a:pPr marL="0" indent="0">
               <a:lnSpc>
                 <a:spcPct val="105000"/>
               </a:lnSpc>
@@ -17810,7 +17473,7 @@
           <a:bodyPr wrap="square" lIns="0" tIns="0" rIns="0" bIns="0" rtlCol="0" anchor="ctr"/>
           <a:lstStyle/>
           <a:p>
-            <a:pPr algn="r" indent="0" marL="0">
+            <a:pPr marL="0" indent="0" algn="r">
               <a:buNone/>
             </a:pPr>
             <a:r>
@@ -17844,6 +17507,7 @@
         <a:solidFill>
           <a:srgbClr val="F2F7F7"/>
         </a:solidFill>
+        <a:effectLst/>
       </p:bgPr>
     </p:bg>
     <p:spTree>
@@ -17901,11 +17565,11 @@
           <a:bodyPr wrap="square" lIns="0" tIns="0" rIns="0" bIns="0" rtlCol="0" anchor="ctr"/>
           <a:lstStyle/>
           <a:p>
-            <a:pPr indent="0" marL="0">
-              <a:buNone/>
-            </a:pPr>
-            <a:r>
-              <a:rPr lang="en-US" sz="1200" b="1" spc="300" kern="0" dirty="0">
+            <a:pPr marL="0" indent="0">
+              <a:buNone/>
+            </a:pPr>
+            <a:r>
+              <a:rPr lang="en-US" sz="1200" b="1" kern="0" spc="300" dirty="0">
                 <a:solidFill>
                   <a:srgbClr val="C9743D"/>
                 </a:solidFill>
@@ -17940,7 +17604,7 @@
           <a:bodyPr wrap="square" lIns="0" tIns="0" rIns="0" bIns="0" rtlCol="0" anchor="ctr"/>
           <a:lstStyle/>
           <a:p>
-            <a:pPr indent="0" marL="0">
+            <a:pPr marL="0" indent="0">
               <a:buNone/>
             </a:pPr>
             <a:r>
@@ -17982,7 +17646,7 @@
             <a:prstDash val="solid"/>
           </a:ln>
           <a:effectLst>
-            <a:outerShdw sx="100000" sy="100000" kx="0" ky="0" algn="bl" rotWithShape="0" blurRad="114300" dist="38100" dir="8100000">
+            <a:outerShdw blurRad="114300" dist="38100" dir="8100000" algn="bl" rotWithShape="0">
               <a:srgbClr val="0B3C49">
                 <a:alpha val="12000"/>
               </a:srgbClr>
@@ -18031,7 +17695,7 @@
           <a:bodyPr wrap="square" lIns="0" tIns="0" rIns="0" bIns="0" rtlCol="0" anchor="t"/>
           <a:lstStyle/>
           <a:p>
-            <a:pPr indent="0" marL="0">
+            <a:pPr marL="0" indent="0">
               <a:buNone/>
             </a:pPr>
             <a:r>
@@ -18070,7 +17734,7 @@
           <a:bodyPr wrap="square" lIns="0" tIns="0" rIns="0" bIns="0" rtlCol="0" anchor="ctr"/>
           <a:lstStyle/>
           <a:p>
-            <a:pPr indent="0" marL="0">
+            <a:pPr marL="0" indent="0">
               <a:lnSpc>
                 <a:spcPct val="104000"/>
               </a:lnSpc>
@@ -18115,7 +17779,7 @@
             <a:prstDash val="solid"/>
           </a:ln>
           <a:effectLst>
-            <a:outerShdw sx="100000" sy="100000" kx="0" ky="0" algn="bl" rotWithShape="0" blurRad="114300" dist="38100" dir="8100000">
+            <a:outerShdw blurRad="114300" dist="38100" dir="8100000" algn="bl" rotWithShape="0">
               <a:srgbClr val="0B3C49">
                 <a:alpha val="12000"/>
               </a:srgbClr>
@@ -18164,7 +17828,7 @@
           <a:bodyPr wrap="square" lIns="0" tIns="0" rIns="0" bIns="0" rtlCol="0" anchor="t"/>
           <a:lstStyle/>
           <a:p>
-            <a:pPr indent="0" marL="0">
+            <a:pPr marL="0" indent="0">
               <a:buNone/>
             </a:pPr>
             <a:r>
@@ -18203,7 +17867,7 @@
           <a:bodyPr wrap="square" lIns="0" tIns="0" rIns="0" bIns="0" rtlCol="0" anchor="ctr"/>
           <a:lstStyle/>
           <a:p>
-            <a:pPr indent="0" marL="0">
+            <a:pPr marL="0" indent="0">
               <a:lnSpc>
                 <a:spcPct val="104000"/>
               </a:lnSpc>
@@ -18248,7 +17912,7 @@
             <a:prstDash val="solid"/>
           </a:ln>
           <a:effectLst>
-            <a:outerShdw sx="100000" sy="100000" kx="0" ky="0" algn="bl" rotWithShape="0" blurRad="114300" dist="38100" dir="8100000">
+            <a:outerShdw blurRad="114300" dist="38100" dir="8100000" algn="bl" rotWithShape="0">
               <a:srgbClr val="0B3C49">
                 <a:alpha val="12000"/>
               </a:srgbClr>
@@ -18297,7 +17961,7 @@
           <a:bodyPr wrap="square" lIns="0" tIns="0" rIns="0" bIns="0" rtlCol="0" anchor="t"/>
           <a:lstStyle/>
           <a:p>
-            <a:pPr indent="0" marL="0">
+            <a:pPr marL="0" indent="0">
               <a:buNone/>
             </a:pPr>
             <a:r>
@@ -18336,7 +18000,7 @@
           <a:bodyPr wrap="square" lIns="0" tIns="0" rIns="0" bIns="0" rtlCol="0" anchor="ctr"/>
           <a:lstStyle/>
           <a:p>
-            <a:pPr indent="0" marL="0">
+            <a:pPr marL="0" indent="0">
               <a:lnSpc>
                 <a:spcPct val="104000"/>
               </a:lnSpc>
@@ -18381,7 +18045,7 @@
             <a:prstDash val="solid"/>
           </a:ln>
           <a:effectLst>
-            <a:outerShdw sx="100000" sy="100000" kx="0" ky="0" algn="bl" rotWithShape="0" blurRad="114300" dist="38100" dir="8100000">
+            <a:outerShdw blurRad="114300" dist="38100" dir="8100000" algn="bl" rotWithShape="0">
               <a:srgbClr val="0B3C49">
                 <a:alpha val="12000"/>
               </a:srgbClr>
@@ -18430,7 +18094,7 @@
           <a:bodyPr wrap="square" lIns="0" tIns="0" rIns="0" bIns="0" rtlCol="0" anchor="t"/>
           <a:lstStyle/>
           <a:p>
-            <a:pPr indent="0" marL="0">
+            <a:pPr marL="0" indent="0">
               <a:buNone/>
             </a:pPr>
             <a:r>
@@ -18469,7 +18133,7 @@
           <a:bodyPr wrap="square" lIns="0" tIns="0" rIns="0" bIns="0" rtlCol="0" anchor="ctr"/>
           <a:lstStyle/>
           <a:p>
-            <a:pPr indent="0" marL="0">
+            <a:pPr marL="0" indent="0">
               <a:lnSpc>
                 <a:spcPct val="104000"/>
               </a:lnSpc>
@@ -18509,7 +18173,7 @@
           </a:solidFill>
           <a:ln/>
           <a:effectLst>
-            <a:outerShdw sx="100000" sy="100000" kx="0" ky="0" algn="bl" rotWithShape="0" blurRad="114300" dist="38100" dir="8100000">
+            <a:outerShdw blurRad="114300" dist="38100" dir="8100000" algn="bl" rotWithShape="0">
               <a:srgbClr val="0B3C49">
                 <a:alpha val="12000"/>
               </a:srgbClr>
@@ -18538,7 +18202,7 @@
           <a:bodyPr wrap="square" lIns="0" tIns="0" rIns="0" bIns="0" rtlCol="0" anchor="ctr"/>
           <a:lstStyle/>
           <a:p>
-            <a:pPr indent="0" marL="0">
+            <a:pPr marL="0" indent="0">
               <a:buNone/>
             </a:pPr>
             <a:r>
@@ -18577,7 +18241,7 @@
           <a:bodyPr wrap="square" lIns="0" tIns="0" rIns="0" bIns="0" rtlCol="0" anchor="t"/>
           <a:lstStyle/>
           <a:p>
-            <a:pPr indent="0" marL="0">
+            <a:pPr marL="0" indent="0">
               <a:lnSpc>
                 <a:spcPct val="105000"/>
               </a:lnSpc>
@@ -18597,7 +18261,7 @@
             <a:endParaRPr lang="en-US" sz="1250" dirty="0"/>
           </a:p>
           <a:p>
-            <a:pPr indent="0" marL="0">
+            <a:pPr marL="0" indent="0">
               <a:lnSpc>
                 <a:spcPct val="105000"/>
               </a:lnSpc>
@@ -18620,7 +18284,7 @@
             <a:endParaRPr lang="en-US" sz="1250" dirty="0"/>
           </a:p>
           <a:p>
-            <a:pPr indent="0" marL="0">
+            <a:pPr marL="0" indent="0">
               <a:lnSpc>
                 <a:spcPct val="105000"/>
               </a:lnSpc>
@@ -18640,7 +18304,7 @@
             <a:endParaRPr lang="en-US" sz="1250" dirty="0"/>
           </a:p>
           <a:p>
-            <a:pPr indent="0" marL="0">
+            <a:pPr marL="0" indent="0">
               <a:lnSpc>
                 <a:spcPct val="105000"/>
               </a:lnSpc>
@@ -18682,7 +18346,7 @@
           <a:bodyPr wrap="square" lIns="0" tIns="0" rIns="0" bIns="0" rtlCol="0" anchor="ctr"/>
           <a:lstStyle/>
           <a:p>
-            <a:pPr algn="r" indent="0" marL="0">
+            <a:pPr marL="0" indent="0" algn="r">
               <a:buNone/>
             </a:pPr>
             <a:r>
@@ -18716,6 +18380,7 @@
         <a:solidFill>
           <a:srgbClr val="F2F7F7"/>
         </a:solidFill>
+        <a:effectLst/>
       </p:bgPr>
     </p:bg>
     <p:spTree>
@@ -18773,11 +18438,11 @@
           <a:bodyPr wrap="square" lIns="0" tIns="0" rIns="0" bIns="0" rtlCol="0" anchor="ctr"/>
           <a:lstStyle/>
           <a:p>
-            <a:pPr indent="0" marL="0">
-              <a:buNone/>
-            </a:pPr>
-            <a:r>
-              <a:rPr lang="en-US" sz="1200" b="1" spc="300" kern="0" dirty="0">
+            <a:pPr marL="0" indent="0">
+              <a:buNone/>
+            </a:pPr>
+            <a:r>
+              <a:rPr lang="en-US" sz="1200" b="1" kern="0" spc="300" dirty="0">
                 <a:solidFill>
                   <a:srgbClr val="028090"/>
                 </a:solidFill>
@@ -18812,7 +18477,7 @@
           <a:bodyPr wrap="square" lIns="0" tIns="0" rIns="0" bIns="0" rtlCol="0" anchor="ctr"/>
           <a:lstStyle/>
           <a:p>
-            <a:pPr indent="0" marL="0">
+            <a:pPr marL="0" indent="0">
               <a:buNone/>
             </a:pPr>
             <a:r>
@@ -18846,17 +18511,41 @@
         </p:nvGraphicFramePr>
         <p:xfrm>
           <a:off x="640080" y="1691640"/>
-          <a:ext cx="10927080" cy="914400"/>
+          <a:ext cx="10927080" cy="3200400"/>
         </p:xfrm>
         <a:graphic>
           <a:graphicData uri="http://schemas.openxmlformats.org/drawingml/2006/table">
             <a:tbl>
               <a:tblPr/>
               <a:tblGrid>
-                <a:gridCol w="1874520"/>
-                <a:gridCol w="2834640"/>
-                <a:gridCol w="2606040"/>
-                <a:gridCol w="3611880"/>
+                <a:gridCol w="1874520">
+                  <a:extLst>
+                    <a:ext uri="{9D8B030D-6E8A-4147-A177-3AD203B41FA5}">
+                      <a16:colId xmlns:a16="http://schemas.microsoft.com/office/drawing/2014/main" val="20000"/>
+                    </a:ext>
+                  </a:extLst>
+                </a:gridCol>
+                <a:gridCol w="2834640">
+                  <a:extLst>
+                    <a:ext uri="{9D8B030D-6E8A-4147-A177-3AD203B41FA5}">
+                      <a16:colId xmlns:a16="http://schemas.microsoft.com/office/drawing/2014/main" val="20001"/>
+                    </a:ext>
+                  </a:extLst>
+                </a:gridCol>
+                <a:gridCol w="2606040">
+                  <a:extLst>
+                    <a:ext uri="{9D8B030D-6E8A-4147-A177-3AD203B41FA5}">
+                      <a16:colId xmlns:a16="http://schemas.microsoft.com/office/drawing/2014/main" val="20002"/>
+                    </a:ext>
+                  </a:extLst>
+                </a:gridCol>
+                <a:gridCol w="3611880">
+                  <a:extLst>
+                    <a:ext uri="{9D8B030D-6E8A-4147-A177-3AD203B41FA5}">
+                      <a16:colId xmlns:a16="http://schemas.microsoft.com/office/drawing/2014/main" val="20003"/>
+                    </a:ext>
+                  </a:extLst>
+                </a:gridCol>
               </a:tblGrid>
               <a:tr h="457200">
                 <a:tc>
@@ -18864,7 +18553,7 @@
                     <a:bodyPr/>
                     <a:lstStyle/>
                     <a:p>
-                      <a:pPr algn="l" indent="0" marL="0">
+                      <a:pPr marL="0" indent="0" algn="l">
                         <a:buNone/>
                       </a:pPr>
                       <a:r>
@@ -18932,7 +18621,7 @@
                     <a:bodyPr/>
                     <a:lstStyle/>
                     <a:p>
-                      <a:pPr algn="l" indent="0" marL="0">
+                      <a:pPr marL="0" indent="0" algn="l">
                         <a:buNone/>
                       </a:pPr>
                       <a:r>
@@ -19000,7 +18689,7 @@
                     <a:bodyPr/>
                     <a:lstStyle/>
                     <a:p>
-                      <a:pPr algn="l" indent="0" marL="0">
+                      <a:pPr marL="0" indent="0" algn="l">
                         <a:buNone/>
                       </a:pPr>
                       <a:r>
@@ -19068,7 +18757,7 @@
                     <a:bodyPr/>
                     <a:lstStyle/>
                     <a:p>
-                      <a:pPr algn="l" indent="0" marL="0">
+                      <a:pPr marL="0" indent="0" algn="l">
                         <a:buNone/>
                       </a:pPr>
                       <a:r>
@@ -19131,6 +18820,11 @@
                     </a:solidFill>
                   </a:tcPr>
                 </a:tc>
+                <a:extLst>
+                  <a:ext uri="{0D108BD9-81ED-4DB2-BD59-A6C34878D82A}">
+                    <a16:rowId xmlns:a16="http://schemas.microsoft.com/office/drawing/2014/main" val="10000"/>
+                  </a:ext>
+                </a:extLst>
               </a:tr>
               <a:tr h="548640">
                 <a:tc>
@@ -19138,7 +18832,7 @@
                     <a:bodyPr/>
                     <a:lstStyle/>
                     <a:p>
-                      <a:pPr algn="l" indent="0" marL="0">
+                      <a:pPr marL="0" indent="0" algn="l">
                         <a:buNone/>
                       </a:pPr>
                       <a:r>
@@ -19206,7 +18900,7 @@
                     <a:bodyPr/>
                     <a:lstStyle/>
                     <a:p>
-                      <a:pPr algn="l" indent="0" marL="0">
+                      <a:pPr marL="0" indent="0" algn="l">
                         <a:buNone/>
                       </a:pPr>
                       <a:r>
@@ -19274,7 +18968,7 @@
                     <a:bodyPr/>
                     <a:lstStyle/>
                     <a:p>
-                      <a:pPr algn="l" indent="0" marL="0">
+                      <a:pPr marL="0" indent="0" algn="l">
                         <a:buNone/>
                       </a:pPr>
                       <a:r>
@@ -19285,7 +18979,7 @@
                           <a:latin typeface="Microsoft YaHei" pitchFamily="34" charset="0"/>
                           <a:ea typeface="Microsoft YaHei" pitchFamily="34" charset="-122"/>
                           <a:cs typeface="Microsoft YaHei" pitchFamily="34" charset="-120"/>
-                          <a:hlinkClick r:id="rId1" invalidUrl="" action="" tgtFrame="" tooltip="https://doi.org/10.1093/bib/bbab160" history="1" highlightClick="0" endSnd="0">
+                          <a:hlinkClick r:id="rId3" tooltip="https://doi.org/10.1093/bib/bbab160">
                             <a:extLst>
                               <a:ext uri="{A12FA001-AC4F-418D-AE19-62706E023703}">
                                 <ahyp:hlinkClr xmlns:ahyp="http://schemas.microsoft.com/office/drawing/2018/hyperlinkcolor" val="tx"/>
@@ -19349,7 +19043,7 @@
                     <a:bodyPr/>
                     <a:lstStyle/>
                     <a:p>
-                      <a:pPr algn="l" indent="0" marL="0">
+                      <a:pPr marL="0" indent="0" algn="l">
                         <a:buNone/>
                       </a:pPr>
                       <a:r>
@@ -19360,7 +19054,7 @@
                           <a:latin typeface="Microsoft YaHei" pitchFamily="34" charset="0"/>
                           <a:ea typeface="Microsoft YaHei" pitchFamily="34" charset="-122"/>
                           <a:cs typeface="Microsoft YaHei" pitchFamily="34" charset="-120"/>
-                          <a:hlinkClick r:id="rId2" invalidUrl="" action="" tgtFrame="" tooltip="https://github.com/frankligy/DeepImmuno" history="1" highlightClick="0" endSnd="0">
+                          <a:hlinkClick r:id="rId4" tooltip="https://github.com/frankligy/DeepImmuno">
                             <a:extLst>
                               <a:ext uri="{A12FA001-AC4F-418D-AE19-62706E023703}">
                                 <ahyp:hlinkClr xmlns:ahyp="http://schemas.microsoft.com/office/drawing/2018/hyperlinkcolor" val="tx"/>
@@ -19419,6 +19113,11 @@
                     </a:solidFill>
                   </a:tcPr>
                 </a:tc>
+                <a:extLst>
+                  <a:ext uri="{0D108BD9-81ED-4DB2-BD59-A6C34878D82A}">
+                    <a16:rowId xmlns:a16="http://schemas.microsoft.com/office/drawing/2014/main" val="10001"/>
+                  </a:ext>
+                </a:extLst>
               </a:tr>
               <a:tr h="548640">
                 <a:tc>
@@ -19426,7 +19125,7 @@
                     <a:bodyPr/>
                     <a:lstStyle/>
                     <a:p>
-                      <a:pPr algn="l" indent="0" marL="0">
+                      <a:pPr marL="0" indent="0" algn="l">
                         <a:buNone/>
                       </a:pPr>
                       <a:r>
@@ -19494,7 +19193,7 @@
                     <a:bodyPr/>
                     <a:lstStyle/>
                     <a:p>
-                      <a:pPr algn="l" indent="0" marL="0">
+                      <a:pPr marL="0" indent="0" algn="l">
                         <a:buNone/>
                       </a:pPr>
                       <a:r>
@@ -19562,7 +19261,7 @@
                     <a:bodyPr/>
                     <a:lstStyle/>
                     <a:p>
-                      <a:pPr algn="l" indent="0" marL="0">
+                      <a:pPr marL="0" indent="0" algn="l">
                         <a:buNone/>
                       </a:pPr>
                       <a:r>
@@ -19573,7 +19272,7 @@
                           <a:latin typeface="Microsoft YaHei" pitchFamily="34" charset="0"/>
                           <a:ea typeface="Microsoft YaHei" pitchFamily="34" charset="-122"/>
                           <a:cs typeface="Microsoft YaHei" pitchFamily="34" charset="-120"/>
-                          <a:hlinkClick r:id="rId3" invalidUrl="" action="" tgtFrame="" tooltip="https://doi.org/10.1186/s13073-025-01569-8" history="1" highlightClick="0" endSnd="0">
+                          <a:hlinkClick r:id="rId5" tooltip="https://doi.org/10.1186/s13073-025-01569-8">
                             <a:extLst>
                               <a:ext uri="{A12FA001-AC4F-418D-AE19-62706E023703}">
                                 <ahyp:hlinkClr xmlns:ahyp="http://schemas.microsoft.com/office/drawing/2018/hyperlinkcolor" val="tx"/>
@@ -19637,7 +19336,7 @@
                     <a:bodyPr/>
                     <a:lstStyle/>
                     <a:p>
-                      <a:pPr algn="l" indent="0" marL="0">
+                      <a:pPr marL="0" indent="0" algn="l">
                         <a:buNone/>
                       </a:pPr>
                       <a:r>
@@ -19648,7 +19347,7 @@
                           <a:latin typeface="Microsoft YaHei" pitchFamily="34" charset="0"/>
                           <a:ea typeface="Microsoft YaHei" pitchFamily="34" charset="-122"/>
                           <a:cs typeface="Microsoft YaHei" pitchFamily="34" charset="-120"/>
-                          <a:hlinkClick r:id="rId4" invalidUrl="" action="" tgtFrame="" tooltip="https://github.com/BSC-CNS-EAPM/PredIG" history="1" highlightClick="0" endSnd="0">
+                          <a:hlinkClick r:id="rId6" tooltip="https://github.com/BSC-CNS-EAPM/PredIG">
                             <a:extLst>
                               <a:ext uri="{A12FA001-AC4F-418D-AE19-62706E023703}">
                                 <ahyp:hlinkClr xmlns:ahyp="http://schemas.microsoft.com/office/drawing/2018/hyperlinkcolor" val="tx"/>
@@ -19707,6 +19406,11 @@
                     </a:solidFill>
                   </a:tcPr>
                 </a:tc>
+                <a:extLst>
+                  <a:ext uri="{0D108BD9-81ED-4DB2-BD59-A6C34878D82A}">
+                    <a16:rowId xmlns:a16="http://schemas.microsoft.com/office/drawing/2014/main" val="10002"/>
+                  </a:ext>
+                </a:extLst>
               </a:tr>
               <a:tr h="548640">
                 <a:tc>
@@ -19714,7 +19418,7 @@
                     <a:bodyPr/>
                     <a:lstStyle/>
                     <a:p>
-                      <a:pPr algn="l" indent="0" marL="0">
+                      <a:pPr marL="0" indent="0" algn="l">
                         <a:buNone/>
                       </a:pPr>
                       <a:r>
@@ -19782,7 +19486,7 @@
                     <a:bodyPr/>
                     <a:lstStyle/>
                     <a:p>
-                      <a:pPr algn="l" indent="0" marL="0">
+                      <a:pPr marL="0" indent="0" algn="l">
                         <a:buNone/>
                       </a:pPr>
                       <a:r>
@@ -19850,7 +19554,7 @@
                     <a:bodyPr/>
                     <a:lstStyle/>
                     <a:p>
-                      <a:pPr algn="l" indent="0" marL="0">
+                      <a:pPr marL="0" indent="0" algn="l">
                         <a:buNone/>
                       </a:pPr>
                       <a:r>
@@ -19861,7 +19565,7 @@
                           <a:latin typeface="Microsoft YaHei" pitchFamily="34" charset="0"/>
                           <a:ea typeface="Microsoft YaHei" pitchFamily="34" charset="-122"/>
                           <a:cs typeface="Microsoft YaHei" pitchFamily="34" charset="-120"/>
-                          <a:hlinkClick r:id="rId5" invalidUrl="" action="" tgtFrame="" tooltip="https://doi.org/10.1186/s13073-019-0679-x" history="1" highlightClick="0" endSnd="0">
+                          <a:hlinkClick r:id="rId7" tooltip="https://doi.org/10.1186/s13073-019-0679-x">
                             <a:extLst>
                               <a:ext uri="{A12FA001-AC4F-418D-AE19-62706E023703}">
                                 <ahyp:hlinkClr xmlns:ahyp="http://schemas.microsoft.com/office/drawing/2018/hyperlinkcolor" val="tx"/>
@@ -19925,7 +19629,7 @@
                     <a:bodyPr/>
                     <a:lstStyle/>
                     <a:p>
-                      <a:pPr algn="l" indent="0" marL="0">
+                      <a:pPr marL="0" indent="0" algn="l">
                         <a:buNone/>
                       </a:pPr>
                       <a:r>
@@ -19936,7 +19640,7 @@
                           <a:latin typeface="Microsoft YaHei" pitchFamily="34" charset="0"/>
                           <a:ea typeface="Microsoft YaHei" pitchFamily="34" charset="-122"/>
                           <a:cs typeface="Microsoft YaHei" pitchFamily="34" charset="-120"/>
-                          <a:hlinkClick r:id="rId6" invalidUrl="" action="" tgtFrame="" tooltip="https://github.com/bm2-lab/pTuneos" history="1" highlightClick="0" endSnd="0">
+                          <a:hlinkClick r:id="rId8" tooltip="https://github.com/bm2-lab/pTuneos">
                             <a:extLst>
                               <a:ext uri="{A12FA001-AC4F-418D-AE19-62706E023703}">
                                 <ahyp:hlinkClr xmlns:ahyp="http://schemas.microsoft.com/office/drawing/2018/hyperlinkcolor" val="tx"/>
@@ -19995,6 +19699,11 @@
                     </a:solidFill>
                   </a:tcPr>
                 </a:tc>
+                <a:extLst>
+                  <a:ext uri="{0D108BD9-81ED-4DB2-BD59-A6C34878D82A}">
+                    <a16:rowId xmlns:a16="http://schemas.microsoft.com/office/drawing/2014/main" val="10003"/>
+                  </a:ext>
+                </a:extLst>
               </a:tr>
               <a:tr h="548640">
                 <a:tc>
@@ -20002,7 +19711,7 @@
                     <a:bodyPr/>
                     <a:lstStyle/>
                     <a:p>
-                      <a:pPr algn="l" indent="0" marL="0">
+                      <a:pPr marL="0" indent="0" algn="l">
                         <a:buNone/>
                       </a:pPr>
                       <a:r>
@@ -20070,7 +19779,7 @@
                     <a:bodyPr/>
                     <a:lstStyle/>
                     <a:p>
-                      <a:pPr algn="l" indent="0" marL="0">
+                      <a:pPr marL="0" indent="0" algn="l">
                         <a:buNone/>
                       </a:pPr>
                       <a:r>
@@ -20138,7 +19847,7 @@
                     <a:bodyPr/>
                     <a:lstStyle/>
                     <a:p>
-                      <a:pPr algn="l" indent="0" marL="0">
+                      <a:pPr marL="0" indent="0" algn="l">
                         <a:buNone/>
                       </a:pPr>
                       <a:r>
@@ -20149,7 +19858,7 @@
                           <a:latin typeface="Microsoft YaHei" pitchFamily="34" charset="0"/>
                           <a:ea typeface="Microsoft YaHei" pitchFamily="34" charset="-122"/>
                           <a:cs typeface="Microsoft YaHei" pitchFamily="34" charset="-120"/>
-                          <a:hlinkClick r:id="rId7" invalidUrl="" action="" tgtFrame="" tooltip="https://doi.org/10.3389/fimmu.2024.1360281" history="1" highlightClick="0" endSnd="0">
+                          <a:hlinkClick r:id="rId9" tooltip="https://doi.org/10.3389/fimmu.2024.1360281">
                             <a:extLst>
                               <a:ext uri="{A12FA001-AC4F-418D-AE19-62706E023703}">
                                 <ahyp:hlinkClr xmlns:ahyp="http://schemas.microsoft.com/office/drawing/2018/hyperlinkcolor" val="tx"/>
@@ -20213,7 +19922,7 @@
                     <a:bodyPr/>
                     <a:lstStyle/>
                     <a:p>
-                      <a:pPr algn="l" indent="0" marL="0">
+                      <a:pPr marL="0" indent="0" algn="l">
                         <a:buNone/>
                       </a:pPr>
                       <a:r>
@@ -20224,7 +19933,7 @@
                           <a:latin typeface="Microsoft YaHei" pitchFamily="34" charset="0"/>
                           <a:ea typeface="Microsoft YaHei" pitchFamily="34" charset="-122"/>
                           <a:cs typeface="Microsoft YaHei" pitchFamily="34" charset="-120"/>
-                          <a:hlinkClick r:id="rId8" invalidUrl="" action="" tgtFrame="" tooltip="https://github.com/SRHgroup/IMPROVE_tool" history="1" highlightClick="0" endSnd="0">
+                          <a:hlinkClick r:id="rId10" tooltip="https://github.com/SRHgroup/IMPROVE_tool">
                             <a:extLst>
                               <a:ext uri="{A12FA001-AC4F-418D-AE19-62706E023703}">
                                 <ahyp:hlinkClr xmlns:ahyp="http://schemas.microsoft.com/office/drawing/2018/hyperlinkcolor" val="tx"/>
@@ -20283,6 +19992,11 @@
                     </a:solidFill>
                   </a:tcPr>
                 </a:tc>
+                <a:extLst>
+                  <a:ext uri="{0D108BD9-81ED-4DB2-BD59-A6C34878D82A}">
+                    <a16:rowId xmlns:a16="http://schemas.microsoft.com/office/drawing/2014/main" val="10004"/>
+                  </a:ext>
+                </a:extLst>
               </a:tr>
               <a:tr h="548640">
                 <a:tc>
@@ -20290,7 +20004,7 @@
                     <a:bodyPr/>
                     <a:lstStyle/>
                     <a:p>
-                      <a:pPr algn="l" indent="0" marL="0">
+                      <a:pPr marL="0" indent="0" algn="l">
                         <a:buNone/>
                       </a:pPr>
                       <a:r>
@@ -20358,7 +20072,7 @@
                     <a:bodyPr/>
                     <a:lstStyle/>
                     <a:p>
-                      <a:pPr algn="l" indent="0" marL="0">
+                      <a:pPr marL="0" indent="0" algn="l">
                         <a:buNone/>
                       </a:pPr>
                       <a:r>
@@ -20426,7 +20140,7 @@
                     <a:bodyPr/>
                     <a:lstStyle/>
                     <a:p>
-                      <a:pPr algn="l" indent="0" marL="0">
+                      <a:pPr marL="0" indent="0" algn="l">
                         <a:buNone/>
                       </a:pPr>
                       <a:r>
@@ -20437,7 +20151,7 @@
                           <a:latin typeface="Microsoft YaHei" pitchFamily="34" charset="0"/>
                           <a:ea typeface="Microsoft YaHei" pitchFamily="34" charset="-122"/>
                           <a:cs typeface="Microsoft YaHei" pitchFamily="34" charset="-120"/>
-                          <a:hlinkClick r:id="rId9" invalidUrl="" action="" tgtFrame="" tooltip="https://doi.org/10.3389/fimmu.2025.1681396" history="1" highlightClick="0" endSnd="0">
+                          <a:hlinkClick r:id="rId11" tooltip="https://doi.org/10.3389/fimmu.2025.1681396">
                             <a:extLst>
                               <a:ext uri="{A12FA001-AC4F-418D-AE19-62706E023703}">
                                 <ahyp:hlinkClr xmlns:ahyp="http://schemas.microsoft.com/office/drawing/2018/hyperlinkcolor" val="tx"/>
@@ -20501,7 +20215,7 @@
                     <a:bodyPr/>
                     <a:lstStyle/>
                     <a:p>
-                      <a:pPr algn="l" indent="0" marL="0">
+                      <a:pPr marL="0" indent="0" algn="l">
                         <a:buNone/>
                       </a:pPr>
                       <a:r>
@@ -20512,7 +20226,7 @@
                           <a:latin typeface="Microsoft YaHei" pitchFamily="34" charset="0"/>
                           <a:ea typeface="Microsoft YaHei" pitchFamily="34" charset="-122"/>
                           <a:cs typeface="Microsoft YaHei" pitchFamily="34" charset="-120"/>
-                          <a:hlinkClick r:id="rId10" invalidUrl="" action="" tgtFrame="" tooltip="https://github.com/01SYan19/NeoTImmuML" history="1" highlightClick="0" endSnd="0">
+                          <a:hlinkClick r:id="rId12" tooltip="https://github.com/01SYan19/NeoTImmuML">
                             <a:extLst>
                               <a:ext uri="{A12FA001-AC4F-418D-AE19-62706E023703}">
                                 <ahyp:hlinkClr xmlns:ahyp="http://schemas.microsoft.com/office/drawing/2018/hyperlinkcolor" val="tx"/>
@@ -20571,6 +20285,11 @@
                     </a:solidFill>
                   </a:tcPr>
                 </a:tc>
+                <a:extLst>
+                  <a:ext uri="{0D108BD9-81ED-4DB2-BD59-A6C34878D82A}">
+                    <a16:rowId xmlns:a16="http://schemas.microsoft.com/office/drawing/2014/main" val="10005"/>
+                  </a:ext>
+                </a:extLst>
               </a:tr>
             </a:tbl>
           </a:graphicData>
@@ -20597,7 +20316,7 @@
           <a:bodyPr wrap="square" lIns="0" tIns="0" rIns="0" bIns="0" rtlCol="0" anchor="t"/>
           <a:lstStyle/>
           <a:p>
-            <a:pPr indent="0" marL="0">
+            <a:pPr marL="0" indent="0">
               <a:buNone/>
             </a:pPr>
             <a:r>
@@ -20636,7 +20355,7 @@
           <a:bodyPr wrap="square" lIns="0" tIns="0" rIns="0" bIns="0" rtlCol="0" anchor="ctr"/>
           <a:lstStyle/>
           <a:p>
-            <a:pPr algn="r" indent="0" marL="0">
+            <a:pPr marL="0" indent="0" algn="r">
               <a:buNone/>
             </a:pPr>
             <a:r>
@@ -20670,6 +20389,7 @@
         <a:solidFill>
           <a:srgbClr val="0B3C49"/>
         </a:solidFill>
+        <a:effectLst/>
       </p:bgPr>
     </p:bg>
     <p:spTree>
@@ -20727,7 +20447,7 @@
           <a:bodyPr wrap="square" lIns="0" tIns="0" rIns="0" bIns="0" rtlCol="0" anchor="ctr"/>
           <a:lstStyle/>
           <a:p>
-            <a:pPr indent="0" marL="0">
+            <a:pPr marL="0" indent="0">
               <a:buNone/>
             </a:pPr>
             <a:r>
@@ -20766,7 +20486,7 @@
           <a:bodyPr wrap="square" lIns="0" tIns="0" rIns="0" bIns="0" rtlCol="0" anchor="ctr"/>
           <a:lstStyle/>
           <a:p>
-            <a:pPr indent="0" marL="0">
+            <a:pPr marL="0" indent="0">
               <a:buNone/>
             </a:pPr>
             <a:r>
@@ -20908,7 +20628,7 @@
           <a:bodyPr wrap="square" lIns="0" tIns="0" rIns="0" bIns="0" rtlCol="0" anchor="ctr"/>
           <a:lstStyle/>
           <a:p>
-            <a:pPr indent="0" marL="0">
+            <a:pPr marL="0" indent="0">
               <a:buNone/>
             </a:pPr>
             <a:r>
@@ -20992,7 +20712,7 @@
           <a:bodyPr wrap="square" lIns="0" tIns="0" rIns="0" bIns="0" rtlCol="0" anchor="ctr"/>
           <a:lstStyle/>
           <a:p>
-            <a:pPr indent="0" marL="0">
+            <a:pPr marL="0" indent="0">
               <a:buNone/>
             </a:pPr>
             <a:r>
@@ -21031,7 +20751,7 @@
           <a:bodyPr wrap="square" lIns="0" tIns="0" rIns="0" bIns="0" rtlCol="0" anchor="t"/>
           <a:lstStyle/>
           <a:p>
-            <a:pPr indent="0" marL="0">
+            <a:pPr marL="0" indent="0">
               <a:buNone/>
             </a:pPr>
             <a:r>
@@ -21115,7 +20835,7 @@
           <a:bodyPr wrap="square" lIns="0" tIns="0" rIns="0" bIns="0" rtlCol="0" anchor="ctr"/>
           <a:lstStyle/>
           <a:p>
-            <a:pPr indent="0" marL="0">
+            <a:pPr marL="0" indent="0">
               <a:buNone/>
             </a:pPr>
             <a:r>
@@ -21154,7 +20874,7 @@
           <a:bodyPr wrap="square" lIns="0" tIns="0" rIns="0" bIns="0" rtlCol="0" anchor="t"/>
           <a:lstStyle/>
           <a:p>
-            <a:pPr indent="0" marL="0">
+            <a:pPr marL="0" indent="0">
               <a:buNone/>
             </a:pPr>
             <a:r>
@@ -21238,7 +20958,7 @@
           <a:bodyPr wrap="square" lIns="0" tIns="0" rIns="0" bIns="0" rtlCol="0" anchor="ctr"/>
           <a:lstStyle/>
           <a:p>
-            <a:pPr indent="0" marL="0">
+            <a:pPr marL="0" indent="0">
               <a:buNone/>
             </a:pPr>
             <a:r>
@@ -21277,7 +20997,7 @@
           <a:bodyPr wrap="square" lIns="0" tIns="0" rIns="0" bIns="0" rtlCol="0" anchor="t"/>
           <a:lstStyle/>
           <a:p>
-            <a:pPr indent="0" marL="0">
+            <a:pPr marL="0" indent="0">
               <a:buNone/>
             </a:pPr>
             <a:r>
@@ -21361,7 +21081,7 @@
           <a:bodyPr wrap="square" lIns="0" tIns="0" rIns="0" bIns="0" rtlCol="0" anchor="ctr"/>
           <a:lstStyle/>
           <a:p>
-            <a:pPr indent="0" marL="0">
+            <a:pPr marL="0" indent="0">
               <a:buNone/>
             </a:pPr>
             <a:r>
@@ -21400,7 +21120,7 @@
           <a:bodyPr wrap="square" lIns="0" tIns="0" rIns="0" bIns="0" rtlCol="0" anchor="t"/>
           <a:lstStyle/>
           <a:p>
-            <a:pPr indent="0" marL="0">
+            <a:pPr marL="0" indent="0">
               <a:buNone/>
             </a:pPr>
             <a:r>
@@ -21484,7 +21204,7 @@
           <a:bodyPr wrap="square" lIns="0" tIns="0" rIns="0" bIns="0" rtlCol="0" anchor="ctr"/>
           <a:lstStyle/>
           <a:p>
-            <a:pPr indent="0" marL="0">
+            <a:pPr marL="0" indent="0">
               <a:buNone/>
             </a:pPr>
             <a:r>
@@ -21523,7 +21243,7 @@
           <a:bodyPr wrap="square" lIns="0" tIns="0" rIns="0" bIns="0" rtlCol="0" anchor="t"/>
           <a:lstStyle/>
           <a:p>
-            <a:pPr indent="0" marL="0">
+            <a:pPr marL="0" indent="0">
               <a:buNone/>
             </a:pPr>
             <a:r>
@@ -21536,45 +21256,6 @@
                 <a:cs typeface="Microsoft YaHei" pitchFamily="34" charset="-120"/>
               </a:rPr>
               <a:t>对外报告含 netMHCpan 相关数字前取 DTU 书面同意</a:t>
-            </a:r>
-            <a:endParaRPr lang="en-US" sz="950" dirty="0"/>
-          </a:p>
-        </p:txBody>
-      </p:sp>
-      <p:sp>
-        <p:nvSpPr>
-          <p:cNvPr id="27" name="Text 25"/>
-          <p:cNvSpPr/>
-          <p:nvPr/>
-        </p:nvSpPr>
-        <p:spPr>
-          <a:xfrm>
-            <a:off x="822960" y="6446520"/>
-            <a:ext cx="10515600" cy="320040"/>
-          </a:xfrm>
-          <a:prstGeom prst="rect">
-            <a:avLst/>
-          </a:prstGeom>
-          <a:noFill/>
-          <a:ln/>
-        </p:spPr>
-        <p:txBody>
-          <a:bodyPr wrap="square" lIns="0" tIns="0" rIns="0" bIns="0" rtlCol="0" anchor="ctr"/>
-          <a:lstStyle/>
-          <a:p>
-            <a:pPr indent="0" marL="0">
-              <a:buNone/>
-            </a:pPr>
-            <a:r>
-              <a:rPr lang="en-US" sz="950" i="1" dirty="0">
-                <a:solidFill>
-                  <a:srgbClr val="6E9AA1"/>
-                </a:solidFill>
-                <a:latin typeface="Microsoft YaHei" pitchFamily="34" charset="0"/>
-                <a:ea typeface="Microsoft YaHei" pitchFamily="34" charset="-122"/>
-                <a:cs typeface="Microsoft YaHei" pitchFamily="34" charset="-120"/>
-              </a:rPr>
-              <a:t>基准数字均经 analysis/metrics_ds2.csv 核对（max 聚合, &gt;0）；逐工具四类信息见 TOOLS/ 目录。</a:t>
             </a:r>
             <a:endParaRPr lang="en-US" sz="950" dirty="0"/>
           </a:p>
@@ -21601,7 +21282,7 @@
           <a:bodyPr wrap="square" lIns="0" tIns="0" rIns="0" bIns="0" rtlCol="0" anchor="ctr"/>
           <a:lstStyle/>
           <a:p>
-            <a:pPr algn="r" indent="0" marL="0">
+            <a:pPr marL="0" indent="0" algn="r">
               <a:buNone/>
             </a:pPr>
             <a:r>
@@ -21635,6 +21316,7 @@
         <a:solidFill>
           <a:srgbClr val="F2F7F7"/>
         </a:solidFill>
+        <a:effectLst/>
       </p:bgPr>
     </p:bg>
     <p:spTree>
@@ -21692,11 +21374,11 @@
           <a:bodyPr wrap="square" lIns="0" tIns="0" rIns="0" bIns="0" rtlCol="0" anchor="ctr"/>
           <a:lstStyle/>
           <a:p>
-            <a:pPr indent="0" marL="0">
-              <a:buNone/>
-            </a:pPr>
-            <a:r>
-              <a:rPr lang="en-US" sz="1200" b="1" spc="300" kern="0" dirty="0">
+            <a:pPr marL="0" indent="0">
+              <a:buNone/>
+            </a:pPr>
+            <a:r>
+              <a:rPr lang="en-US" sz="1200" b="1" kern="0" spc="300" dirty="0">
                 <a:solidFill>
                   <a:srgbClr val="028090"/>
                 </a:solidFill>
@@ -21731,7 +21413,7 @@
           <a:bodyPr wrap="square" lIns="0" tIns="0" rIns="0" bIns="0" rtlCol="0" anchor="ctr"/>
           <a:lstStyle/>
           <a:p>
-            <a:pPr indent="0" marL="0">
+            <a:pPr marL="0" indent="0">
               <a:buNone/>
             </a:pPr>
             <a:r>
@@ -21768,7 +21450,7 @@
           </a:solidFill>
           <a:ln/>
           <a:effectLst>
-            <a:outerShdw sx="100000" sy="100000" kx="0" ky="0" algn="bl" rotWithShape="0" blurRad="114300" dist="38100" dir="8100000">
+            <a:outerShdw blurRad="114300" dist="38100" dir="8100000" algn="bl" rotWithShape="0">
               <a:srgbClr val="0B3C49">
                 <a:alpha val="12000"/>
               </a:srgbClr>
@@ -21797,7 +21479,7 @@
           <a:bodyPr wrap="square" lIns="0" tIns="0" rIns="0" bIns="0" rtlCol="0" anchor="ctr"/>
           <a:lstStyle/>
           <a:p>
-            <a:pPr indent="0" marL="0">
+            <a:pPr marL="0" indent="0">
               <a:buNone/>
             </a:pPr>
             <a:r>
@@ -21836,7 +21518,7 @@
           <a:bodyPr wrap="square" lIns="0" tIns="0" rIns="0" bIns="0" rtlCol="0" anchor="t"/>
           <a:lstStyle/>
           <a:p>
-            <a:pPr indent="0" marL="0">
+            <a:pPr marL="0" indent="0">
               <a:lnSpc>
                 <a:spcPct val="118000"/>
               </a:lnSpc>
@@ -21853,12 +21535,6 @@
               </a:rPr>
               <a:t>构建一个能预测 T 细胞反应 </a:t>
             </a:r>
-            <a:pPr indent="0" marL="0">
-              <a:lnSpc>
-                <a:spcPct val="118000"/>
-              </a:lnSpc>
-              <a:buNone/>
-            </a:pPr>
             <a:r>
               <a:rPr lang="en-US" sz="1700" b="1" dirty="0">
                 <a:solidFill>
@@ -21870,12 +21546,6 @@
               </a:rPr>
               <a:t>「强弱程度」</a:t>
             </a:r>
-            <a:pPr indent="0" marL="0">
-              <a:lnSpc>
-                <a:spcPct val="118000"/>
-              </a:lnSpc>
-              <a:buNone/>
-            </a:pPr>
             <a:r>
               <a:rPr lang="en-US" sz="1400" dirty="0">
                 <a:solidFill>
@@ -21890,7 +21560,7 @@
             <a:endParaRPr lang="en-US" sz="1400" dirty="0"/>
           </a:p>
           <a:p>
-            <a:pPr indent="0" marL="0">
+            <a:pPr marL="0" indent="0">
               <a:lnSpc>
                 <a:spcPct val="118000"/>
               </a:lnSpc>
@@ -21935,7 +21605,7 @@
             <a:prstDash val="solid"/>
           </a:ln>
           <a:effectLst>
-            <a:outerShdw sx="100000" sy="100000" kx="0" ky="0" algn="bl" rotWithShape="0" blurRad="114300" dist="38100" dir="8100000">
+            <a:outerShdw blurRad="114300" dist="38100" dir="8100000" algn="bl" rotWithShape="0">
               <a:srgbClr val="0B3C49">
                 <a:alpha val="12000"/>
               </a:srgbClr>
@@ -21964,7 +21634,7 @@
           <a:bodyPr wrap="square" lIns="0" tIns="0" rIns="0" bIns="0" rtlCol="0" anchor="ctr"/>
           <a:lstStyle/>
           <a:p>
-            <a:pPr indent="0" marL="0">
+            <a:pPr marL="0" indent="0">
               <a:buNone/>
             </a:pPr>
             <a:r>
@@ -22003,7 +21673,7 @@
           <a:bodyPr wrap="square" lIns="0" tIns="0" rIns="0" bIns="0" rtlCol="0" anchor="t"/>
           <a:lstStyle/>
           <a:p>
-            <a:pPr indent="0" marL="0">
+            <a:pPr marL="0" indent="0">
               <a:lnSpc>
                 <a:spcPct val="110000"/>
               </a:lnSpc>
@@ -22023,7 +21693,7 @@
             <a:endParaRPr lang="en-US" sz="1200" dirty="0"/>
           </a:p>
           <a:p>
-            <a:pPr indent="0" marL="0">
+            <a:pPr marL="0" indent="0">
               <a:lnSpc>
                 <a:spcPct val="110000"/>
               </a:lnSpc>
@@ -22046,7 +21716,7 @@
             <a:endParaRPr lang="en-US" sz="1200" dirty="0"/>
           </a:p>
           <a:p>
-            <a:pPr indent="0" marL="0">
+            <a:pPr marL="0" indent="0">
               <a:lnSpc>
                 <a:spcPct val="110000"/>
               </a:lnSpc>
@@ -22088,7 +21758,7 @@
           <a:bodyPr wrap="square" lIns="0" tIns="0" rIns="0" bIns="0" rtlCol="0" anchor="ctr"/>
           <a:lstStyle/>
           <a:p>
-            <a:pPr indent="0" marL="0">
+            <a:pPr marL="0" indent="0">
               <a:buNone/>
             </a:pPr>
             <a:r>
@@ -22130,7 +21800,7 @@
             <a:prstDash val="solid"/>
           </a:ln>
           <a:effectLst>
-            <a:outerShdw sx="100000" sy="100000" kx="0" ky="0" algn="bl" rotWithShape="0" blurRad="114300" dist="38100" dir="8100000">
+            <a:outerShdw blurRad="114300" dist="38100" dir="8100000" algn="bl" rotWithShape="0">
               <a:srgbClr val="0B3C49">
                 <a:alpha val="12000"/>
               </a:srgbClr>
@@ -22179,7 +21849,7 @@
           <a:bodyPr wrap="square" lIns="0" tIns="0" rIns="0" bIns="0" rtlCol="0" anchor="ctr"/>
           <a:lstStyle/>
           <a:p>
-            <a:pPr algn="ctr" indent="0" marL="0">
+            <a:pPr marL="0" indent="0" algn="ctr">
               <a:buNone/>
             </a:pPr>
             <a:r>
@@ -22218,7 +21888,7 @@
           <a:bodyPr wrap="square" lIns="0" tIns="0" rIns="0" bIns="0" rtlCol="0" anchor="ctr"/>
           <a:lstStyle/>
           <a:p>
-            <a:pPr indent="0" marL="0">
+            <a:pPr marL="0" indent="0">
               <a:buNone/>
             </a:pPr>
             <a:r>
@@ -22257,7 +21927,7 @@
           <a:bodyPr wrap="square" lIns="0" tIns="0" rIns="0" bIns="0" rtlCol="0" anchor="ctr"/>
           <a:lstStyle/>
           <a:p>
-            <a:pPr indent="0" marL="0">
+            <a:pPr marL="0" indent="0">
               <a:buNone/>
             </a:pPr>
             <a:r>
@@ -22299,7 +21969,7 @@
             <a:prstDash val="solid"/>
           </a:ln>
           <a:effectLst>
-            <a:outerShdw sx="100000" sy="100000" kx="0" ky="0" algn="bl" rotWithShape="0" blurRad="114300" dist="38100" dir="8100000">
+            <a:outerShdw blurRad="114300" dist="38100" dir="8100000" algn="bl" rotWithShape="0">
               <a:srgbClr val="0B3C49">
                 <a:alpha val="12000"/>
               </a:srgbClr>
@@ -22348,7 +22018,7 @@
           <a:bodyPr wrap="square" lIns="0" tIns="0" rIns="0" bIns="0" rtlCol="0" anchor="ctr"/>
           <a:lstStyle/>
           <a:p>
-            <a:pPr algn="ctr" indent="0" marL="0">
+            <a:pPr marL="0" indent="0" algn="ctr">
               <a:buNone/>
             </a:pPr>
             <a:r>
@@ -22387,7 +22057,7 @@
           <a:bodyPr wrap="square" lIns="0" tIns="0" rIns="0" bIns="0" rtlCol="0" anchor="ctr"/>
           <a:lstStyle/>
           <a:p>
-            <a:pPr indent="0" marL="0">
+            <a:pPr marL="0" indent="0">
               <a:buNone/>
             </a:pPr>
             <a:r>
@@ -22426,7 +22096,7 @@
           <a:bodyPr wrap="square" lIns="0" tIns="0" rIns="0" bIns="0" rtlCol="0" anchor="ctr"/>
           <a:lstStyle/>
           <a:p>
-            <a:pPr indent="0" marL="0">
+            <a:pPr marL="0" indent="0">
               <a:buNone/>
             </a:pPr>
             <a:r>
@@ -22468,7 +22138,7 @@
             <a:prstDash val="solid"/>
           </a:ln>
           <a:effectLst>
-            <a:outerShdw sx="100000" sy="100000" kx="0" ky="0" algn="bl" rotWithShape="0" blurRad="114300" dist="38100" dir="8100000">
+            <a:outerShdw blurRad="114300" dist="38100" dir="8100000" algn="bl" rotWithShape="0">
               <a:srgbClr val="0B3C49">
                 <a:alpha val="12000"/>
               </a:srgbClr>
@@ -22517,7 +22187,7 @@
           <a:bodyPr wrap="square" lIns="0" tIns="0" rIns="0" bIns="0" rtlCol="0" anchor="ctr"/>
           <a:lstStyle/>
           <a:p>
-            <a:pPr algn="ctr" indent="0" marL="0">
+            <a:pPr marL="0" indent="0" algn="ctr">
               <a:buNone/>
             </a:pPr>
             <a:r>
@@ -22556,7 +22226,7 @@
           <a:bodyPr wrap="square" lIns="0" tIns="0" rIns="0" bIns="0" rtlCol="0" anchor="ctr"/>
           <a:lstStyle/>
           <a:p>
-            <a:pPr indent="0" marL="0">
+            <a:pPr marL="0" indent="0">
               <a:buNone/>
             </a:pPr>
             <a:r>
@@ -22595,7 +22265,7 @@
           <a:bodyPr wrap="square" lIns="0" tIns="0" rIns="0" bIns="0" rtlCol="0" anchor="ctr"/>
           <a:lstStyle/>
           <a:p>
-            <a:pPr indent="0" marL="0">
+            <a:pPr marL="0" indent="0">
               <a:buNone/>
             </a:pPr>
             <a:r>
@@ -22637,7 +22307,7 @@
             <a:prstDash val="solid"/>
           </a:ln>
           <a:effectLst>
-            <a:outerShdw sx="100000" sy="100000" kx="0" ky="0" algn="bl" rotWithShape="0" blurRad="114300" dist="38100" dir="8100000">
+            <a:outerShdw blurRad="114300" dist="38100" dir="8100000" algn="bl" rotWithShape="0">
               <a:srgbClr val="0B3C49">
                 <a:alpha val="12000"/>
               </a:srgbClr>
@@ -22686,7 +22356,7 @@
           <a:bodyPr wrap="square" lIns="0" tIns="0" rIns="0" bIns="0" rtlCol="0" anchor="ctr"/>
           <a:lstStyle/>
           <a:p>
-            <a:pPr algn="ctr" indent="0" marL="0">
+            <a:pPr marL="0" indent="0" algn="ctr">
               <a:buNone/>
             </a:pPr>
             <a:r>
@@ -22725,7 +22395,7 @@
           <a:bodyPr wrap="square" lIns="0" tIns="0" rIns="0" bIns="0" rtlCol="0" anchor="ctr"/>
           <a:lstStyle/>
           <a:p>
-            <a:pPr indent="0" marL="0">
+            <a:pPr marL="0" indent="0">
               <a:buNone/>
             </a:pPr>
             <a:r>
@@ -22764,7 +22434,7 @@
           <a:bodyPr wrap="square" lIns="0" tIns="0" rIns="0" bIns="0" rtlCol="0" anchor="ctr"/>
           <a:lstStyle/>
           <a:p>
-            <a:pPr indent="0" marL="0">
+            <a:pPr marL="0" indent="0">
               <a:buNone/>
             </a:pPr>
             <a:r>
@@ -22828,7 +22498,7 @@
           <a:bodyPr wrap="square" lIns="0" tIns="0" rIns="0" bIns="0" rtlCol="0" anchor="ctr"/>
           <a:lstStyle/>
           <a:p>
-            <a:pPr indent="0" marL="0">
+            <a:pPr marL="0" indent="0">
               <a:buNone/>
             </a:pPr>
             <a:r>
@@ -22867,7 +22537,7 @@
           <a:bodyPr wrap="square" lIns="0" tIns="0" rIns="0" bIns="0" rtlCol="0" anchor="ctr"/>
           <a:lstStyle/>
           <a:p>
-            <a:pPr algn="r" indent="0" marL="0">
+            <a:pPr marL="0" indent="0" algn="r">
               <a:buNone/>
             </a:pPr>
             <a:r>
@@ -22901,6 +22571,7 @@
         <a:solidFill>
           <a:srgbClr val="F2F7F7"/>
         </a:solidFill>
+        <a:effectLst/>
       </p:bgPr>
     </p:bg>
     <p:spTree>
@@ -22958,11 +22629,11 @@
           <a:bodyPr wrap="square" lIns="0" tIns="0" rIns="0" bIns="0" rtlCol="0" anchor="ctr"/>
           <a:lstStyle/>
           <a:p>
-            <a:pPr indent="0" marL="0">
-              <a:buNone/>
-            </a:pPr>
-            <a:r>
-              <a:rPr lang="en-US" sz="1200" b="1" spc="300" kern="0" dirty="0">
+            <a:pPr marL="0" indent="0">
+              <a:buNone/>
+            </a:pPr>
+            <a:r>
+              <a:rPr lang="en-US" sz="1200" b="1" kern="0" spc="300" dirty="0">
                 <a:solidFill>
                   <a:srgbClr val="028090"/>
                 </a:solidFill>
@@ -22997,7 +22668,7 @@
           <a:bodyPr wrap="square" lIns="0" tIns="0" rIns="0" bIns="0" rtlCol="0" anchor="ctr"/>
           <a:lstStyle/>
           <a:p>
-            <a:pPr indent="0" marL="0">
+            <a:pPr marL="0" indent="0">
               <a:buNone/>
             </a:pPr>
             <a:r>
@@ -23031,18 +22702,48 @@
         </p:nvGraphicFramePr>
         <p:xfrm>
           <a:off x="640080" y="1691640"/>
-          <a:ext cx="10881360" cy="914400"/>
+          <a:ext cx="10881360" cy="3291840"/>
         </p:xfrm>
         <a:graphic>
           <a:graphicData uri="http://schemas.openxmlformats.org/drawingml/2006/table">
             <a:tbl>
               <a:tblPr/>
               <a:tblGrid>
-                <a:gridCol w="2103120"/>
-                <a:gridCol w="2377440"/>
-                <a:gridCol w="1737360"/>
-                <a:gridCol w="1554480"/>
-                <a:gridCol w="3108960"/>
+                <a:gridCol w="2103120">
+                  <a:extLst>
+                    <a:ext uri="{9D8B030D-6E8A-4147-A177-3AD203B41FA5}">
+                      <a16:colId xmlns:a16="http://schemas.microsoft.com/office/drawing/2014/main" val="20000"/>
+                    </a:ext>
+                  </a:extLst>
+                </a:gridCol>
+                <a:gridCol w="2377440">
+                  <a:extLst>
+                    <a:ext uri="{9D8B030D-6E8A-4147-A177-3AD203B41FA5}">
+                      <a16:colId xmlns:a16="http://schemas.microsoft.com/office/drawing/2014/main" val="20001"/>
+                    </a:ext>
+                  </a:extLst>
+                </a:gridCol>
+                <a:gridCol w="1737360">
+                  <a:extLst>
+                    <a:ext uri="{9D8B030D-6E8A-4147-A177-3AD203B41FA5}">
+                      <a16:colId xmlns:a16="http://schemas.microsoft.com/office/drawing/2014/main" val="20002"/>
+                    </a:ext>
+                  </a:extLst>
+                </a:gridCol>
+                <a:gridCol w="1554480">
+                  <a:extLst>
+                    <a:ext uri="{9D8B030D-6E8A-4147-A177-3AD203B41FA5}">
+                      <a16:colId xmlns:a16="http://schemas.microsoft.com/office/drawing/2014/main" val="20003"/>
+                    </a:ext>
+                  </a:extLst>
+                </a:gridCol>
+                <a:gridCol w="3108960">
+                  <a:extLst>
+                    <a:ext uri="{9D8B030D-6E8A-4147-A177-3AD203B41FA5}">
+                      <a16:colId xmlns:a16="http://schemas.microsoft.com/office/drawing/2014/main" val="20004"/>
+                    </a:ext>
+                  </a:extLst>
+                </a:gridCol>
               </a:tblGrid>
               <a:tr h="457200">
                 <a:tc>
@@ -23050,7 +22751,7 @@
                     <a:bodyPr/>
                     <a:lstStyle/>
                     <a:p>
-                      <a:pPr algn="ctr" indent="0" marL="0">
+                      <a:pPr marL="0" indent="0" algn="ctr">
                         <a:buNone/>
                       </a:pPr>
                       <a:r>
@@ -23071,7 +22772,7 @@
                       </a:endParaRPr>
                     </a:p>
                   </a:txBody>
-                  <a:tcPr marL="91440" marR="91440" marT="45720" marB="45720" anchor="ctr">
+                  <a:tcPr anchor="ctr">
                     <a:lnL w="12700" cap="flat" cmpd="sng" algn="ctr">
                       <a:solidFill>
                         <a:srgbClr val="D5E3E4"/>
@@ -23118,7 +22819,7 @@
                     <a:bodyPr/>
                     <a:lstStyle/>
                     <a:p>
-                      <a:pPr algn="ctr" indent="0" marL="0">
+                      <a:pPr marL="0" indent="0" algn="ctr">
                         <a:buNone/>
                       </a:pPr>
                       <a:r>
@@ -23139,7 +22840,7 @@
                       </a:endParaRPr>
                     </a:p>
                   </a:txBody>
-                  <a:tcPr marL="91440" marR="91440" marT="45720" marB="45720" anchor="ctr">
+                  <a:tcPr anchor="ctr">
                     <a:lnL w="12700" cap="flat" cmpd="sng" algn="ctr">
                       <a:solidFill>
                         <a:srgbClr val="D5E3E4"/>
@@ -23186,7 +22887,7 @@
                     <a:bodyPr/>
                     <a:lstStyle/>
                     <a:p>
-                      <a:pPr algn="ctr" indent="0" marL="0">
+                      <a:pPr marL="0" indent="0" algn="ctr">
                         <a:buNone/>
                       </a:pPr>
                       <a:r>
@@ -23207,7 +22908,7 @@
                       </a:endParaRPr>
                     </a:p>
                   </a:txBody>
-                  <a:tcPr marL="91440" marR="91440" marT="45720" marB="45720" anchor="ctr">
+                  <a:tcPr anchor="ctr">
                     <a:lnL w="12700" cap="flat" cmpd="sng" algn="ctr">
                       <a:solidFill>
                         <a:srgbClr val="D5E3E4"/>
@@ -23254,7 +22955,7 @@
                     <a:bodyPr/>
                     <a:lstStyle/>
                     <a:p>
-                      <a:pPr algn="ctr" indent="0" marL="0">
+                      <a:pPr marL="0" indent="0" algn="ctr">
                         <a:buNone/>
                       </a:pPr>
                       <a:r>
@@ -23275,7 +22976,7 @@
                       </a:endParaRPr>
                     </a:p>
                   </a:txBody>
-                  <a:tcPr marL="91440" marR="91440" marT="45720" marB="45720" anchor="ctr">
+                  <a:tcPr anchor="ctr">
                     <a:lnL w="12700" cap="flat" cmpd="sng" algn="ctr">
                       <a:solidFill>
                         <a:srgbClr val="D5E3E4"/>
@@ -23322,7 +23023,7 @@
                     <a:bodyPr/>
                     <a:lstStyle/>
                     <a:p>
-                      <a:pPr algn="ctr" indent="0" marL="0">
+                      <a:pPr marL="0" indent="0" algn="ctr">
                         <a:buNone/>
                       </a:pPr>
                       <a:r>
@@ -23343,7 +23044,7 @@
                       </a:endParaRPr>
                     </a:p>
                   </a:txBody>
-                  <a:tcPr marL="91440" marR="91440" marT="45720" marB="45720" anchor="ctr">
+                  <a:tcPr anchor="ctr">
                     <a:lnL w="12700" cap="flat" cmpd="sng" algn="ctr">
                       <a:solidFill>
                         <a:srgbClr val="D5E3E4"/>
@@ -23385,6 +23086,11 @@
                     </a:solidFill>
                   </a:tcPr>
                 </a:tc>
+                <a:extLst>
+                  <a:ext uri="{0D108BD9-81ED-4DB2-BD59-A6C34878D82A}">
+                    <a16:rowId xmlns:a16="http://schemas.microsoft.com/office/drawing/2014/main" val="10000"/>
+                  </a:ext>
+                </a:extLst>
               </a:tr>
               <a:tr h="566928">
                 <a:tc>
@@ -23392,7 +23098,7 @@
                     <a:bodyPr/>
                     <a:lstStyle/>
                     <a:p>
-                      <a:pPr algn="l" indent="0" marL="0">
+                      <a:pPr marL="0" indent="0" algn="l">
                         <a:buNone/>
                       </a:pPr>
                       <a:r>
@@ -23413,7 +23119,7 @@
                       </a:endParaRPr>
                     </a:p>
                   </a:txBody>
-                  <a:tcPr marL="91440" marR="91440" marT="45720" marB="45720" anchor="ctr">
+                  <a:tcPr anchor="ctr">
                     <a:lnL w="12700" cap="flat" cmpd="sng" algn="ctr">
                       <a:solidFill>
                         <a:srgbClr val="D5E3E4"/>
@@ -23460,7 +23166,7 @@
                     <a:bodyPr/>
                     <a:lstStyle/>
                     <a:p>
-                      <a:pPr algn="ctr" indent="0" marL="0">
+                      <a:pPr marL="0" indent="0" algn="ctr">
                         <a:buNone/>
                       </a:pPr>
                       <a:r>
@@ -23481,7 +23187,7 @@
                       </a:endParaRPr>
                     </a:p>
                   </a:txBody>
-                  <a:tcPr marL="91440" marR="91440" marT="45720" marB="45720" anchor="ctr">
+                  <a:tcPr anchor="ctr">
                     <a:lnL w="12700" cap="flat" cmpd="sng" algn="ctr">
                       <a:solidFill>
                         <a:srgbClr val="D5E3E4"/>
@@ -23528,7 +23234,7 @@
                     <a:bodyPr/>
                     <a:lstStyle/>
                     <a:p>
-                      <a:pPr algn="ctr" indent="0" marL="0">
+                      <a:pPr marL="0" indent="0" algn="ctr">
                         <a:buNone/>
                       </a:pPr>
                       <a:r>
@@ -23549,7 +23255,7 @@
                       </a:endParaRPr>
                     </a:p>
                   </a:txBody>
-                  <a:tcPr marL="91440" marR="91440" marT="45720" marB="45720" anchor="ctr">
+                  <a:tcPr anchor="ctr">
                     <a:lnL w="12700" cap="flat" cmpd="sng" algn="ctr">
                       <a:solidFill>
                         <a:srgbClr val="D5E3E4"/>
@@ -23596,7 +23302,7 @@
                     <a:bodyPr/>
                     <a:lstStyle/>
                     <a:p>
-                      <a:pPr algn="ctr" indent="0" marL="0">
+                      <a:pPr marL="0" indent="0" algn="ctr">
                         <a:buNone/>
                       </a:pPr>
                       <a:r>
@@ -23617,7 +23323,7 @@
                       </a:endParaRPr>
                     </a:p>
                   </a:txBody>
-                  <a:tcPr marL="91440" marR="91440" marT="45720" marB="45720" anchor="ctr">
+                  <a:tcPr anchor="ctr">
                     <a:lnL w="12700" cap="flat" cmpd="sng" algn="ctr">
                       <a:solidFill>
                         <a:srgbClr val="D5E3E4"/>
@@ -23664,7 +23370,7 @@
                     <a:bodyPr/>
                     <a:lstStyle/>
                     <a:p>
-                      <a:pPr algn="ctr" indent="0" marL="0">
+                      <a:pPr marL="0" indent="0" algn="ctr">
                         <a:buNone/>
                       </a:pPr>
                       <a:r>
@@ -23685,7 +23391,7 @@
                       </a:endParaRPr>
                     </a:p>
                   </a:txBody>
-                  <a:tcPr marL="91440" marR="91440" marT="45720" marB="45720" anchor="ctr">
+                  <a:tcPr anchor="ctr">
                     <a:lnL w="12700" cap="flat" cmpd="sng" algn="ctr">
                       <a:solidFill>
                         <a:srgbClr val="D5E3E4"/>
@@ -23727,6 +23433,11 @@
                     </a:solidFill>
                   </a:tcPr>
                 </a:tc>
+                <a:extLst>
+                  <a:ext uri="{0D108BD9-81ED-4DB2-BD59-A6C34878D82A}">
+                    <a16:rowId xmlns:a16="http://schemas.microsoft.com/office/drawing/2014/main" val="10001"/>
+                  </a:ext>
+                </a:extLst>
               </a:tr>
               <a:tr h="566928">
                 <a:tc>
@@ -23734,7 +23445,7 @@
                     <a:bodyPr/>
                     <a:lstStyle/>
                     <a:p>
-                      <a:pPr algn="l" indent="0" marL="0">
+                      <a:pPr marL="0" indent="0" algn="l">
                         <a:buNone/>
                       </a:pPr>
                       <a:r>
@@ -23755,7 +23466,7 @@
                       </a:endParaRPr>
                     </a:p>
                   </a:txBody>
-                  <a:tcPr marL="91440" marR="91440" marT="45720" marB="45720" anchor="ctr">
+                  <a:tcPr anchor="ctr">
                     <a:lnL w="12700" cap="flat" cmpd="sng" algn="ctr">
                       <a:solidFill>
                         <a:srgbClr val="D5E3E4"/>
@@ -23802,7 +23513,7 @@
                     <a:bodyPr/>
                     <a:lstStyle/>
                     <a:p>
-                      <a:pPr algn="ctr" indent="0" marL="0">
+                      <a:pPr marL="0" indent="0" algn="ctr">
                         <a:buNone/>
                       </a:pPr>
                       <a:r>
@@ -23823,7 +23534,7 @@
                       </a:endParaRPr>
                     </a:p>
                   </a:txBody>
-                  <a:tcPr marL="91440" marR="91440" marT="45720" marB="45720" anchor="ctr">
+                  <a:tcPr anchor="ctr">
                     <a:lnL w="12700" cap="flat" cmpd="sng" algn="ctr">
                       <a:solidFill>
                         <a:srgbClr val="D5E3E4"/>
@@ -23870,7 +23581,7 @@
                     <a:bodyPr/>
                     <a:lstStyle/>
                     <a:p>
-                      <a:pPr algn="ctr" indent="0" marL="0">
+                      <a:pPr marL="0" indent="0" algn="ctr">
                         <a:buNone/>
                       </a:pPr>
                       <a:r>
@@ -23891,7 +23602,7 @@
                       </a:endParaRPr>
                     </a:p>
                   </a:txBody>
-                  <a:tcPr marL="91440" marR="91440" marT="45720" marB="45720" anchor="ctr">
+                  <a:tcPr anchor="ctr">
                     <a:lnL w="12700" cap="flat" cmpd="sng" algn="ctr">
                       <a:solidFill>
                         <a:srgbClr val="D5E3E4"/>
@@ -23938,7 +23649,7 @@
                     <a:bodyPr/>
                     <a:lstStyle/>
                     <a:p>
-                      <a:pPr algn="ctr" indent="0" marL="0">
+                      <a:pPr marL="0" indent="0" algn="ctr">
                         <a:buNone/>
                       </a:pPr>
                       <a:r>
@@ -23959,7 +23670,7 @@
                       </a:endParaRPr>
                     </a:p>
                   </a:txBody>
-                  <a:tcPr marL="91440" marR="91440" marT="45720" marB="45720" anchor="ctr">
+                  <a:tcPr anchor="ctr">
                     <a:lnL w="12700" cap="flat" cmpd="sng" algn="ctr">
                       <a:solidFill>
                         <a:srgbClr val="D5E3E4"/>
@@ -24006,7 +23717,7 @@
                     <a:bodyPr/>
                     <a:lstStyle/>
                     <a:p>
-                      <a:pPr algn="ctr" indent="0" marL="0">
+                      <a:pPr marL="0" indent="0" algn="ctr">
                         <a:buNone/>
                       </a:pPr>
                       <a:r>
@@ -24027,7 +23738,7 @@
                       </a:endParaRPr>
                     </a:p>
                   </a:txBody>
-                  <a:tcPr marL="91440" marR="91440" marT="45720" marB="45720" anchor="ctr">
+                  <a:tcPr anchor="ctr">
                     <a:lnL w="12700" cap="flat" cmpd="sng" algn="ctr">
                       <a:solidFill>
                         <a:srgbClr val="D5E3E4"/>
@@ -24069,6 +23780,11 @@
                     </a:solidFill>
                   </a:tcPr>
                 </a:tc>
+                <a:extLst>
+                  <a:ext uri="{0D108BD9-81ED-4DB2-BD59-A6C34878D82A}">
+                    <a16:rowId xmlns:a16="http://schemas.microsoft.com/office/drawing/2014/main" val="10002"/>
+                  </a:ext>
+                </a:extLst>
               </a:tr>
               <a:tr h="566928">
                 <a:tc>
@@ -24076,7 +23792,7 @@
                     <a:bodyPr/>
                     <a:lstStyle/>
                     <a:p>
-                      <a:pPr algn="l" indent="0" marL="0">
+                      <a:pPr marL="0" indent="0" algn="l">
                         <a:buNone/>
                       </a:pPr>
                       <a:r>
@@ -24097,7 +23813,7 @@
                       </a:endParaRPr>
                     </a:p>
                   </a:txBody>
-                  <a:tcPr marL="91440" marR="91440" marT="45720" marB="45720" anchor="ctr">
+                  <a:tcPr anchor="ctr">
                     <a:lnL w="12700" cap="flat" cmpd="sng" algn="ctr">
                       <a:solidFill>
                         <a:srgbClr val="D5E3E4"/>
@@ -24144,7 +23860,7 @@
                     <a:bodyPr/>
                     <a:lstStyle/>
                     <a:p>
-                      <a:pPr algn="ctr" indent="0" marL="0">
+                      <a:pPr marL="0" indent="0" algn="ctr">
                         <a:buNone/>
                       </a:pPr>
                       <a:r>
@@ -24165,7 +23881,7 @@
                       </a:endParaRPr>
                     </a:p>
                   </a:txBody>
-                  <a:tcPr marL="91440" marR="91440" marT="45720" marB="45720" anchor="ctr">
+                  <a:tcPr anchor="ctr">
                     <a:lnL w="12700" cap="flat" cmpd="sng" algn="ctr">
                       <a:solidFill>
                         <a:srgbClr val="D5E3E4"/>
@@ -24212,7 +23928,7 @@
                     <a:bodyPr/>
                     <a:lstStyle/>
                     <a:p>
-                      <a:pPr algn="ctr" indent="0" marL="0">
+                      <a:pPr marL="0" indent="0" algn="ctr">
                         <a:buNone/>
                       </a:pPr>
                       <a:r>
@@ -24233,7 +23949,7 @@
                       </a:endParaRPr>
                     </a:p>
                   </a:txBody>
-                  <a:tcPr marL="91440" marR="91440" marT="45720" marB="45720" anchor="ctr">
+                  <a:tcPr anchor="ctr">
                     <a:lnL w="12700" cap="flat" cmpd="sng" algn="ctr">
                       <a:solidFill>
                         <a:srgbClr val="D5E3E4"/>
@@ -24280,7 +23996,7 @@
                     <a:bodyPr/>
                     <a:lstStyle/>
                     <a:p>
-                      <a:pPr algn="ctr" indent="0" marL="0">
+                      <a:pPr marL="0" indent="0" algn="ctr">
                         <a:buNone/>
                       </a:pPr>
                       <a:r>
@@ -24301,7 +24017,7 @@
                       </a:endParaRPr>
                     </a:p>
                   </a:txBody>
-                  <a:tcPr marL="91440" marR="91440" marT="45720" marB="45720" anchor="ctr">
+                  <a:tcPr anchor="ctr">
                     <a:lnL w="12700" cap="flat" cmpd="sng" algn="ctr">
                       <a:solidFill>
                         <a:srgbClr val="D5E3E4"/>
@@ -24348,7 +24064,7 @@
                     <a:bodyPr/>
                     <a:lstStyle/>
                     <a:p>
-                      <a:pPr algn="ctr" indent="0" marL="0">
+                      <a:pPr marL="0" indent="0" algn="ctr">
                         <a:buNone/>
                       </a:pPr>
                       <a:r>
@@ -24369,7 +24085,7 @@
                       </a:endParaRPr>
                     </a:p>
                   </a:txBody>
-                  <a:tcPr marL="91440" marR="91440" marT="45720" marB="45720" anchor="ctr">
+                  <a:tcPr anchor="ctr">
                     <a:lnL w="12700" cap="flat" cmpd="sng" algn="ctr">
                       <a:solidFill>
                         <a:srgbClr val="D5E3E4"/>
@@ -24411,6 +24127,11 @@
                     </a:solidFill>
                   </a:tcPr>
                 </a:tc>
+                <a:extLst>
+                  <a:ext uri="{0D108BD9-81ED-4DB2-BD59-A6C34878D82A}">
+                    <a16:rowId xmlns:a16="http://schemas.microsoft.com/office/drawing/2014/main" val="10003"/>
+                  </a:ext>
+                </a:extLst>
               </a:tr>
               <a:tr h="566928">
                 <a:tc>
@@ -24418,7 +24139,7 @@
                     <a:bodyPr/>
                     <a:lstStyle/>
                     <a:p>
-                      <a:pPr algn="l" indent="0" marL="0">
+                      <a:pPr marL="0" indent="0" algn="l">
                         <a:buNone/>
                       </a:pPr>
                       <a:r>
@@ -24439,7 +24160,7 @@
                       </a:endParaRPr>
                     </a:p>
                   </a:txBody>
-                  <a:tcPr marL="91440" marR="91440" marT="45720" marB="45720" anchor="ctr">
+                  <a:tcPr anchor="ctr">
                     <a:lnL w="12700" cap="flat" cmpd="sng" algn="ctr">
                       <a:solidFill>
                         <a:srgbClr val="D5E3E4"/>
@@ -24486,7 +24207,7 @@
                     <a:bodyPr/>
                     <a:lstStyle/>
                     <a:p>
-                      <a:pPr algn="ctr" indent="0" marL="0">
+                      <a:pPr marL="0" indent="0" algn="ctr">
                         <a:buNone/>
                       </a:pPr>
                       <a:r>
@@ -24507,7 +24228,7 @@
                       </a:endParaRPr>
                     </a:p>
                   </a:txBody>
-                  <a:tcPr marL="91440" marR="91440" marT="45720" marB="45720" anchor="ctr">
+                  <a:tcPr anchor="ctr">
                     <a:lnL w="12700" cap="flat" cmpd="sng" algn="ctr">
                       <a:solidFill>
                         <a:srgbClr val="D5E3E4"/>
@@ -24554,7 +24275,7 @@
                     <a:bodyPr/>
                     <a:lstStyle/>
                     <a:p>
-                      <a:pPr algn="ctr" indent="0" marL="0">
+                      <a:pPr marL="0" indent="0" algn="ctr">
                         <a:buNone/>
                       </a:pPr>
                       <a:r>
@@ -24575,7 +24296,7 @@
                       </a:endParaRPr>
                     </a:p>
                   </a:txBody>
-                  <a:tcPr marL="91440" marR="91440" marT="45720" marB="45720" anchor="ctr">
+                  <a:tcPr anchor="ctr">
                     <a:lnL w="12700" cap="flat" cmpd="sng" algn="ctr">
                       <a:solidFill>
                         <a:srgbClr val="D5E3E4"/>
@@ -24622,7 +24343,7 @@
                     <a:bodyPr/>
                     <a:lstStyle/>
                     <a:p>
-                      <a:pPr algn="ctr" indent="0" marL="0">
+                      <a:pPr marL="0" indent="0" algn="ctr">
                         <a:buNone/>
                       </a:pPr>
                       <a:r>
@@ -24643,7 +24364,7 @@
                       </a:endParaRPr>
                     </a:p>
                   </a:txBody>
-                  <a:tcPr marL="91440" marR="91440" marT="45720" marB="45720" anchor="ctr">
+                  <a:tcPr anchor="ctr">
                     <a:lnL w="12700" cap="flat" cmpd="sng" algn="ctr">
                       <a:solidFill>
                         <a:srgbClr val="D5E3E4"/>
@@ -24690,7 +24411,7 @@
                     <a:bodyPr/>
                     <a:lstStyle/>
                     <a:p>
-                      <a:pPr algn="ctr" indent="0" marL="0">
+                      <a:pPr marL="0" indent="0" algn="ctr">
                         <a:buNone/>
                       </a:pPr>
                       <a:r>
@@ -24711,7 +24432,7 @@
                       </a:endParaRPr>
                     </a:p>
                   </a:txBody>
-                  <a:tcPr marL="91440" marR="91440" marT="45720" marB="45720" anchor="ctr">
+                  <a:tcPr anchor="ctr">
                     <a:lnL w="12700" cap="flat" cmpd="sng" algn="ctr">
                       <a:solidFill>
                         <a:srgbClr val="D5E3E4"/>
@@ -24753,6 +24474,11 @@
                     </a:solidFill>
                   </a:tcPr>
                 </a:tc>
+                <a:extLst>
+                  <a:ext uri="{0D108BD9-81ED-4DB2-BD59-A6C34878D82A}">
+                    <a16:rowId xmlns:a16="http://schemas.microsoft.com/office/drawing/2014/main" val="10004"/>
+                  </a:ext>
+                </a:extLst>
               </a:tr>
               <a:tr h="566928">
                 <a:tc>
@@ -24760,7 +24486,7 @@
                     <a:bodyPr/>
                     <a:lstStyle/>
                     <a:p>
-                      <a:pPr algn="l" indent="0" marL="0">
+                      <a:pPr marL="0" indent="0" algn="l">
                         <a:buNone/>
                       </a:pPr>
                       <a:r>
@@ -24781,7 +24507,7 @@
                       </a:endParaRPr>
                     </a:p>
                   </a:txBody>
-                  <a:tcPr marL="91440" marR="91440" marT="45720" marB="45720" anchor="ctr">
+                  <a:tcPr anchor="ctr">
                     <a:lnL w="12700" cap="flat" cmpd="sng" algn="ctr">
                       <a:solidFill>
                         <a:srgbClr val="D5E3E4"/>
@@ -24828,7 +24554,7 @@
                     <a:bodyPr/>
                     <a:lstStyle/>
                     <a:p>
-                      <a:pPr algn="ctr" indent="0" marL="0">
+                      <a:pPr marL="0" indent="0" algn="ctr">
                         <a:buNone/>
                       </a:pPr>
                       <a:r>
@@ -24849,7 +24575,7 @@
                       </a:endParaRPr>
                     </a:p>
                   </a:txBody>
-                  <a:tcPr marL="91440" marR="91440" marT="45720" marB="45720" anchor="ctr">
+                  <a:tcPr anchor="ctr">
                     <a:lnL w="12700" cap="flat" cmpd="sng" algn="ctr">
                       <a:solidFill>
                         <a:srgbClr val="D5E3E4"/>
@@ -24896,7 +24622,7 @@
                     <a:bodyPr/>
                     <a:lstStyle/>
                     <a:p>
-                      <a:pPr algn="ctr" indent="0" marL="0">
+                      <a:pPr marL="0" indent="0" algn="ctr">
                         <a:buNone/>
                       </a:pPr>
                       <a:r>
@@ -24917,7 +24643,7 @@
                       </a:endParaRPr>
                     </a:p>
                   </a:txBody>
-                  <a:tcPr marL="91440" marR="91440" marT="45720" marB="45720" anchor="ctr">
+                  <a:tcPr anchor="ctr">
                     <a:lnL w="12700" cap="flat" cmpd="sng" algn="ctr">
                       <a:solidFill>
                         <a:srgbClr val="D5E3E4"/>
@@ -24964,7 +24690,7 @@
                     <a:bodyPr/>
                     <a:lstStyle/>
                     <a:p>
-                      <a:pPr algn="ctr" indent="0" marL="0">
+                      <a:pPr marL="0" indent="0" algn="ctr">
                         <a:buNone/>
                       </a:pPr>
                       <a:r>
@@ -24985,7 +24711,7 @@
                       </a:endParaRPr>
                     </a:p>
                   </a:txBody>
-                  <a:tcPr marL="91440" marR="91440" marT="45720" marB="45720" anchor="ctr">
+                  <a:tcPr anchor="ctr">
                     <a:lnL w="12700" cap="flat" cmpd="sng" algn="ctr">
                       <a:solidFill>
                         <a:srgbClr val="D5E3E4"/>
@@ -25032,7 +24758,7 @@
                     <a:bodyPr/>
                     <a:lstStyle/>
                     <a:p>
-                      <a:pPr algn="ctr" indent="0" marL="0">
+                      <a:pPr marL="0" indent="0" algn="ctr">
                         <a:buNone/>
                       </a:pPr>
                       <a:r>
@@ -25053,7 +24779,7 @@
                       </a:endParaRPr>
                     </a:p>
                   </a:txBody>
-                  <a:tcPr marL="91440" marR="91440" marT="45720" marB="45720" anchor="ctr">
+                  <a:tcPr anchor="ctr">
                     <a:lnL w="12700" cap="flat" cmpd="sng" algn="ctr">
                       <a:solidFill>
                         <a:srgbClr val="D5E3E4"/>
@@ -25095,6 +24821,11 @@
                     </a:solidFill>
                   </a:tcPr>
                 </a:tc>
+                <a:extLst>
+                  <a:ext uri="{0D108BD9-81ED-4DB2-BD59-A6C34878D82A}">
+                    <a16:rowId xmlns:a16="http://schemas.microsoft.com/office/drawing/2014/main" val="10005"/>
+                  </a:ext>
+                </a:extLst>
               </a:tr>
             </a:tbl>
           </a:graphicData>
@@ -25121,7 +24852,7 @@
           <a:bodyPr wrap="square" lIns="0" tIns="0" rIns="0" bIns="0" rtlCol="0" anchor="t"/>
           <a:lstStyle/>
           <a:p>
-            <a:pPr indent="0" marL="0">
+            <a:pPr marL="0" indent="0">
               <a:lnSpc>
                 <a:spcPct val="105000"/>
               </a:lnSpc>
@@ -25141,7 +24872,7 @@
             <a:endParaRPr lang="en-US" sz="950" dirty="0"/>
           </a:p>
           <a:p>
-            <a:pPr indent="0" marL="0">
+            <a:pPr marL="0" indent="0">
               <a:lnSpc>
                 <a:spcPct val="105000"/>
               </a:lnSpc>
@@ -25183,7 +24914,7 @@
           <a:bodyPr wrap="square" lIns="0" tIns="0" rIns="0" bIns="0" rtlCol="0" anchor="ctr"/>
           <a:lstStyle/>
           <a:p>
-            <a:pPr algn="r" indent="0" marL="0">
+            <a:pPr marL="0" indent="0" algn="r">
               <a:buNone/>
             </a:pPr>
             <a:r>
@@ -25217,6 +24948,7 @@
         <a:solidFill>
           <a:srgbClr val="F2F7F7"/>
         </a:solidFill>
+        <a:effectLst/>
       </p:bgPr>
     </p:bg>
     <p:spTree>
@@ -25274,11 +25006,11 @@
           <a:bodyPr wrap="square" lIns="0" tIns="0" rIns="0" bIns="0" rtlCol="0" anchor="ctr"/>
           <a:lstStyle/>
           <a:p>
-            <a:pPr indent="0" marL="0">
-              <a:buNone/>
-            </a:pPr>
-            <a:r>
-              <a:rPr lang="en-US" sz="1200" b="1" spc="300" kern="0" dirty="0">
+            <a:pPr marL="0" indent="0">
+              <a:buNone/>
+            </a:pPr>
+            <a:r>
+              <a:rPr lang="en-US" sz="1200" b="1" kern="0" spc="300" dirty="0">
                 <a:solidFill>
                   <a:srgbClr val="028090"/>
                 </a:solidFill>
@@ -25313,7 +25045,7 @@
           <a:bodyPr wrap="square" lIns="0" tIns="0" rIns="0" bIns="0" rtlCol="0" anchor="ctr"/>
           <a:lstStyle/>
           <a:p>
-            <a:pPr indent="0" marL="0">
+            <a:pPr marL="0" indent="0">
               <a:buNone/>
             </a:pPr>
             <a:r>
@@ -25352,7 +25084,7 @@
           <a:bodyPr wrap="square" lIns="0" tIns="0" rIns="0" bIns="0" rtlCol="0" anchor="ctr"/>
           <a:lstStyle/>
           <a:p>
-            <a:pPr indent="0" marL="0">
+            <a:pPr marL="0" indent="0">
               <a:buNone/>
             </a:pPr>
             <a:r>
@@ -25394,7 +25126,7 @@
             <a:prstDash val="solid"/>
           </a:ln>
           <a:effectLst>
-            <a:outerShdw sx="100000" sy="100000" kx="0" ky="0" algn="bl" rotWithShape="0" blurRad="114300" dist="38100" dir="8100000">
+            <a:outerShdw blurRad="114300" dist="38100" dir="8100000" algn="bl" rotWithShape="0">
               <a:srgbClr val="0B3C49">
                 <a:alpha val="12000"/>
               </a:srgbClr>
@@ -25423,7 +25155,7 @@
           <a:bodyPr wrap="square" lIns="0" tIns="0" rIns="0" bIns="0" rtlCol="0" anchor="ctr"/>
           <a:lstStyle/>
           <a:p>
-            <a:pPr indent="0" marL="0">
+            <a:pPr marL="0" indent="0">
               <a:buNone/>
             </a:pPr>
             <a:r>
@@ -25462,7 +25194,7 @@
           <a:bodyPr wrap="square" lIns="0" tIns="0" rIns="0" bIns="0" rtlCol="0" anchor="t"/>
           <a:lstStyle/>
           <a:p>
-            <a:pPr indent="0" marL="0">
+            <a:pPr marL="0" indent="0">
               <a:lnSpc>
                 <a:spcPct val="115000"/>
               </a:lnSpc>
@@ -25504,7 +25236,7 @@
           <a:bodyPr wrap="square" lIns="0" tIns="0" rIns="0" bIns="0" rtlCol="0" anchor="ctr"/>
           <a:lstStyle/>
           <a:p>
-            <a:pPr indent="0" marL="0">
+            <a:pPr marL="0" indent="0">
               <a:buNone/>
             </a:pPr>
             <a:r>
@@ -25543,7 +25275,7 @@
           <a:bodyPr wrap="square" lIns="0" tIns="0" rIns="0" bIns="0" rtlCol="0" anchor="t"/>
           <a:lstStyle/>
           <a:p>
-            <a:pPr indent="0" marL="0">
+            <a:pPr marL="0" indent="0">
               <a:lnSpc>
                 <a:spcPct val="115000"/>
               </a:lnSpc>
@@ -25585,7 +25317,7 @@
           <a:bodyPr wrap="square" lIns="0" tIns="0" rIns="0" bIns="0" rtlCol="0" anchor="ctr"/>
           <a:lstStyle/>
           <a:p>
-            <a:pPr indent="0" marL="0">
+            <a:pPr marL="0" indent="0">
               <a:buNone/>
             </a:pPr>
             <a:r>
@@ -25624,7 +25356,7 @@
           <a:bodyPr wrap="square" lIns="0" tIns="0" rIns="0" bIns="0" rtlCol="0" anchor="t"/>
           <a:lstStyle/>
           <a:p>
-            <a:pPr indent="0" marL="0">
+            <a:pPr marL="0" indent="0">
               <a:lnSpc>
                 <a:spcPct val="115000"/>
               </a:lnSpc>
@@ -25666,7 +25398,7 @@
           </a:solidFill>
           <a:ln/>
           <a:effectLst>
-            <a:outerShdw sx="100000" sy="100000" kx="0" ky="0" algn="bl" rotWithShape="0" blurRad="114300" dist="38100" dir="8100000">
+            <a:outerShdw blurRad="114300" dist="38100" dir="8100000" algn="bl" rotWithShape="0">
               <a:srgbClr val="0B3C49">
                 <a:alpha val="12000"/>
               </a:srgbClr>
@@ -25695,7 +25427,7 @@
           <a:bodyPr wrap="square" lIns="0" tIns="0" rIns="0" bIns="0" rtlCol="0" anchor="ctr"/>
           <a:lstStyle/>
           <a:p>
-            <a:pPr indent="0" marL="0">
+            <a:pPr marL="0" indent="0">
               <a:buNone/>
             </a:pPr>
             <a:r>
@@ -25734,7 +25466,7 @@
           <a:bodyPr wrap="square" lIns="0" tIns="0" rIns="0" bIns="0" rtlCol="0" anchor="t"/>
           <a:lstStyle/>
           <a:p>
-            <a:pPr indent="0" marL="0">
+            <a:pPr marL="0" indent="0">
               <a:spcAft>
                 <a:spcPts val="100"/>
               </a:spcAft>
@@ -25754,7 +25486,7 @@
             <a:endParaRPr lang="en-US" sz="900" dirty="0"/>
           </a:p>
           <a:p>
-            <a:pPr indent="0" marL="0">
+            <a:pPr marL="0" indent="0">
               <a:spcAft>
                 <a:spcPts val="100"/>
               </a:spcAft>
@@ -25774,7 +25506,7 @@
             <a:endParaRPr lang="en-US" sz="900" dirty="0"/>
           </a:p>
           <a:p>
-            <a:pPr indent="0" marL="0">
+            <a:pPr marL="0" indent="0">
               <a:spcAft>
                 <a:spcPts val="100"/>
               </a:spcAft>
@@ -25794,7 +25526,7 @@
             <a:endParaRPr lang="en-US" sz="900" dirty="0"/>
           </a:p>
           <a:p>
-            <a:pPr indent="0" marL="0">
+            <a:pPr marL="0" indent="0">
               <a:spcAft>
                 <a:spcPts val="100"/>
               </a:spcAft>
@@ -25814,7 +25546,7 @@
             <a:endParaRPr lang="en-US" sz="900" dirty="0"/>
           </a:p>
           <a:p>
-            <a:pPr indent="0" marL="0">
+            <a:pPr marL="0" indent="0">
               <a:spcAft>
                 <a:spcPts val="100"/>
               </a:spcAft>
@@ -25834,7 +25566,7 @@
             <a:endParaRPr lang="en-US" sz="900" dirty="0"/>
           </a:p>
           <a:p>
-            <a:pPr indent="0" marL="0">
+            <a:pPr marL="0" indent="0">
               <a:spcAft>
                 <a:spcPts val="100"/>
               </a:spcAft>
@@ -25876,7 +25608,7 @@
           </a:solidFill>
           <a:ln/>
           <a:effectLst>
-            <a:outerShdw sx="100000" sy="100000" kx="0" ky="0" algn="bl" rotWithShape="0" blurRad="114300" dist="38100" dir="8100000">
+            <a:outerShdw blurRad="114300" dist="38100" dir="8100000" algn="bl" rotWithShape="0">
               <a:srgbClr val="0B3C49">
                 <a:alpha val="12000"/>
               </a:srgbClr>
@@ -25905,7 +25637,7 @@
           <a:bodyPr wrap="square" lIns="0" tIns="0" rIns="0" bIns="0" rtlCol="0" anchor="ctr"/>
           <a:lstStyle/>
           <a:p>
-            <a:pPr indent="0" marL="0">
+            <a:pPr marL="0" indent="0">
               <a:buNone/>
             </a:pPr>
             <a:r>
@@ -25944,7 +25676,7 @@
           <a:bodyPr wrap="square" lIns="0" tIns="0" rIns="0" bIns="0" rtlCol="0" anchor="t"/>
           <a:lstStyle/>
           <a:p>
-            <a:pPr indent="0" marL="0">
+            <a:pPr marL="0" indent="0">
               <a:spcAft>
                 <a:spcPts val="100"/>
               </a:spcAft>
@@ -25964,7 +25696,7 @@
             <a:endParaRPr lang="en-US" sz="900" dirty="0"/>
           </a:p>
           <a:p>
-            <a:pPr indent="0" marL="0">
+            <a:pPr marL="0" indent="0">
               <a:spcAft>
                 <a:spcPts val="100"/>
               </a:spcAft>
@@ -25984,7 +25716,7 @@
             <a:endParaRPr lang="en-US" sz="900" dirty="0"/>
           </a:p>
           <a:p>
-            <a:pPr indent="0" marL="0">
+            <a:pPr marL="0" indent="0">
               <a:spcAft>
                 <a:spcPts val="100"/>
               </a:spcAft>
@@ -26004,7 +25736,7 @@
             <a:endParaRPr lang="en-US" sz="900" dirty="0"/>
           </a:p>
           <a:p>
-            <a:pPr indent="0" marL="0">
+            <a:pPr marL="0" indent="0">
               <a:spcAft>
                 <a:spcPts val="100"/>
               </a:spcAft>
@@ -26046,7 +25778,7 @@
           </a:solidFill>
           <a:ln/>
           <a:effectLst>
-            <a:outerShdw sx="100000" sy="100000" kx="0" ky="0" algn="bl" rotWithShape="0" blurRad="114300" dist="38100" dir="8100000">
+            <a:outerShdw blurRad="114300" dist="38100" dir="8100000" algn="bl" rotWithShape="0">
               <a:srgbClr val="0B3C49">
                 <a:alpha val="12000"/>
               </a:srgbClr>
@@ -26075,7 +25807,7 @@
           <a:bodyPr wrap="square" lIns="0" tIns="0" rIns="0" bIns="0" rtlCol="0" anchor="ctr"/>
           <a:lstStyle/>
           <a:p>
-            <a:pPr indent="0" marL="0">
+            <a:pPr marL="0" indent="0">
               <a:buNone/>
             </a:pPr>
             <a:r>
@@ -26114,7 +25846,7 @@
           <a:bodyPr wrap="square" lIns="0" tIns="0" rIns="0" bIns="0" rtlCol="0" anchor="t"/>
           <a:lstStyle/>
           <a:p>
-            <a:pPr indent="0" marL="0">
+            <a:pPr marL="0" indent="0">
               <a:spcAft>
                 <a:spcPts val="100"/>
               </a:spcAft>
@@ -26134,7 +25866,7 @@
             <a:endParaRPr lang="en-US" sz="900" dirty="0"/>
           </a:p>
           <a:p>
-            <a:pPr indent="0" marL="0">
+            <a:pPr marL="0" indent="0">
               <a:spcAft>
                 <a:spcPts val="100"/>
               </a:spcAft>
@@ -26154,7 +25886,7 @@
             <a:endParaRPr lang="en-US" sz="900" dirty="0"/>
           </a:p>
           <a:p>
-            <a:pPr indent="0" marL="0">
+            <a:pPr marL="0" indent="0">
               <a:spcAft>
                 <a:spcPts val="100"/>
               </a:spcAft>
@@ -26196,7 +25928,7 @@
           <a:bodyPr wrap="square" lIns="0" tIns="0" rIns="0" bIns="0" rtlCol="0" anchor="t"/>
           <a:lstStyle/>
           <a:p>
-            <a:pPr indent="0" marL="0">
+            <a:pPr marL="0" indent="0">
               <a:buNone/>
             </a:pPr>
             <a:r>
@@ -26210,9 +25942,6 @@
               </a:rPr>
               <a:t>来源  </a:t>
             </a:r>
-            <a:pPr indent="0" marL="0">
-              <a:buNone/>
-            </a:pPr>
             <a:r>
               <a:rPr lang="en-US" sz="900" i="1" dirty="0">
                 <a:solidFill>
@@ -26224,9 +25953,6 @@
               </a:rPr>
               <a:t>DeepImmuno, Briefings in Bioinformatics 2021</a:t>
             </a:r>
-            <a:pPr indent="0" marL="0">
-              <a:buNone/>
-            </a:pPr>
             <a:r>
               <a:rPr lang="en-US" sz="900" i="1" u="sng" dirty="0">
                 <a:solidFill>
@@ -26235,7 +25961,7 @@
                 <a:latin typeface="Microsoft YaHei" pitchFamily="34" charset="0"/>
                 <a:ea typeface="Microsoft YaHei" pitchFamily="34" charset="-122"/>
                 <a:cs typeface="Microsoft YaHei" pitchFamily="34" charset="-120"/>
-                <a:hlinkClick r:id="rId1" invalidUrl="" action="" tgtFrame="" tooltip="DOI" history="1" highlightClick="0" endSnd="0">
+                <a:hlinkClick r:id="rId3" tooltip="DOI">
                   <a:extLst>
                     <a:ext uri="{A12FA001-AC4F-418D-AE19-62706E023703}">
                       <ahyp:hlinkClr xmlns:ahyp="http://schemas.microsoft.com/office/drawing/2018/hyperlinkcolor" val="tx"/>
@@ -26245,9 +25971,6 @@
               </a:rPr>
               <a:t> · DOI 10.1093/bib/bbab160</a:t>
             </a:r>
-            <a:pPr indent="0" marL="0">
-              <a:buNone/>
-            </a:pPr>
             <a:r>
               <a:rPr lang="en-US" sz="900" i="1" u="sng" dirty="0">
                 <a:solidFill>
@@ -26256,7 +25979,7 @@
                 <a:latin typeface="Microsoft YaHei" pitchFamily="34" charset="0"/>
                 <a:ea typeface="Microsoft YaHei" pitchFamily="34" charset="-122"/>
                 <a:cs typeface="Microsoft YaHei" pitchFamily="34" charset="-120"/>
-                <a:hlinkClick r:id="rId2" invalidUrl="" action="" tgtFrame="" tooltip="repo" history="1" highlightClick="0" endSnd="0">
+                <a:hlinkClick r:id="rId4" tooltip="repo">
                   <a:extLst>
                     <a:ext uri="{A12FA001-AC4F-418D-AE19-62706E023703}">
                       <ahyp:hlinkClr xmlns:ahyp="http://schemas.microsoft.com/office/drawing/2018/hyperlinkcolor" val="tx"/>
@@ -26291,7 +26014,7 @@
           <a:bodyPr wrap="square" lIns="0" tIns="0" rIns="0" bIns="0" rtlCol="0" anchor="ctr"/>
           <a:lstStyle/>
           <a:p>
-            <a:pPr algn="r" indent="0" marL="0">
+            <a:pPr marL="0" indent="0" algn="r">
               <a:buNone/>
             </a:pPr>
             <a:r>
@@ -26325,6 +26048,7 @@
         <a:solidFill>
           <a:srgbClr val="F2F7F7"/>
         </a:solidFill>
+        <a:effectLst/>
       </p:bgPr>
     </p:bg>
     <p:spTree>
@@ -26382,11 +26106,11 @@
           <a:bodyPr wrap="square" lIns="0" tIns="0" rIns="0" bIns="0" rtlCol="0" anchor="ctr"/>
           <a:lstStyle/>
           <a:p>
-            <a:pPr indent="0" marL="0">
-              <a:buNone/>
-            </a:pPr>
-            <a:r>
-              <a:rPr lang="en-US" sz="1200" b="1" spc="300" kern="0" dirty="0">
+            <a:pPr marL="0" indent="0">
+              <a:buNone/>
+            </a:pPr>
+            <a:r>
+              <a:rPr lang="en-US" sz="1200" b="1" kern="0" spc="300" dirty="0">
                 <a:solidFill>
                   <a:srgbClr val="028090"/>
                 </a:solidFill>
@@ -26421,7 +26145,7 @@
           <a:bodyPr wrap="square" lIns="0" tIns="0" rIns="0" bIns="0" rtlCol="0" anchor="ctr"/>
           <a:lstStyle/>
           <a:p>
-            <a:pPr indent="0" marL="0">
+            <a:pPr marL="0" indent="0">
               <a:buNone/>
             </a:pPr>
             <a:r>
@@ -26460,7 +26184,7 @@
           <a:bodyPr wrap="square" lIns="0" tIns="0" rIns="0" bIns="0" rtlCol="0" anchor="ctr"/>
           <a:lstStyle/>
           <a:p>
-            <a:pPr indent="0" marL="0">
+            <a:pPr marL="0" indent="0">
               <a:buNone/>
             </a:pPr>
             <a:r>
@@ -26521,7 +26245,7 @@
           <a:bodyPr wrap="square" lIns="0" tIns="0" rIns="0" bIns="0" rtlCol="0" anchor="ctr"/>
           <a:lstStyle/>
           <a:p>
-            <a:pPr algn="ctr" indent="0" marL="0">
+            <a:pPr marL="0" indent="0" algn="ctr">
               <a:buNone/>
             </a:pPr>
             <a:r>
@@ -26560,7 +26284,7 @@
           <a:bodyPr wrap="square" lIns="0" tIns="0" rIns="0" bIns="0" rtlCol="0" anchor="ctr"/>
           <a:lstStyle/>
           <a:p>
-            <a:pPr algn="ctr" indent="0" marL="0">
+            <a:pPr marL="0" indent="0" algn="ctr">
               <a:buNone/>
             </a:pPr>
             <a:r>
@@ -26602,7 +26326,7 @@
             <a:prstDash val="solid"/>
           </a:ln>
           <a:effectLst>
-            <a:outerShdw sx="100000" sy="100000" kx="0" ky="0" algn="bl" rotWithShape="0" blurRad="114300" dist="38100" dir="8100000">
+            <a:outerShdw blurRad="114300" dist="38100" dir="8100000" algn="bl" rotWithShape="0">
               <a:srgbClr val="0B3C49">
                 <a:alpha val="12000"/>
               </a:srgbClr>
@@ -26651,7 +26375,7 @@
           <a:bodyPr wrap="square" lIns="0" tIns="0" rIns="0" bIns="0" rtlCol="0" anchor="ctr"/>
           <a:lstStyle/>
           <a:p>
-            <a:pPr indent="0" marL="0">
+            <a:pPr marL="0" indent="0">
               <a:buNone/>
             </a:pPr>
             <a:r>
@@ -26799,7 +26523,7 @@
             <a:prstDash val="solid"/>
           </a:ln>
           <a:effectLst>
-            <a:outerShdw sx="100000" sy="100000" kx="0" ky="0" algn="bl" rotWithShape="0" blurRad="114300" dist="38100" dir="8100000">
+            <a:outerShdw blurRad="114300" dist="38100" dir="8100000" algn="bl" rotWithShape="0">
               <a:srgbClr val="0B3C49">
                 <a:alpha val="12000"/>
               </a:srgbClr>
@@ -26848,7 +26572,7 @@
           <a:bodyPr wrap="square" lIns="0" tIns="0" rIns="0" bIns="0" rtlCol="0" anchor="ctr"/>
           <a:lstStyle/>
           <a:p>
-            <a:pPr indent="0" marL="0">
+            <a:pPr marL="0" indent="0">
               <a:buNone/>
             </a:pPr>
             <a:r>
@@ -26975,7 +26699,7 @@
             <a:prstDash val="solid"/>
           </a:ln>
           <a:effectLst>
-            <a:outerShdw sx="100000" sy="100000" kx="0" ky="0" algn="bl" rotWithShape="0" blurRad="114300" dist="38100" dir="8100000">
+            <a:outerShdw blurRad="114300" dist="38100" dir="8100000" algn="bl" rotWithShape="0">
               <a:srgbClr val="0B3C49">
                 <a:alpha val="12000"/>
               </a:srgbClr>
@@ -27024,7 +26748,7 @@
           <a:bodyPr wrap="square" lIns="0" tIns="0" rIns="0" bIns="0" rtlCol="0" anchor="ctr"/>
           <a:lstStyle/>
           <a:p>
-            <a:pPr indent="0" marL="0">
+            <a:pPr marL="0" indent="0">
               <a:buNone/>
             </a:pPr>
             <a:r>
@@ -27151,7 +26875,7 @@
             <a:prstDash val="solid"/>
           </a:ln>
           <a:effectLst>
-            <a:outerShdw sx="100000" sy="100000" kx="0" ky="0" algn="bl" rotWithShape="0" blurRad="114300" dist="38100" dir="8100000">
+            <a:outerShdw blurRad="114300" dist="38100" dir="8100000" algn="bl" rotWithShape="0">
               <a:srgbClr val="0B3C49">
                 <a:alpha val="12000"/>
               </a:srgbClr>
@@ -27200,7 +26924,7 @@
           <a:bodyPr wrap="square" lIns="0" tIns="0" rIns="0" bIns="0" rtlCol="0" anchor="ctr"/>
           <a:lstStyle/>
           <a:p>
-            <a:pPr indent="0" marL="0">
+            <a:pPr marL="0" indent="0">
               <a:buNone/>
             </a:pPr>
             <a:r>
@@ -27324,7 +27048,7 @@
           <a:bodyPr wrap="square" lIns="0" tIns="0" rIns="0" bIns="0" rtlCol="0" anchor="t"/>
           <a:lstStyle/>
           <a:p>
-            <a:pPr indent="0" marL="0">
+            <a:pPr marL="0" indent="0">
               <a:buNone/>
             </a:pPr>
             <a:r>
@@ -27338,9 +27062,6 @@
               </a:rPr>
               <a:t>来源  </a:t>
             </a:r>
-            <a:pPr indent="0" marL="0">
-              <a:buNone/>
-            </a:pPr>
             <a:r>
               <a:rPr lang="en-US" sz="900" i="1" dirty="0">
                 <a:solidFill>
@@ -27352,9 +27073,6 @@
               </a:rPr>
               <a:t>DeepImmuno, Briefings in Bioinformatics 2021</a:t>
             </a:r>
-            <a:pPr indent="0" marL="0">
-              <a:buNone/>
-            </a:pPr>
             <a:r>
               <a:rPr lang="en-US" sz="900" i="1" u="sng" dirty="0">
                 <a:solidFill>
@@ -27363,7 +27081,7 @@
                 <a:latin typeface="Microsoft YaHei" pitchFamily="34" charset="0"/>
                 <a:ea typeface="Microsoft YaHei" pitchFamily="34" charset="-122"/>
                 <a:cs typeface="Microsoft YaHei" pitchFamily="34" charset="-120"/>
-                <a:hlinkClick r:id="rId1" invalidUrl="" action="" tgtFrame="" tooltip="DOI" history="1" highlightClick="0" endSnd="0">
+                <a:hlinkClick r:id="rId3" tooltip="DOI">
                   <a:extLst>
                     <a:ext uri="{A12FA001-AC4F-418D-AE19-62706E023703}">
                       <ahyp:hlinkClr xmlns:ahyp="http://schemas.microsoft.com/office/drawing/2018/hyperlinkcolor" val="tx"/>
@@ -27373,9 +27091,6 @@
               </a:rPr>
               <a:t> · DOI 10.1093/bib/bbab160</a:t>
             </a:r>
-            <a:pPr indent="0" marL="0">
-              <a:buNone/>
-            </a:pPr>
             <a:r>
               <a:rPr lang="en-US" sz="900" i="1" u="sng" dirty="0">
                 <a:solidFill>
@@ -27384,7 +27099,7 @@
                 <a:latin typeface="Microsoft YaHei" pitchFamily="34" charset="0"/>
                 <a:ea typeface="Microsoft YaHei" pitchFamily="34" charset="-122"/>
                 <a:cs typeface="Microsoft YaHei" pitchFamily="34" charset="-120"/>
-                <a:hlinkClick r:id="rId2" invalidUrl="" action="" tgtFrame="" tooltip="repo" history="1" highlightClick="0" endSnd="0">
+                <a:hlinkClick r:id="rId4" tooltip="repo">
                   <a:extLst>
                     <a:ext uri="{A12FA001-AC4F-418D-AE19-62706E023703}">
                       <ahyp:hlinkClr xmlns:ahyp="http://schemas.microsoft.com/office/drawing/2018/hyperlinkcolor" val="tx"/>
@@ -27419,7 +27134,7 @@
           <a:bodyPr wrap="square" lIns="0" tIns="0" rIns="0" bIns="0" rtlCol="0" anchor="ctr"/>
           <a:lstStyle/>
           <a:p>
-            <a:pPr algn="r" indent="0" marL="0">
+            <a:pPr marL="0" indent="0" algn="r">
               <a:buNone/>
             </a:pPr>
             <a:r>
@@ -27453,6 +27168,7 @@
         <a:solidFill>
           <a:srgbClr val="F2F7F7"/>
         </a:solidFill>
+        <a:effectLst/>
       </p:bgPr>
     </p:bg>
     <p:spTree>
@@ -27510,11 +27226,11 @@
           <a:bodyPr wrap="square" lIns="0" tIns="0" rIns="0" bIns="0" rtlCol="0" anchor="ctr"/>
           <a:lstStyle/>
           <a:p>
-            <a:pPr indent="0" marL="0">
-              <a:buNone/>
-            </a:pPr>
-            <a:r>
-              <a:rPr lang="en-US" sz="1200" b="1" spc="300" kern="0" dirty="0">
+            <a:pPr marL="0" indent="0">
+              <a:buNone/>
+            </a:pPr>
+            <a:r>
+              <a:rPr lang="en-US" sz="1200" b="1" kern="0" spc="300" dirty="0">
                 <a:solidFill>
                   <a:srgbClr val="1C7293"/>
                 </a:solidFill>
@@ -27549,7 +27265,7 @@
           <a:bodyPr wrap="square" lIns="0" tIns="0" rIns="0" bIns="0" rtlCol="0" anchor="ctr"/>
           <a:lstStyle/>
           <a:p>
-            <a:pPr indent="0" marL="0">
+            <a:pPr marL="0" indent="0">
               <a:buNone/>
             </a:pPr>
             <a:r>
@@ -27588,7 +27304,7 @@
           <a:bodyPr wrap="square" lIns="0" tIns="0" rIns="0" bIns="0" rtlCol="0" anchor="ctr"/>
           <a:lstStyle/>
           <a:p>
-            <a:pPr indent="0" marL="0">
+            <a:pPr marL="0" indent="0">
               <a:buNone/>
             </a:pPr>
             <a:r>
@@ -27630,7 +27346,7 @@
             <a:prstDash val="solid"/>
           </a:ln>
           <a:effectLst>
-            <a:outerShdw sx="100000" sy="100000" kx="0" ky="0" algn="bl" rotWithShape="0" blurRad="114300" dist="38100" dir="8100000">
+            <a:outerShdw blurRad="114300" dist="38100" dir="8100000" algn="bl" rotWithShape="0">
               <a:srgbClr val="0B3C49">
                 <a:alpha val="12000"/>
               </a:srgbClr>
@@ -27659,7 +27375,7 @@
           <a:bodyPr wrap="square" lIns="0" tIns="0" rIns="0" bIns="0" rtlCol="0" anchor="ctr"/>
           <a:lstStyle/>
           <a:p>
-            <a:pPr indent="0" marL="0">
+            <a:pPr marL="0" indent="0">
               <a:buNone/>
             </a:pPr>
             <a:r>
@@ -27698,7 +27414,7 @@
           <a:bodyPr wrap="square" lIns="0" tIns="0" rIns="0" bIns="0" rtlCol="0" anchor="t"/>
           <a:lstStyle/>
           <a:p>
-            <a:pPr indent="0" marL="0">
+            <a:pPr marL="0" indent="0">
               <a:lnSpc>
                 <a:spcPct val="115000"/>
               </a:lnSpc>
@@ -27740,7 +27456,7 @@
           <a:bodyPr wrap="square" lIns="0" tIns="0" rIns="0" bIns="0" rtlCol="0" anchor="ctr"/>
           <a:lstStyle/>
           <a:p>
-            <a:pPr indent="0" marL="0">
+            <a:pPr marL="0" indent="0">
               <a:buNone/>
             </a:pPr>
             <a:r>
@@ -27779,7 +27495,7 @@
           <a:bodyPr wrap="square" lIns="0" tIns="0" rIns="0" bIns="0" rtlCol="0" anchor="t"/>
           <a:lstStyle/>
           <a:p>
-            <a:pPr indent="0" marL="0">
+            <a:pPr marL="0" indent="0">
               <a:lnSpc>
                 <a:spcPct val="115000"/>
               </a:lnSpc>
@@ -27821,7 +27537,7 @@
           <a:bodyPr wrap="square" lIns="0" tIns="0" rIns="0" bIns="0" rtlCol="0" anchor="ctr"/>
           <a:lstStyle/>
           <a:p>
-            <a:pPr indent="0" marL="0">
+            <a:pPr marL="0" indent="0">
               <a:buNone/>
             </a:pPr>
             <a:r>
@@ -27860,7 +27576,7 @@
           <a:bodyPr wrap="square" lIns="0" tIns="0" rIns="0" bIns="0" rtlCol="0" anchor="t"/>
           <a:lstStyle/>
           <a:p>
-            <a:pPr indent="0" marL="0">
+            <a:pPr marL="0" indent="0">
               <a:lnSpc>
                 <a:spcPct val="115000"/>
               </a:lnSpc>
@@ -27902,7 +27618,7 @@
           </a:solidFill>
           <a:ln/>
           <a:effectLst>
-            <a:outerShdw sx="100000" sy="100000" kx="0" ky="0" algn="bl" rotWithShape="0" blurRad="114300" dist="38100" dir="8100000">
+            <a:outerShdw blurRad="114300" dist="38100" dir="8100000" algn="bl" rotWithShape="0">
               <a:srgbClr val="0B3C49">
                 <a:alpha val="12000"/>
               </a:srgbClr>
@@ -27931,7 +27647,7 @@
           <a:bodyPr wrap="square" lIns="0" tIns="0" rIns="0" bIns="0" rtlCol="0" anchor="ctr"/>
           <a:lstStyle/>
           <a:p>
-            <a:pPr indent="0" marL="0">
+            <a:pPr marL="0" indent="0">
               <a:buNone/>
             </a:pPr>
             <a:r>
@@ -27970,7 +27686,7 @@
           <a:bodyPr wrap="square" lIns="0" tIns="0" rIns="0" bIns="0" rtlCol="0" anchor="t"/>
           <a:lstStyle/>
           <a:p>
-            <a:pPr indent="0" marL="0">
+            <a:pPr marL="0" indent="0">
               <a:spcAft>
                 <a:spcPts val="100"/>
               </a:spcAft>
@@ -27990,7 +27706,7 @@
             <a:endParaRPr lang="en-US" sz="900" dirty="0"/>
           </a:p>
           <a:p>
-            <a:pPr indent="0" marL="0">
+            <a:pPr marL="0" indent="0">
               <a:spcAft>
                 <a:spcPts val="100"/>
               </a:spcAft>
@@ -28010,7 +27726,7 @@
             <a:endParaRPr lang="en-US" sz="900" dirty="0"/>
           </a:p>
           <a:p>
-            <a:pPr indent="0" marL="0">
+            <a:pPr marL="0" indent="0">
               <a:spcAft>
                 <a:spcPts val="100"/>
               </a:spcAft>
@@ -28030,7 +27746,7 @@
             <a:endParaRPr lang="en-US" sz="900" dirty="0"/>
           </a:p>
           <a:p>
-            <a:pPr indent="0" marL="0">
+            <a:pPr marL="0" indent="0">
               <a:spcAft>
                 <a:spcPts val="100"/>
               </a:spcAft>
@@ -28050,7 +27766,7 @@
             <a:endParaRPr lang="en-US" sz="900" dirty="0"/>
           </a:p>
           <a:p>
-            <a:pPr indent="0" marL="0">
+            <a:pPr marL="0" indent="0">
               <a:spcAft>
                 <a:spcPts val="100"/>
               </a:spcAft>
@@ -28092,7 +27808,7 @@
           </a:solidFill>
           <a:ln/>
           <a:effectLst>
-            <a:outerShdw sx="100000" sy="100000" kx="0" ky="0" algn="bl" rotWithShape="0" blurRad="114300" dist="38100" dir="8100000">
+            <a:outerShdw blurRad="114300" dist="38100" dir="8100000" algn="bl" rotWithShape="0">
               <a:srgbClr val="0B3C49">
                 <a:alpha val="12000"/>
               </a:srgbClr>
@@ -28121,7 +27837,7 @@
           <a:bodyPr wrap="square" lIns="0" tIns="0" rIns="0" bIns="0" rtlCol="0" anchor="ctr"/>
           <a:lstStyle/>
           <a:p>
-            <a:pPr indent="0" marL="0">
+            <a:pPr marL="0" indent="0">
               <a:buNone/>
             </a:pPr>
             <a:r>
@@ -28160,7 +27876,7 @@
           <a:bodyPr wrap="square" lIns="0" tIns="0" rIns="0" bIns="0" rtlCol="0" anchor="t"/>
           <a:lstStyle/>
           <a:p>
-            <a:pPr indent="0" marL="0">
+            <a:pPr marL="0" indent="0">
               <a:spcAft>
                 <a:spcPts val="100"/>
               </a:spcAft>
@@ -28180,7 +27896,7 @@
             <a:endParaRPr lang="en-US" sz="900" dirty="0"/>
           </a:p>
           <a:p>
-            <a:pPr indent="0" marL="0">
+            <a:pPr marL="0" indent="0">
               <a:spcAft>
                 <a:spcPts val="100"/>
               </a:spcAft>
@@ -28200,7 +27916,7 @@
             <a:endParaRPr lang="en-US" sz="900" dirty="0"/>
           </a:p>
           <a:p>
-            <a:pPr indent="0" marL="0">
+            <a:pPr marL="0" indent="0">
               <a:spcAft>
                 <a:spcPts val="100"/>
               </a:spcAft>
@@ -28242,7 +27958,7 @@
           </a:solidFill>
           <a:ln/>
           <a:effectLst>
-            <a:outerShdw sx="100000" sy="100000" kx="0" ky="0" algn="bl" rotWithShape="0" blurRad="114300" dist="38100" dir="8100000">
+            <a:outerShdw blurRad="114300" dist="38100" dir="8100000" algn="bl" rotWithShape="0">
               <a:srgbClr val="0B3C49">
                 <a:alpha val="12000"/>
               </a:srgbClr>
@@ -28271,7 +27987,7 @@
           <a:bodyPr wrap="square" lIns="0" tIns="0" rIns="0" bIns="0" rtlCol="0" anchor="ctr"/>
           <a:lstStyle/>
           <a:p>
-            <a:pPr indent="0" marL="0">
+            <a:pPr marL="0" indent="0">
               <a:buNone/>
             </a:pPr>
             <a:r>
@@ -28310,7 +28026,7 @@
           <a:bodyPr wrap="square" lIns="0" tIns="0" rIns="0" bIns="0" rtlCol="0" anchor="t"/>
           <a:lstStyle/>
           <a:p>
-            <a:pPr indent="0" marL="0">
+            <a:pPr marL="0" indent="0">
               <a:spcAft>
                 <a:spcPts val="100"/>
               </a:spcAft>
@@ -28330,7 +28046,7 @@
             <a:endParaRPr lang="en-US" sz="900" dirty="0"/>
           </a:p>
           <a:p>
-            <a:pPr indent="0" marL="0">
+            <a:pPr marL="0" indent="0">
               <a:spcAft>
                 <a:spcPts val="100"/>
               </a:spcAft>
@@ -28350,7 +28066,7 @@
             <a:endParaRPr lang="en-US" sz="900" dirty="0"/>
           </a:p>
           <a:p>
-            <a:pPr indent="0" marL="0">
+            <a:pPr marL="0" indent="0">
               <a:spcAft>
                 <a:spcPts val="100"/>
               </a:spcAft>
@@ -28392,7 +28108,7 @@
           <a:bodyPr wrap="square" lIns="0" tIns="0" rIns="0" bIns="0" rtlCol="0" anchor="t"/>
           <a:lstStyle/>
           <a:p>
-            <a:pPr indent="0" marL="0">
+            <a:pPr marL="0" indent="0">
               <a:buNone/>
             </a:pPr>
             <a:r>
@@ -28406,9 +28122,6 @@
               </a:rPr>
               <a:t>来源  </a:t>
             </a:r>
-            <a:pPr indent="0" marL="0">
-              <a:buNone/>
-            </a:pPr>
             <a:r>
               <a:rPr lang="en-US" sz="900" i="1" dirty="0">
                 <a:solidFill>
@@ -28420,9 +28133,6 @@
               </a:rPr>
               <a:t>PredIG, Genome Medicine 2025</a:t>
             </a:r>
-            <a:pPr indent="0" marL="0">
-              <a:buNone/>
-            </a:pPr>
             <a:r>
               <a:rPr lang="en-US" sz="900" i="1" u="sng" dirty="0">
                 <a:solidFill>
@@ -28431,7 +28141,7 @@
                 <a:latin typeface="Microsoft YaHei" pitchFamily="34" charset="0"/>
                 <a:ea typeface="Microsoft YaHei" pitchFamily="34" charset="-122"/>
                 <a:cs typeface="Microsoft YaHei" pitchFamily="34" charset="-120"/>
-                <a:hlinkClick r:id="rId1" invalidUrl="" action="" tgtFrame="" tooltip="DOI" history="1" highlightClick="0" endSnd="0">
+                <a:hlinkClick r:id="rId3" tooltip="DOI">
                   <a:extLst>
                     <a:ext uri="{A12FA001-AC4F-418D-AE19-62706E023703}">
                       <ahyp:hlinkClr xmlns:ahyp="http://schemas.microsoft.com/office/drawing/2018/hyperlinkcolor" val="tx"/>
@@ -28441,9 +28151,6 @@
               </a:rPr>
               <a:t> · DOI 10.1186/s13073-025-01569-8</a:t>
             </a:r>
-            <a:pPr indent="0" marL="0">
-              <a:buNone/>
-            </a:pPr>
             <a:r>
               <a:rPr lang="en-US" sz="900" i="1" u="sng" dirty="0">
                 <a:solidFill>
@@ -28452,7 +28159,7 @@
                 <a:latin typeface="Microsoft YaHei" pitchFamily="34" charset="0"/>
                 <a:ea typeface="Microsoft YaHei" pitchFamily="34" charset="-122"/>
                 <a:cs typeface="Microsoft YaHei" pitchFamily="34" charset="-120"/>
-                <a:hlinkClick r:id="rId2" invalidUrl="" action="" tgtFrame="" tooltip="repo" history="1" highlightClick="0" endSnd="0">
+                <a:hlinkClick r:id="rId4" tooltip="repo">
                   <a:extLst>
                     <a:ext uri="{A12FA001-AC4F-418D-AE19-62706E023703}">
                       <ahyp:hlinkClr xmlns:ahyp="http://schemas.microsoft.com/office/drawing/2018/hyperlinkcolor" val="tx"/>
@@ -28487,7 +28194,7 @@
           <a:bodyPr wrap="square" lIns="0" tIns="0" rIns="0" bIns="0" rtlCol="0" anchor="ctr"/>
           <a:lstStyle/>
           <a:p>
-            <a:pPr algn="r" indent="0" marL="0">
+            <a:pPr marL="0" indent="0" algn="r">
               <a:buNone/>
             </a:pPr>
             <a:r>
@@ -28521,6 +28228,7 @@
         <a:solidFill>
           <a:srgbClr val="F2F7F7"/>
         </a:solidFill>
+        <a:effectLst/>
       </p:bgPr>
     </p:bg>
     <p:spTree>
@@ -28578,11 +28286,11 @@
           <a:bodyPr wrap="square" lIns="0" tIns="0" rIns="0" bIns="0" rtlCol="0" anchor="ctr"/>
           <a:lstStyle/>
           <a:p>
-            <a:pPr indent="0" marL="0">
-              <a:buNone/>
-            </a:pPr>
-            <a:r>
-              <a:rPr lang="en-US" sz="1200" b="1" spc="300" kern="0" dirty="0">
+            <a:pPr marL="0" indent="0">
+              <a:buNone/>
+            </a:pPr>
+            <a:r>
+              <a:rPr lang="en-US" sz="1200" b="1" kern="0" spc="300" dirty="0">
                 <a:solidFill>
                   <a:srgbClr val="1C7293"/>
                 </a:solidFill>
@@ -28617,7 +28325,7 @@
           <a:bodyPr wrap="square" lIns="0" tIns="0" rIns="0" bIns="0" rtlCol="0" anchor="ctr"/>
           <a:lstStyle/>
           <a:p>
-            <a:pPr indent="0" marL="0">
+            <a:pPr marL="0" indent="0">
               <a:buNone/>
             </a:pPr>
             <a:r>
@@ -28656,7 +28364,7 @@
           <a:bodyPr wrap="square" lIns="0" tIns="0" rIns="0" bIns="0" rtlCol="0" anchor="ctr"/>
           <a:lstStyle/>
           <a:p>
-            <a:pPr indent="0" marL="0">
+            <a:pPr marL="0" indent="0">
               <a:buNone/>
             </a:pPr>
             <a:r>
@@ -28717,7 +28425,7 @@
           <a:bodyPr wrap="square" lIns="0" tIns="0" rIns="0" bIns="0" rtlCol="0" anchor="ctr"/>
           <a:lstStyle/>
           <a:p>
-            <a:pPr algn="ctr" indent="0" marL="0">
+            <a:pPr marL="0" indent="0" algn="ctr">
               <a:buNone/>
             </a:pPr>
             <a:r>
@@ -28756,7 +28464,7 @@
           <a:bodyPr wrap="square" lIns="0" tIns="0" rIns="0" bIns="0" rtlCol="0" anchor="ctr"/>
           <a:lstStyle/>
           <a:p>
-            <a:pPr algn="ctr" indent="0" marL="0">
+            <a:pPr marL="0" indent="0" algn="ctr">
               <a:buNone/>
             </a:pPr>
             <a:r>
@@ -28798,7 +28506,7 @@
             <a:prstDash val="solid"/>
           </a:ln>
           <a:effectLst>
-            <a:outerShdw sx="100000" sy="100000" kx="0" ky="0" algn="bl" rotWithShape="0" blurRad="114300" dist="38100" dir="8100000">
+            <a:outerShdw blurRad="114300" dist="38100" dir="8100000" algn="bl" rotWithShape="0">
               <a:srgbClr val="0B3C49">
                 <a:alpha val="12000"/>
               </a:srgbClr>
@@ -28847,7 +28555,7 @@
           <a:bodyPr wrap="square" lIns="0" tIns="0" rIns="0" bIns="0" rtlCol="0" anchor="ctr"/>
           <a:lstStyle/>
           <a:p>
-            <a:pPr indent="0" marL="0">
+            <a:pPr marL="0" indent="0">
               <a:buNone/>
             </a:pPr>
             <a:r>
@@ -28974,7 +28682,7 @@
             <a:prstDash val="solid"/>
           </a:ln>
           <a:effectLst>
-            <a:outerShdw sx="100000" sy="100000" kx="0" ky="0" algn="bl" rotWithShape="0" blurRad="114300" dist="38100" dir="8100000">
+            <a:outerShdw blurRad="114300" dist="38100" dir="8100000" algn="bl" rotWithShape="0">
               <a:srgbClr val="0B3C49">
                 <a:alpha val="12000"/>
               </a:srgbClr>
@@ -29023,7 +28731,7 @@
           <a:bodyPr wrap="square" lIns="0" tIns="0" rIns="0" bIns="0" rtlCol="0" anchor="ctr"/>
           <a:lstStyle/>
           <a:p>
-            <a:pPr indent="0" marL="0">
+            <a:pPr marL="0" indent="0">
               <a:buNone/>
             </a:pPr>
             <a:r>
@@ -29150,7 +28858,7 @@
             <a:prstDash val="solid"/>
           </a:ln>
           <a:effectLst>
-            <a:outerShdw sx="100000" sy="100000" kx="0" ky="0" algn="bl" rotWithShape="0" blurRad="114300" dist="38100" dir="8100000">
+            <a:outerShdw blurRad="114300" dist="38100" dir="8100000" algn="bl" rotWithShape="0">
               <a:srgbClr val="0B3C49">
                 <a:alpha val="12000"/>
               </a:srgbClr>
@@ -29199,7 +28907,7 @@
           <a:bodyPr wrap="square" lIns="0" tIns="0" rIns="0" bIns="0" rtlCol="0" anchor="ctr"/>
           <a:lstStyle/>
           <a:p>
-            <a:pPr indent="0" marL="0">
+            <a:pPr marL="0" indent="0">
               <a:buNone/>
             </a:pPr>
             <a:r>
@@ -29326,7 +29034,7 @@
             <a:prstDash val="solid"/>
           </a:ln>
           <a:effectLst>
-            <a:outerShdw sx="100000" sy="100000" kx="0" ky="0" algn="bl" rotWithShape="0" blurRad="114300" dist="38100" dir="8100000">
+            <a:outerShdw blurRad="114300" dist="38100" dir="8100000" algn="bl" rotWithShape="0">
               <a:srgbClr val="0B3C49">
                 <a:alpha val="12000"/>
               </a:srgbClr>
@@ -29375,7 +29083,7 @@
           <a:bodyPr wrap="square" lIns="0" tIns="0" rIns="0" bIns="0" rtlCol="0" anchor="ctr"/>
           <a:lstStyle/>
           <a:p>
-            <a:pPr indent="0" marL="0">
+            <a:pPr marL="0" indent="0">
               <a:buNone/>
             </a:pPr>
             <a:r>
@@ -29499,7 +29207,7 @@
           <a:bodyPr wrap="square" lIns="0" tIns="0" rIns="0" bIns="0" rtlCol="0" anchor="t"/>
           <a:lstStyle/>
           <a:p>
-            <a:pPr indent="0" marL="0">
+            <a:pPr marL="0" indent="0">
               <a:buNone/>
             </a:pPr>
             <a:r>
@@ -29513,9 +29221,6 @@
               </a:rPr>
               <a:t>来源  </a:t>
             </a:r>
-            <a:pPr indent="0" marL="0">
-              <a:buNone/>
-            </a:pPr>
             <a:r>
               <a:rPr lang="en-US" sz="900" i="1" dirty="0">
                 <a:solidFill>
@@ -29527,9 +29232,6 @@
               </a:rPr>
               <a:t>PredIG, Genome Medicine 2025</a:t>
             </a:r>
-            <a:pPr indent="0" marL="0">
-              <a:buNone/>
-            </a:pPr>
             <a:r>
               <a:rPr lang="en-US" sz="900" i="1" u="sng" dirty="0">
                 <a:solidFill>
@@ -29538,7 +29240,7 @@
                 <a:latin typeface="Microsoft YaHei" pitchFamily="34" charset="0"/>
                 <a:ea typeface="Microsoft YaHei" pitchFamily="34" charset="-122"/>
                 <a:cs typeface="Microsoft YaHei" pitchFamily="34" charset="-120"/>
-                <a:hlinkClick r:id="rId1" invalidUrl="" action="" tgtFrame="" tooltip="DOI" history="1" highlightClick="0" endSnd="0">
+                <a:hlinkClick r:id="rId3" tooltip="DOI">
                   <a:extLst>
                     <a:ext uri="{A12FA001-AC4F-418D-AE19-62706E023703}">
                       <ahyp:hlinkClr xmlns:ahyp="http://schemas.microsoft.com/office/drawing/2018/hyperlinkcolor" val="tx"/>
@@ -29548,9 +29250,6 @@
               </a:rPr>
               <a:t> · DOI 10.1186/s13073-025-01569-8</a:t>
             </a:r>
-            <a:pPr indent="0" marL="0">
-              <a:buNone/>
-            </a:pPr>
             <a:r>
               <a:rPr lang="en-US" sz="900" i="1" u="sng" dirty="0">
                 <a:solidFill>
@@ -29559,7 +29258,7 @@
                 <a:latin typeface="Microsoft YaHei" pitchFamily="34" charset="0"/>
                 <a:ea typeface="Microsoft YaHei" pitchFamily="34" charset="-122"/>
                 <a:cs typeface="Microsoft YaHei" pitchFamily="34" charset="-120"/>
-                <a:hlinkClick r:id="rId2" invalidUrl="" action="" tgtFrame="" tooltip="repo" history="1" highlightClick="0" endSnd="0">
+                <a:hlinkClick r:id="rId4" tooltip="repo">
                   <a:extLst>
                     <a:ext uri="{A12FA001-AC4F-418D-AE19-62706E023703}">
                       <ahyp:hlinkClr xmlns:ahyp="http://schemas.microsoft.com/office/drawing/2018/hyperlinkcolor" val="tx"/>
@@ -29594,7 +29293,7 @@
           <a:bodyPr wrap="square" lIns="0" tIns="0" rIns="0" bIns="0" rtlCol="0" anchor="ctr"/>
           <a:lstStyle/>
           <a:p>
-            <a:pPr algn="r" indent="0" marL="0">
+            <a:pPr marL="0" indent="0" algn="r">
               <a:buNone/>
             </a:pPr>
             <a:r>
@@ -29628,6 +29327,7 @@
         <a:solidFill>
           <a:srgbClr val="F2F7F7"/>
         </a:solidFill>
+        <a:effectLst/>
       </p:bgPr>
     </p:bg>
     <p:spTree>
@@ -29685,11 +29385,11 @@
           <a:bodyPr wrap="square" lIns="0" tIns="0" rIns="0" bIns="0" rtlCol="0" anchor="ctr"/>
           <a:lstStyle/>
           <a:p>
-            <a:pPr indent="0" marL="0">
-              <a:buNone/>
-            </a:pPr>
-            <a:r>
-              <a:rPr lang="en-US" sz="1200" b="1" spc="300" kern="0" dirty="0">
+            <a:pPr marL="0" indent="0">
+              <a:buNone/>
+            </a:pPr>
+            <a:r>
+              <a:rPr lang="en-US" sz="1200" b="1" kern="0" spc="300" dirty="0">
                 <a:solidFill>
                   <a:srgbClr val="028090"/>
                 </a:solidFill>
@@ -29724,7 +29424,7 @@
           <a:bodyPr wrap="square" lIns="0" tIns="0" rIns="0" bIns="0" rtlCol="0" anchor="ctr"/>
           <a:lstStyle/>
           <a:p>
-            <a:pPr indent="0" marL="0">
+            <a:pPr marL="0" indent="0">
               <a:buNone/>
             </a:pPr>
             <a:r>
@@ -29763,7 +29463,7 @@
           <a:bodyPr wrap="square" lIns="0" tIns="0" rIns="0" bIns="0" rtlCol="0" anchor="ctr"/>
           <a:lstStyle/>
           <a:p>
-            <a:pPr indent="0" marL="0">
+            <a:pPr marL="0" indent="0">
               <a:buNone/>
             </a:pPr>
             <a:r>
@@ -29805,7 +29505,7 @@
             <a:prstDash val="solid"/>
           </a:ln>
           <a:effectLst>
-            <a:outerShdw sx="100000" sy="100000" kx="0" ky="0" algn="bl" rotWithShape="0" blurRad="114300" dist="38100" dir="8100000">
+            <a:outerShdw blurRad="114300" dist="38100" dir="8100000" algn="bl" rotWithShape="0">
               <a:srgbClr val="0B3C49">
                 <a:alpha val="12000"/>
               </a:srgbClr>
@@ -29834,7 +29534,7 @@
           <a:bodyPr wrap="square" lIns="0" tIns="0" rIns="0" bIns="0" rtlCol="0" anchor="ctr"/>
           <a:lstStyle/>
           <a:p>
-            <a:pPr indent="0" marL="0">
+            <a:pPr marL="0" indent="0">
               <a:buNone/>
             </a:pPr>
             <a:r>
@@ -29873,7 +29573,7 @@
           <a:bodyPr wrap="square" lIns="0" tIns="0" rIns="0" bIns="0" rtlCol="0" anchor="t"/>
           <a:lstStyle/>
           <a:p>
-            <a:pPr indent="0" marL="0">
+            <a:pPr marL="0" indent="0">
               <a:lnSpc>
                 <a:spcPct val="115000"/>
               </a:lnSpc>
@@ -29915,7 +29615,7 @@
           <a:bodyPr wrap="square" lIns="0" tIns="0" rIns="0" bIns="0" rtlCol="0" anchor="ctr"/>
           <a:lstStyle/>
           <a:p>
-            <a:pPr indent="0" marL="0">
+            <a:pPr marL="0" indent="0">
               <a:buNone/>
             </a:pPr>
             <a:r>
@@ -29954,7 +29654,7 @@
           <a:bodyPr wrap="square" lIns="0" tIns="0" rIns="0" bIns="0" rtlCol="0" anchor="t"/>
           <a:lstStyle/>
           <a:p>
-            <a:pPr indent="0" marL="0">
+            <a:pPr marL="0" indent="0">
               <a:lnSpc>
                 <a:spcPct val="115000"/>
               </a:lnSpc>
@@ -29996,7 +29696,7 @@
           <a:bodyPr wrap="square" lIns="0" tIns="0" rIns="0" bIns="0" rtlCol="0" anchor="ctr"/>
           <a:lstStyle/>
           <a:p>
-            <a:pPr indent="0" marL="0">
+            <a:pPr marL="0" indent="0">
               <a:buNone/>
             </a:pPr>
             <a:r>
@@ -30035,7 +29735,7 @@
           <a:bodyPr wrap="square" lIns="0" tIns="0" rIns="0" bIns="0" rtlCol="0" anchor="t"/>
           <a:lstStyle/>
           <a:p>
-            <a:pPr indent="0" marL="0">
+            <a:pPr marL="0" indent="0">
               <a:lnSpc>
                 <a:spcPct val="115000"/>
               </a:lnSpc>
@@ -30077,7 +29777,7 @@
           </a:solidFill>
           <a:ln/>
           <a:effectLst>
-            <a:outerShdw sx="100000" sy="100000" kx="0" ky="0" algn="bl" rotWithShape="0" blurRad="114300" dist="38100" dir="8100000">
+            <a:outerShdw blurRad="114300" dist="38100" dir="8100000" algn="bl" rotWithShape="0">
               <a:srgbClr val="0B3C49">
                 <a:alpha val="12000"/>
               </a:srgbClr>
@@ -30106,7 +29806,7 @@
           <a:bodyPr wrap="square" lIns="0" tIns="0" rIns="0" bIns="0" rtlCol="0" anchor="ctr"/>
           <a:lstStyle/>
           <a:p>
-            <a:pPr indent="0" marL="0">
+            <a:pPr marL="0" indent="0">
               <a:buNone/>
             </a:pPr>
             <a:r>
@@ -30145,7 +29845,7 @@
           <a:bodyPr wrap="square" lIns="0" tIns="0" rIns="0" bIns="0" rtlCol="0" anchor="t"/>
           <a:lstStyle/>
           <a:p>
-            <a:pPr indent="0" marL="0">
+            <a:pPr marL="0" indent="0">
               <a:spcAft>
                 <a:spcPts val="100"/>
               </a:spcAft>
@@ -30165,7 +29865,7 @@
             <a:endParaRPr lang="en-US" sz="900" dirty="0"/>
           </a:p>
           <a:p>
-            <a:pPr indent="0" marL="0">
+            <a:pPr marL="0" indent="0">
               <a:spcAft>
                 <a:spcPts val="100"/>
               </a:spcAft>
@@ -30185,7 +29885,7 @@
             <a:endParaRPr lang="en-US" sz="900" dirty="0"/>
           </a:p>
           <a:p>
-            <a:pPr indent="0" marL="0">
+            <a:pPr marL="0" indent="0">
               <a:spcAft>
                 <a:spcPts val="100"/>
               </a:spcAft>
@@ -30205,7 +29905,7 @@
             <a:endParaRPr lang="en-US" sz="900" dirty="0"/>
           </a:p>
           <a:p>
-            <a:pPr indent="0" marL="0">
+            <a:pPr marL="0" indent="0">
               <a:spcAft>
                 <a:spcPts val="100"/>
               </a:spcAft>
@@ -30247,7 +29947,7 @@
           </a:solidFill>
           <a:ln/>
           <a:effectLst>
-            <a:outerShdw sx="100000" sy="100000" kx="0" ky="0" algn="bl" rotWithShape="0" blurRad="114300" dist="38100" dir="8100000">
+            <a:outerShdw blurRad="114300" dist="38100" dir="8100000" algn="bl" rotWithShape="0">
               <a:srgbClr val="0B3C49">
                 <a:alpha val="12000"/>
               </a:srgbClr>
@@ -30276,7 +29976,7 @@
           <a:bodyPr wrap="square" lIns="0" tIns="0" rIns="0" bIns="0" rtlCol="0" anchor="ctr"/>
           <a:lstStyle/>
           <a:p>
-            <a:pPr indent="0" marL="0">
+            <a:pPr marL="0" indent="0">
               <a:buNone/>
             </a:pPr>
             <a:r>
@@ -30315,7 +30015,7 @@
           <a:bodyPr wrap="square" lIns="0" tIns="0" rIns="0" bIns="0" rtlCol="0" anchor="t"/>
           <a:lstStyle/>
           <a:p>
-            <a:pPr indent="0" marL="0">
+            <a:pPr marL="0" indent="0">
               <a:spcAft>
                 <a:spcPts val="100"/>
               </a:spcAft>
@@ -30335,7 +30035,7 @@
             <a:endParaRPr lang="en-US" sz="900" dirty="0"/>
           </a:p>
           <a:p>
-            <a:pPr indent="0" marL="0">
+            <a:pPr marL="0" indent="0">
               <a:spcAft>
                 <a:spcPts val="100"/>
               </a:spcAft>
@@ -30355,7 +30055,7 @@
             <a:endParaRPr lang="en-US" sz="900" dirty="0"/>
           </a:p>
           <a:p>
-            <a:pPr indent="0" marL="0">
+            <a:pPr marL="0" indent="0">
               <a:spcAft>
                 <a:spcPts val="100"/>
               </a:spcAft>
@@ -30397,7 +30097,7 @@
           </a:solidFill>
           <a:ln/>
           <a:effectLst>
-            <a:outerShdw sx="100000" sy="100000" kx="0" ky="0" algn="bl" rotWithShape="0" blurRad="114300" dist="38100" dir="8100000">
+            <a:outerShdw blurRad="114300" dist="38100" dir="8100000" algn="bl" rotWithShape="0">
               <a:srgbClr val="0B3C49">
                 <a:alpha val="12000"/>
               </a:srgbClr>
@@ -30426,7 +30126,7 @@
           <a:bodyPr wrap="square" lIns="0" tIns="0" rIns="0" bIns="0" rtlCol="0" anchor="ctr"/>
           <a:lstStyle/>
           <a:p>
-            <a:pPr indent="0" marL="0">
+            <a:pPr marL="0" indent="0">
               <a:buNone/>
             </a:pPr>
             <a:r>
@@ -30465,7 +30165,7 @@
           <a:bodyPr wrap="square" lIns="0" tIns="0" rIns="0" bIns="0" rtlCol="0" anchor="t"/>
           <a:lstStyle/>
           <a:p>
-            <a:pPr indent="0" marL="0">
+            <a:pPr marL="0" indent="0">
               <a:spcAft>
                 <a:spcPts val="100"/>
               </a:spcAft>
@@ -30485,7 +30185,7 @@
             <a:endParaRPr lang="en-US" sz="900" dirty="0"/>
           </a:p>
           <a:p>
-            <a:pPr indent="0" marL="0">
+            <a:pPr marL="0" indent="0">
               <a:spcAft>
                 <a:spcPts val="100"/>
               </a:spcAft>
@@ -30505,7 +30205,7 @@
             <a:endParaRPr lang="en-US" sz="900" dirty="0"/>
           </a:p>
           <a:p>
-            <a:pPr indent="0" marL="0">
+            <a:pPr marL="0" indent="0">
               <a:spcAft>
                 <a:spcPts val="100"/>
               </a:spcAft>
@@ -30547,7 +30247,7 @@
           <a:bodyPr wrap="square" lIns="0" tIns="0" rIns="0" bIns="0" rtlCol="0" anchor="t"/>
           <a:lstStyle/>
           <a:p>
-            <a:pPr indent="0" marL="0">
+            <a:pPr marL="0" indent="0">
               <a:buNone/>
             </a:pPr>
             <a:r>
@@ -30561,9 +30261,6 @@
               </a:rPr>
               <a:t>来源  </a:t>
             </a:r>
-            <a:pPr indent="0" marL="0">
-              <a:buNone/>
-            </a:pPr>
             <a:r>
               <a:rPr lang="en-US" sz="900" i="1" dirty="0">
                 <a:solidFill>
@@ -30575,9 +30272,6 @@
               </a:rPr>
               <a:t>pTuneos, Genome Medicine 2019</a:t>
             </a:r>
-            <a:pPr indent="0" marL="0">
-              <a:buNone/>
-            </a:pPr>
             <a:r>
               <a:rPr lang="en-US" sz="900" i="1" u="sng" dirty="0">
                 <a:solidFill>
@@ -30586,7 +30280,7 @@
                 <a:latin typeface="Microsoft YaHei" pitchFamily="34" charset="0"/>
                 <a:ea typeface="Microsoft YaHei" pitchFamily="34" charset="-122"/>
                 <a:cs typeface="Microsoft YaHei" pitchFamily="34" charset="-120"/>
-                <a:hlinkClick r:id="rId1" invalidUrl="" action="" tgtFrame="" tooltip="DOI" history="1" highlightClick="0" endSnd="0">
+                <a:hlinkClick r:id="rId3" tooltip="DOI">
                   <a:extLst>
                     <a:ext uri="{A12FA001-AC4F-418D-AE19-62706E023703}">
                       <ahyp:hlinkClr xmlns:ahyp="http://schemas.microsoft.com/office/drawing/2018/hyperlinkcolor" val="tx"/>
@@ -30596,9 +30290,6 @@
               </a:rPr>
               <a:t> · DOI 10.1186/s13073-019-0679-x</a:t>
             </a:r>
-            <a:pPr indent="0" marL="0">
-              <a:buNone/>
-            </a:pPr>
             <a:r>
               <a:rPr lang="en-US" sz="900" i="1" u="sng" dirty="0">
                 <a:solidFill>
@@ -30607,7 +30298,7 @@
                 <a:latin typeface="Microsoft YaHei" pitchFamily="34" charset="0"/>
                 <a:ea typeface="Microsoft YaHei" pitchFamily="34" charset="-122"/>
                 <a:cs typeface="Microsoft YaHei" pitchFamily="34" charset="-120"/>
-                <a:hlinkClick r:id="rId2" invalidUrl="" action="" tgtFrame="" tooltip="repo" history="1" highlightClick="0" endSnd="0">
+                <a:hlinkClick r:id="rId4" tooltip="repo">
                   <a:extLst>
                     <a:ext uri="{A12FA001-AC4F-418D-AE19-62706E023703}">
                       <ahyp:hlinkClr xmlns:ahyp="http://schemas.microsoft.com/office/drawing/2018/hyperlinkcolor" val="tx"/>
@@ -30642,7 +30333,7 @@
           <a:bodyPr wrap="square" lIns="0" tIns="0" rIns="0" bIns="0" rtlCol="0" anchor="ctr"/>
           <a:lstStyle/>
           <a:p>
-            <a:pPr algn="r" indent="0" marL="0">
+            <a:pPr marL="0" indent="0" algn="r">
               <a:buNone/>
             </a:pPr>
             <a:r>
@@ -30961,4 +30652,319 @@
     </a:ext>
   </a:extLst>
 </a:theme>
+</file>
+
+<file path=ppt/theme/theme2.xml><?xml version="1.0" encoding="utf-8"?>
+<a:theme xmlns:a="http://schemas.openxmlformats.org/drawingml/2006/main" name="Office 主题​​">
+  <a:themeElements>
+    <a:clrScheme name="Office">
+      <a:dk1>
+        <a:sysClr val="windowText" lastClr="000000"/>
+      </a:dk1>
+      <a:lt1>
+        <a:sysClr val="window" lastClr="FFFFFF"/>
+      </a:lt1>
+      <a:dk2>
+        <a:srgbClr val="0E2841"/>
+      </a:dk2>
+      <a:lt2>
+        <a:srgbClr val="E8E8E8"/>
+      </a:lt2>
+      <a:accent1>
+        <a:srgbClr val="156082"/>
+      </a:accent1>
+      <a:accent2>
+        <a:srgbClr val="E97132"/>
+      </a:accent2>
+      <a:accent3>
+        <a:srgbClr val="196B24"/>
+      </a:accent3>
+      <a:accent4>
+        <a:srgbClr val="0F9ED5"/>
+      </a:accent4>
+      <a:accent5>
+        <a:srgbClr val="A02B93"/>
+      </a:accent5>
+      <a:accent6>
+        <a:srgbClr val="4EA72E"/>
+      </a:accent6>
+      <a:hlink>
+        <a:srgbClr val="467886"/>
+      </a:hlink>
+      <a:folHlink>
+        <a:srgbClr val="96607D"/>
+      </a:folHlink>
+    </a:clrScheme>
+    <a:fontScheme name="Office">
+      <a:majorFont>
+        <a:latin typeface="等线 Light" panose="02110004020202020204"/>
+        <a:ea typeface=""/>
+        <a:cs typeface=""/>
+        <a:font script="Jpan" typeface="游ゴシック Light"/>
+        <a:font script="Hang" typeface="맑은 고딕"/>
+        <a:font script="Hans" typeface="等线 Light"/>
+        <a:font script="Hant" typeface="新細明體"/>
+        <a:font script="Arab" typeface="Times New Roman"/>
+        <a:font script="Hebr" typeface="Times New Roman"/>
+        <a:font script="Thai" typeface="Angsana New"/>
+        <a:font script="Ethi" typeface="Nyala"/>
+        <a:font script="Beng" typeface="Vrinda"/>
+        <a:font script="Gujr" typeface="Shruti"/>
+        <a:font script="Khmr" typeface="MoolBoran"/>
+        <a:font script="Knda" typeface="Tunga"/>
+        <a:font script="Guru" typeface="Raavi"/>
+        <a:font script="Cans" typeface="Euphemia"/>
+        <a:font script="Cher" typeface="Plantagenet Cherokee"/>
+        <a:font script="Yiii" typeface="Microsoft Yi Baiti"/>
+        <a:font script="Tibt" typeface="Microsoft Himalaya"/>
+        <a:font script="Thaa" typeface="MV Boli"/>
+        <a:font script="Deva" typeface="Mangal"/>
+        <a:font script="Telu" typeface="Gautami"/>
+        <a:font script="Taml" typeface="Latha"/>
+        <a:font script="Syrc" typeface="Estrangelo Edessa"/>
+        <a:font script="Orya" typeface="Kalinga"/>
+        <a:font script="Mlym" typeface="Kartika"/>
+        <a:font script="Laoo" typeface="DokChampa"/>
+        <a:font script="Sinh" typeface="Iskoola Pota"/>
+        <a:font script="Mong" typeface="Mongolian Baiti"/>
+        <a:font script="Viet" typeface="Times New Roman"/>
+        <a:font script="Uigh" typeface="Microsoft Uighur"/>
+        <a:font script="Geor" typeface="Sylfaen"/>
+        <a:font script="Armn" typeface="Arial"/>
+        <a:font script="Bugi" typeface="Leelawadee UI"/>
+        <a:font script="Bopo" typeface="Microsoft JhengHei"/>
+        <a:font script="Java" typeface="Javanese Text"/>
+        <a:font script="Lisu" typeface="Segoe UI"/>
+        <a:font script="Mymr" typeface="Myanmar Text"/>
+        <a:font script="Nkoo" typeface="Ebrima"/>
+        <a:font script="Olck" typeface="Nirmala UI"/>
+        <a:font script="Osma" typeface="Ebrima"/>
+        <a:font script="Phag" typeface="Phagspa"/>
+        <a:font script="Syrn" typeface="Estrangelo Edessa"/>
+        <a:font script="Syrj" typeface="Estrangelo Edessa"/>
+        <a:font script="Syre" typeface="Estrangelo Edessa"/>
+        <a:font script="Sora" typeface="Nirmala UI"/>
+        <a:font script="Tale" typeface="Microsoft Tai Le"/>
+        <a:font script="Talu" typeface="Microsoft New Tai Lue"/>
+        <a:font script="Tfng" typeface="Ebrima"/>
+      </a:majorFont>
+      <a:minorFont>
+        <a:latin typeface="等线" panose="02110004020202020204"/>
+        <a:ea typeface=""/>
+        <a:cs typeface=""/>
+        <a:font script="Jpan" typeface="游ゴシック"/>
+        <a:font script="Hang" typeface="맑은 고딕"/>
+        <a:font script="Hans" typeface="等线"/>
+        <a:font script="Hant" typeface="新細明體"/>
+        <a:font script="Arab" typeface="Arial"/>
+        <a:font script="Hebr" typeface="Arial"/>
+        <a:font script="Thai" typeface="Cordia New"/>
+        <a:font script="Ethi" typeface="Nyala"/>
+        <a:font script="Beng" typeface="Vrinda"/>
+        <a:font script="Gujr" typeface="Shruti"/>
+        <a:font script="Khmr" typeface="DaunPenh"/>
+        <a:font script="Knda" typeface="Tunga"/>
+        <a:font script="Guru" typeface="Raavi"/>
+        <a:font script="Cans" typeface="Euphemia"/>
+        <a:font script="Cher" typeface="Plantagenet Cherokee"/>
+        <a:font script="Yiii" typeface="Microsoft Yi Baiti"/>
+        <a:font script="Tibt" typeface="Microsoft Himalaya"/>
+        <a:font script="Thaa" typeface="MV Boli"/>
+        <a:font script="Deva" typeface="Mangal"/>
+        <a:font script="Telu" typeface="Gautami"/>
+        <a:font script="Taml" typeface="Latha"/>
+        <a:font script="Syrc" typeface="Estrangelo Edessa"/>
+        <a:font script="Orya" typeface="Kalinga"/>
+        <a:font script="Mlym" typeface="Kartika"/>
+        <a:font script="Laoo" typeface="DokChampa"/>
+        <a:font script="Sinh" typeface="Iskoola Pota"/>
+        <a:font script="Mong" typeface="Mongolian Baiti"/>
+        <a:font script="Viet" typeface="Arial"/>
+        <a:font script="Uigh" typeface="Microsoft Uighur"/>
+        <a:font script="Geor" typeface="Sylfaen"/>
+        <a:font script="Armn" typeface="Arial"/>
+        <a:font script="Bugi" typeface="Leelawadee UI"/>
+        <a:font script="Bopo" typeface="Microsoft JhengHei"/>
+        <a:font script="Java" typeface="Javanese Text"/>
+        <a:font script="Lisu" typeface="Segoe UI"/>
+        <a:font script="Mymr" typeface="Myanmar Text"/>
+        <a:font script="Nkoo" typeface="Ebrima"/>
+        <a:font script="Olck" typeface="Nirmala UI"/>
+        <a:font script="Osma" typeface="Ebrima"/>
+        <a:font script="Phag" typeface="Phagspa"/>
+        <a:font script="Syrn" typeface="Estrangelo Edessa"/>
+        <a:font script="Syrj" typeface="Estrangelo Edessa"/>
+        <a:font script="Syre" typeface="Estrangelo Edessa"/>
+        <a:font script="Sora" typeface="Nirmala UI"/>
+        <a:font script="Tale" typeface="Microsoft Tai Le"/>
+        <a:font script="Talu" typeface="Microsoft New Tai Lue"/>
+        <a:font script="Tfng" typeface="Ebrima"/>
+      </a:minorFont>
+    </a:fontScheme>
+    <a:fmtScheme name="Office">
+      <a:fillStyleLst>
+        <a:solidFill>
+          <a:schemeClr val="phClr"/>
+        </a:solidFill>
+        <a:gradFill rotWithShape="1">
+          <a:gsLst>
+            <a:gs pos="0">
+              <a:schemeClr val="phClr">
+                <a:lumMod val="110000"/>
+                <a:satMod val="105000"/>
+                <a:tint val="67000"/>
+              </a:schemeClr>
+            </a:gs>
+            <a:gs pos="50000">
+              <a:schemeClr val="phClr">
+                <a:lumMod val="105000"/>
+                <a:satMod val="103000"/>
+                <a:tint val="73000"/>
+              </a:schemeClr>
+            </a:gs>
+            <a:gs pos="100000">
+              <a:schemeClr val="phClr">
+                <a:lumMod val="105000"/>
+                <a:satMod val="109000"/>
+                <a:tint val="81000"/>
+              </a:schemeClr>
+            </a:gs>
+          </a:gsLst>
+          <a:lin ang="5400000" scaled="0"/>
+        </a:gradFill>
+        <a:gradFill rotWithShape="1">
+          <a:gsLst>
+            <a:gs pos="0">
+              <a:schemeClr val="phClr">
+                <a:satMod val="103000"/>
+                <a:lumMod val="102000"/>
+                <a:tint val="94000"/>
+              </a:schemeClr>
+            </a:gs>
+            <a:gs pos="50000">
+              <a:schemeClr val="phClr">
+                <a:satMod val="110000"/>
+                <a:lumMod val="100000"/>
+                <a:shade val="100000"/>
+              </a:schemeClr>
+            </a:gs>
+            <a:gs pos="100000">
+              <a:schemeClr val="phClr">
+                <a:lumMod val="99000"/>
+                <a:satMod val="120000"/>
+                <a:shade val="78000"/>
+              </a:schemeClr>
+            </a:gs>
+          </a:gsLst>
+          <a:lin ang="5400000" scaled="0"/>
+        </a:gradFill>
+      </a:fillStyleLst>
+      <a:lnStyleLst>
+        <a:ln w="12700" cap="flat" cmpd="sng" algn="ctr">
+          <a:solidFill>
+            <a:schemeClr val="phClr"/>
+          </a:solidFill>
+          <a:prstDash val="solid"/>
+          <a:miter lim="800000"/>
+        </a:ln>
+        <a:ln w="19050" cap="flat" cmpd="sng" algn="ctr">
+          <a:solidFill>
+            <a:schemeClr val="phClr"/>
+          </a:solidFill>
+          <a:prstDash val="solid"/>
+          <a:miter lim="800000"/>
+        </a:ln>
+        <a:ln w="25400" cap="flat" cmpd="sng" algn="ctr">
+          <a:solidFill>
+            <a:schemeClr val="phClr"/>
+          </a:solidFill>
+          <a:prstDash val="solid"/>
+          <a:miter lim="800000"/>
+        </a:ln>
+      </a:lnStyleLst>
+      <a:effectStyleLst>
+        <a:effectStyle>
+          <a:effectLst/>
+        </a:effectStyle>
+        <a:effectStyle>
+          <a:effectLst/>
+        </a:effectStyle>
+        <a:effectStyle>
+          <a:effectLst>
+            <a:outerShdw blurRad="57150" dist="19050" dir="5400000" algn="ctr" rotWithShape="0">
+              <a:srgbClr val="000000">
+                <a:alpha val="63000"/>
+              </a:srgbClr>
+            </a:outerShdw>
+          </a:effectLst>
+        </a:effectStyle>
+      </a:effectStyleLst>
+      <a:bgFillStyleLst>
+        <a:solidFill>
+          <a:schemeClr val="phClr"/>
+        </a:solidFill>
+        <a:solidFill>
+          <a:schemeClr val="phClr">
+            <a:tint val="95000"/>
+            <a:satMod val="170000"/>
+          </a:schemeClr>
+        </a:solidFill>
+        <a:gradFill rotWithShape="1">
+          <a:gsLst>
+            <a:gs pos="0">
+              <a:schemeClr val="phClr">
+                <a:tint val="93000"/>
+                <a:satMod val="150000"/>
+                <a:shade val="98000"/>
+                <a:lumMod val="102000"/>
+              </a:schemeClr>
+            </a:gs>
+            <a:gs pos="50000">
+              <a:schemeClr val="phClr">
+                <a:tint val="98000"/>
+                <a:satMod val="130000"/>
+                <a:shade val="90000"/>
+                <a:lumMod val="103000"/>
+              </a:schemeClr>
+            </a:gs>
+            <a:gs pos="100000">
+              <a:schemeClr val="phClr">
+                <a:shade val="63000"/>
+                <a:satMod val="120000"/>
+              </a:schemeClr>
+            </a:gs>
+          </a:gsLst>
+          <a:lin ang="5400000" scaled="0"/>
+        </a:gradFill>
+      </a:bgFillStyleLst>
+    </a:fmtScheme>
+  </a:themeElements>
+  <a:objectDefaults>
+    <a:lnDef>
+      <a:spPr/>
+      <a:bodyPr/>
+      <a:lstStyle/>
+      <a:style>
+        <a:lnRef idx="2">
+          <a:schemeClr val="accent1"/>
+        </a:lnRef>
+        <a:fillRef idx="0">
+          <a:schemeClr val="accent1"/>
+        </a:fillRef>
+        <a:effectRef idx="1">
+          <a:schemeClr val="accent1"/>
+        </a:effectRef>
+        <a:fontRef idx="minor">
+          <a:schemeClr val="tx1"/>
+        </a:fontRef>
+      </a:style>
+    </a:lnDef>
+  </a:objectDefaults>
+  <a:extraClrSchemeLst/>
+  <a:extLst>
+    <a:ext uri="{05A4C25C-085E-4340-85A3-A5531E510DB2}">
+      <thm15:themeFamily xmlns:thm15="http://schemas.microsoft.com/office/thememl/2012/main" name="Office Theme" id="{2E142A2C-CD16-42D6-873A-C26D2A0506FA}" vid="{1BDDFF52-6CD6-40A5-AB3C-68EB2F1E4D0A}"/>
+    </a:ext>
+  </a:extLst>
+</a:theme>
 </file>